--- a/Olam_Agri_Meilisearch_Executive_Pitch.pptx
+++ b/Olam_Agri_Meilisearch_Executive_Pitch.pptx
@@ -3110,7 +3110,7 @@
             <a:avLst/>
           </a:prstGeom>
           <a:solidFill>
-            <a:srgbClr val="14532D"/>
+            <a:srgbClr val="184E34"/>
           </a:solidFill>
           <a:ln>
             <a:noFill/>
@@ -3146,8 +3146,8 @@
         </p:nvSpPr>
         <p:spPr>
           <a:xfrm>
-            <a:off x="640080" y="182880"/>
-            <a:ext cx="10972800" cy="411480"/>
+            <a:off x="640080" y="146304"/>
+            <a:ext cx="10972800" cy="384048"/>
           </a:xfrm>
           <a:prstGeom prst="rect">
             <a:avLst/>
@@ -3155,14 +3155,24 @@
           <a:noFill/>
         </p:spPr>
         <p:txBody>
-          <a:bodyPr wrap="none">
+          <a:bodyPr wrap="square" lIns="18288" rIns="18288" tIns="9144" bIns="9144" anchor="t">
             <a:spAutoFit/>
           </a:bodyPr>
           <a:lstStyle/>
           <a:p>
-            <a:pPr algn="l"/>
-            <a:r>
-              <a:rPr sz="3000" b="1">
+            <a:pPr algn="l">
+              <a:lnSpc>
+                <a:spcPct val="112000"/>
+              </a:lnSpc>
+              <a:spcBef>
+                <a:spcPts val="0"/>
+              </a:spcBef>
+              <a:spcAft>
+                <a:spcPts val="0"/>
+              </a:spcAft>
+            </a:pPr>
+            <a:r>
+              <a:rPr sz="2800" b="1">
                 <a:solidFill>
                   <a:srgbClr val="FFFFFF"/>
                 </a:solidFill>
@@ -3181,8 +3191,8 @@
         </p:nvSpPr>
         <p:spPr>
           <a:xfrm>
-            <a:off x="640080" y="566928"/>
-            <a:ext cx="10972800" cy="274320"/>
+            <a:off x="640080" y="530352"/>
+            <a:ext cx="10972800" cy="256032"/>
           </a:xfrm>
           <a:prstGeom prst="rect">
             <a:avLst/>
@@ -3190,16 +3200,26 @@
           <a:noFill/>
         </p:spPr>
         <p:txBody>
-          <a:bodyPr wrap="none">
+          <a:bodyPr wrap="square" lIns="18288" rIns="18288" tIns="9144" bIns="9144" anchor="t">
             <a:spAutoFit/>
           </a:bodyPr>
           <a:lstStyle/>
           <a:p>
-            <a:pPr algn="l"/>
-            <a:r>
-              <a:rPr sz="1500" b="0">
-                <a:solidFill>
-                  <a:srgbClr val="DCEBE0"/>
+            <a:pPr algn="l">
+              <a:lnSpc>
+                <a:spcPct val="112000"/>
+              </a:lnSpc>
+              <a:spcBef>
+                <a:spcPts val="0"/>
+              </a:spcBef>
+              <a:spcAft>
+                <a:spcPts val="0"/>
+              </a:spcAft>
+            </a:pPr>
+            <a:r>
+              <a:rPr sz="1400" b="0">
+                <a:solidFill>
+                  <a:srgbClr val="DDEAE2"/>
                 </a:solidFill>
                 <a:latin typeface="Segoe UI"/>
               </a:rPr>
@@ -3216,18 +3236,18 @@
         </p:nvSpPr>
         <p:spPr>
           <a:xfrm>
-            <a:off x="822960" y="1828800"/>
-            <a:ext cx="10515600" cy="3474720"/>
+            <a:off x="822960" y="1554480"/>
+            <a:ext cx="10515600" cy="4206240"/>
           </a:xfrm>
           <a:prstGeom prst="roundRect">
             <a:avLst/>
           </a:prstGeom>
           <a:solidFill>
-            <a:srgbClr val="F5F9F6"/>
+            <a:srgbClr val="F5F8F6"/>
           </a:solidFill>
           <a:ln>
             <a:solidFill>
-              <a:srgbClr val="D0D9D2"/>
+              <a:srgbClr val="CED8D1"/>
             </a:solidFill>
           </a:ln>
         </p:spPr>
@@ -3261,8 +3281,8 @@
         </p:nvSpPr>
         <p:spPr>
           <a:xfrm>
-            <a:off x="1280160" y="2468880"/>
-            <a:ext cx="9601200" cy="914400"/>
+            <a:off x="1280160" y="2377440"/>
+            <a:ext cx="9692640" cy="914400"/>
           </a:xfrm>
           <a:prstGeom prst="rect">
             <a:avLst/>
@@ -3270,16 +3290,26 @@
           <a:noFill/>
         </p:spPr>
         <p:txBody>
-          <a:bodyPr wrap="none">
+          <a:bodyPr wrap="square" lIns="18288" rIns="18288" tIns="9144" bIns="9144" anchor="t">
             <a:spAutoFit/>
           </a:bodyPr>
           <a:lstStyle/>
           <a:p>
-            <a:pPr algn="ctr"/>
+            <a:pPr algn="ctr">
+              <a:lnSpc>
+                <a:spcPct val="112000"/>
+              </a:lnSpc>
+              <a:spcBef>
+                <a:spcPts val="0"/>
+              </a:spcBef>
+              <a:spcAft>
+                <a:spcPts val="0"/>
+              </a:spcAft>
+            </a:pPr>
             <a:r>
               <a:rPr sz="4200" b="1">
                 <a:solidFill>
-                  <a:srgbClr val="14532D"/>
+                  <a:srgbClr val="184E34"/>
                 </a:solidFill>
                 <a:latin typeface="Segoe UI"/>
               </a:rPr>
@@ -3296,8 +3326,8 @@
         </p:nvSpPr>
         <p:spPr>
           <a:xfrm>
-            <a:off x="1280160" y="3840480"/>
-            <a:ext cx="9601200" cy="548640"/>
+            <a:off x="1280160" y="3749039"/>
+            <a:ext cx="9692640" cy="594360"/>
           </a:xfrm>
           <a:prstGeom prst="rect">
             <a:avLst/>
@@ -3305,16 +3335,26 @@
           <a:noFill/>
         </p:spPr>
         <p:txBody>
-          <a:bodyPr wrap="none">
+          <a:bodyPr wrap="square" lIns="18288" rIns="18288" tIns="9144" bIns="9144" anchor="t">
             <a:spAutoFit/>
           </a:bodyPr>
           <a:lstStyle/>
           <a:p>
-            <a:pPr algn="ctr"/>
-            <a:r>
-              <a:rPr sz="2000" b="1">
-                <a:solidFill>
-                  <a:srgbClr val="8C6E55"/>
+            <a:pPr algn="ctr">
+              <a:lnSpc>
+                <a:spcPct val="112000"/>
+              </a:lnSpc>
+              <a:spcBef>
+                <a:spcPts val="0"/>
+              </a:spcBef>
+              <a:spcAft>
+                <a:spcPts val="0"/>
+              </a:spcAft>
+            </a:pPr>
+            <a:r>
+              <a:rPr sz="2100" b="1">
+                <a:solidFill>
+                  <a:srgbClr val="78624E"/>
                 </a:solidFill>
                 <a:latin typeface="Segoe UI"/>
               </a:rPr>
@@ -3356,7 +3396,7 @@
             <a:avLst/>
           </a:prstGeom>
           <a:solidFill>
-            <a:srgbClr val="14532D"/>
+            <a:srgbClr val="184E34"/>
           </a:solidFill>
           <a:ln>
             <a:noFill/>
@@ -3392,8 +3432,8 @@
         </p:nvSpPr>
         <p:spPr>
           <a:xfrm>
-            <a:off x="640080" y="182880"/>
-            <a:ext cx="10972800" cy="411480"/>
+            <a:off x="640080" y="146304"/>
+            <a:ext cx="10972800" cy="384048"/>
           </a:xfrm>
           <a:prstGeom prst="rect">
             <a:avLst/>
@@ -3401,14 +3441,24 @@
           <a:noFill/>
         </p:spPr>
         <p:txBody>
-          <a:bodyPr wrap="none">
+          <a:bodyPr wrap="square" lIns="18288" rIns="18288" tIns="9144" bIns="9144" anchor="t">
             <a:spAutoFit/>
           </a:bodyPr>
           <a:lstStyle/>
           <a:p>
-            <a:pPr algn="l"/>
-            <a:r>
-              <a:rPr sz="3000" b="1">
+            <a:pPr algn="l">
+              <a:lnSpc>
+                <a:spcPct val="112000"/>
+              </a:lnSpc>
+              <a:spcBef>
+                <a:spcPts val="0"/>
+              </a:spcBef>
+              <a:spcAft>
+                <a:spcPts val="0"/>
+              </a:spcAft>
+            </a:pPr>
+            <a:r>
+              <a:rPr sz="2800" b="1">
                 <a:solidFill>
                   <a:srgbClr val="FFFFFF"/>
                 </a:solidFill>
@@ -3427,8 +3477,8 @@
         </p:nvSpPr>
         <p:spPr>
           <a:xfrm>
-            <a:off x="640080" y="566928"/>
-            <a:ext cx="10972800" cy="274320"/>
+            <a:off x="640080" y="530352"/>
+            <a:ext cx="10972800" cy="256032"/>
           </a:xfrm>
           <a:prstGeom prst="rect">
             <a:avLst/>
@@ -3436,16 +3486,26 @@
           <a:noFill/>
         </p:spPr>
         <p:txBody>
-          <a:bodyPr wrap="none">
+          <a:bodyPr wrap="square" lIns="18288" rIns="18288" tIns="9144" bIns="9144" anchor="t">
             <a:spAutoFit/>
           </a:bodyPr>
           <a:lstStyle/>
           <a:p>
-            <a:pPr algn="l"/>
-            <a:r>
-              <a:rPr sz="1500" b="0">
-                <a:solidFill>
-                  <a:srgbClr val="DCEBE0"/>
+            <a:pPr algn="l">
+              <a:lnSpc>
+                <a:spcPct val="112000"/>
+              </a:lnSpc>
+              <a:spcBef>
+                <a:spcPts val="0"/>
+              </a:spcBef>
+              <a:spcAft>
+                <a:spcPts val="0"/>
+              </a:spcAft>
+            </a:pPr>
+            <a:r>
+              <a:rPr sz="1400" b="0">
+                <a:solidFill>
+                  <a:srgbClr val="DDEAE2"/>
                 </a:solidFill>
                 <a:latin typeface="Segoe UI"/>
               </a:rPr>
@@ -3462,8 +3522,8 @@
         </p:nvSpPr>
         <p:spPr>
           <a:xfrm>
-            <a:off x="731520" y="1280160"/>
-            <a:ext cx="5486400" cy="2103120"/>
+            <a:off x="640080" y="1234440"/>
+            <a:ext cx="5623560" cy="2514600"/>
           </a:xfrm>
           <a:prstGeom prst="roundRect">
             <a:avLst/>
@@ -3471,9 +3531,9 @@
           <a:solidFill>
             <a:srgbClr val="FFFFFF"/>
           </a:solidFill>
-          <a:ln w="15240">
+          <a:ln w="12700">
             <a:solidFill>
-              <a:srgbClr val="D0D9D2"/>
+              <a:srgbClr val="CED8D1"/>
             </a:solidFill>
           </a:ln>
         </p:spPr>
@@ -3501,130 +3561,23 @@
       </p:sp>
       <p:sp>
         <p:nvSpPr>
-          <p:cNvPr id="6" name="TextBox 5"/>
-          <p:cNvSpPr txBox="1"/>
-          <p:nvPr/>
-        </p:nvSpPr>
-        <p:spPr>
-          <a:xfrm>
-            <a:off x="914400" y="1444751"/>
-            <a:ext cx="548640" cy="365760"/>
-          </a:xfrm>
-          <a:prstGeom prst="rect">
-            <a:avLst/>
-          </a:prstGeom>
-          <a:noFill/>
-        </p:spPr>
-        <p:txBody>
-          <a:bodyPr wrap="none">
-            <a:spAutoFit/>
-          </a:bodyPr>
-          <a:lstStyle/>
-          <a:p>
-            <a:pPr algn="l"/>
-            <a:r>
-              <a:rPr sz="2000" b="1">
-                <a:solidFill>
-                  <a:srgbClr val="2E7D32"/>
-                </a:solidFill>
-                <a:latin typeface="Segoe UI"/>
-              </a:rPr>
-              <a:t>⚡</a:t>
-            </a:r>
-          </a:p>
-        </p:txBody>
-      </p:sp>
-      <p:sp>
-        <p:nvSpPr>
-          <p:cNvPr id="7" name="TextBox 6"/>
-          <p:cNvSpPr txBox="1"/>
-          <p:nvPr/>
-        </p:nvSpPr>
-        <p:spPr>
-          <a:xfrm>
-            <a:off x="1508760" y="1417319"/>
-            <a:ext cx="4526280" cy="365760"/>
-          </a:xfrm>
-          <a:prstGeom prst="rect">
-            <a:avLst/>
-          </a:prstGeom>
-          <a:noFill/>
-        </p:spPr>
-        <p:txBody>
-          <a:bodyPr wrap="none">
-            <a:spAutoFit/>
-          </a:bodyPr>
-          <a:lstStyle/>
-          <a:p>
-            <a:pPr algn="l"/>
-            <a:r>
-              <a:rPr sz="1600" b="1">
-                <a:solidFill>
-                  <a:srgbClr val="14532D"/>
-                </a:solidFill>
-                <a:latin typeface="Segoe UI"/>
-              </a:rPr>
-              <a:t>Core Identity</a:t>
-            </a:r>
-          </a:p>
-        </p:txBody>
-      </p:sp>
-      <p:sp>
-        <p:nvSpPr>
-          <p:cNvPr id="8" name="TextBox 7"/>
-          <p:cNvSpPr txBox="1"/>
-          <p:nvPr/>
-        </p:nvSpPr>
-        <p:spPr>
-          <a:xfrm>
-            <a:off x="960120" y="1810512"/>
-            <a:ext cx="5074920" cy="1417319"/>
-          </a:xfrm>
-          <a:prstGeom prst="rect">
-            <a:avLst/>
-          </a:prstGeom>
-          <a:noFill/>
-        </p:spPr>
-        <p:txBody>
-          <a:bodyPr wrap="none">
-            <a:spAutoFit/>
-          </a:bodyPr>
-          <a:lstStyle/>
-          <a:p>
-            <a:pPr algn="l"/>
-            <a:r>
-              <a:rPr sz="1200">
-                <a:solidFill>
-                  <a:srgbClr val="212D38"/>
-                </a:solidFill>
-                <a:latin typeface="Segoe UI"/>
-              </a:rPr>
-              <a:t>An open source, lightning fast search engine written in the Rust programming language.</a:t>
-            </a:r>
-          </a:p>
-        </p:txBody>
-      </p:sp>
-      <p:sp>
-        <p:nvSpPr>
-          <p:cNvPr id="9" name="Rounded Rectangle 8"/>
+          <p:cNvPr id="6" name="Oval 5"/>
           <p:cNvSpPr/>
           <p:nvPr/>
         </p:nvSpPr>
         <p:spPr>
           <a:xfrm>
-            <a:off x="6355080" y="1280160"/>
-            <a:ext cx="5120640" cy="2103120"/>
-          </a:xfrm>
-          <a:prstGeom prst="roundRect">
+            <a:off x="804671" y="1399032"/>
+            <a:ext cx="502920" cy="502920"/>
+          </a:xfrm>
+          <a:prstGeom prst="ellipse">
             <a:avLst/>
           </a:prstGeom>
           <a:solidFill>
-            <a:srgbClr val="FFFFFF"/>
+            <a:srgbClr val="2C7A4E"/>
           </a:solidFill>
-          <a:ln w="15240">
-            <a:solidFill>
-              <a:srgbClr val="D0D9D2"/>
-            </a:solidFill>
+          <a:ln>
+            <a:noFill/>
           </a:ln>
         </p:spPr>
         <p:style>
@@ -3651,14 +3604,14 @@
       </p:sp>
       <p:sp>
         <p:nvSpPr>
-          <p:cNvPr id="10" name="TextBox 9"/>
+          <p:cNvPr id="7" name="TextBox 6"/>
           <p:cNvSpPr txBox="1"/>
           <p:nvPr/>
         </p:nvSpPr>
         <p:spPr>
           <a:xfrm>
-            <a:off x="6537960" y="1444751"/>
-            <a:ext cx="548640" cy="365760"/>
+            <a:off x="804671" y="1527048"/>
+            <a:ext cx="502920" cy="182880"/>
           </a:xfrm>
           <a:prstGeom prst="rect">
             <a:avLst/>
@@ -3666,34 +3619,44 @@
           <a:noFill/>
         </p:spPr>
         <p:txBody>
-          <a:bodyPr wrap="none">
+          <a:bodyPr wrap="square" lIns="18288" rIns="18288" tIns="9144" bIns="9144" anchor="t">
             <a:spAutoFit/>
           </a:bodyPr>
           <a:lstStyle/>
           <a:p>
-            <a:pPr algn="l"/>
-            <a:r>
-              <a:rPr sz="2000" b="1">
-                <a:solidFill>
-                  <a:srgbClr val="2E7D32"/>
+            <a:pPr algn="ctr">
+              <a:lnSpc>
+                <a:spcPct val="112000"/>
+              </a:lnSpc>
+              <a:spcBef>
+                <a:spcPts val="0"/>
+              </a:spcBef>
+              <a:spcAft>
+                <a:spcPts val="0"/>
+              </a:spcAft>
+            </a:pPr>
+            <a:r>
+              <a:rPr sz="1000" b="1">
+                <a:solidFill>
+                  <a:srgbClr val="FFFFFF"/>
                 </a:solidFill>
                 <a:latin typeface="Segoe UI"/>
               </a:rPr>
-              <a:t>🎯</a:t>
-            </a:r>
-          </a:p>
-        </p:txBody>
-      </p:sp>
-      <p:sp>
-        <p:nvSpPr>
-          <p:cNvPr id="11" name="TextBox 10"/>
+              <a:t>CID</a:t>
+            </a:r>
+          </a:p>
+        </p:txBody>
+      </p:sp>
+      <p:sp>
+        <p:nvSpPr>
+          <p:cNvPr id="8" name="TextBox 7"/>
           <p:cNvSpPr txBox="1"/>
           <p:nvPr/>
         </p:nvSpPr>
         <p:spPr>
           <a:xfrm>
-            <a:off x="7132320" y="1417319"/>
-            <a:ext cx="4160520" cy="365760"/>
+            <a:off x="1389888" y="1399032"/>
+            <a:ext cx="4709160" cy="365760"/>
           </a:xfrm>
           <a:prstGeom prst="rect">
             <a:avLst/>
@@ -3701,34 +3664,44 @@
           <a:noFill/>
         </p:spPr>
         <p:txBody>
-          <a:bodyPr wrap="none">
+          <a:bodyPr wrap="square" lIns="18288" rIns="18288" tIns="9144" bIns="9144" anchor="t">
             <a:spAutoFit/>
           </a:bodyPr>
           <a:lstStyle/>
           <a:p>
-            <a:pPr algn="l"/>
-            <a:r>
-              <a:rPr sz="1600" b="1">
-                <a:solidFill>
-                  <a:srgbClr val="14532D"/>
+            <a:pPr algn="l">
+              <a:lnSpc>
+                <a:spcPct val="112000"/>
+              </a:lnSpc>
+              <a:spcBef>
+                <a:spcPts val="0"/>
+              </a:spcBef>
+              <a:spcAft>
+                <a:spcPts val="0"/>
+              </a:spcAft>
+            </a:pPr>
+            <a:r>
+              <a:rPr sz="1500" b="1">
+                <a:solidFill>
+                  <a:srgbClr val="184E34"/>
                 </a:solidFill>
                 <a:latin typeface="Segoe UI"/>
               </a:rPr>
-              <a:t>Primary Goal</a:t>
-            </a:r>
-          </a:p>
-        </p:txBody>
-      </p:sp>
-      <p:sp>
-        <p:nvSpPr>
-          <p:cNvPr id="12" name="TextBox 11"/>
+              <a:t>Core Identity</a:t>
+            </a:r>
+          </a:p>
+        </p:txBody>
+      </p:sp>
+      <p:sp>
+        <p:nvSpPr>
+          <p:cNvPr id="9" name="TextBox 8"/>
           <p:cNvSpPr txBox="1"/>
           <p:nvPr/>
         </p:nvSpPr>
         <p:spPr>
           <a:xfrm>
-            <a:off x="6583680" y="1810512"/>
-            <a:ext cx="4709159" cy="1417319"/>
+            <a:off x="822959" y="1892808"/>
+            <a:ext cx="5303520" cy="1728216"/>
           </a:xfrm>
           <a:prstGeom prst="rect">
             <a:avLst/>
@@ -3736,34 +3709,44 @@
           <a:noFill/>
         </p:spPr>
         <p:txBody>
-          <a:bodyPr wrap="none">
+          <a:bodyPr wrap="square" lIns="18288" rIns="18288" tIns="9144" bIns="9144" anchor="t">
             <a:spAutoFit/>
           </a:bodyPr>
           <a:lstStyle/>
           <a:p>
-            <a:pPr algn="l"/>
-            <a:r>
-              <a:rPr sz="1200">
+            <a:pPr algn="l">
+              <a:lnSpc>
+                <a:spcPct val="112000"/>
+              </a:lnSpc>
+              <a:spcBef>
+                <a:spcPts val="0"/>
+              </a:spcBef>
+              <a:spcAft>
+                <a:spcPts val="0"/>
+              </a:spcAft>
+            </a:pPr>
+            <a:r>
+              <a:rPr sz="1200" b="0">
                 <a:solidFill>
                   <a:srgbClr val="212D38"/>
                 </a:solidFill>
                 <a:latin typeface="Segoe UI"/>
               </a:rPr>
-              <a:t>Delivering highly relevant search results to users in under 50 milliseconds.</a:t>
-            </a:r>
-          </a:p>
-        </p:txBody>
-      </p:sp>
-      <p:sp>
-        <p:nvSpPr>
-          <p:cNvPr id="13" name="Rounded Rectangle 12"/>
+              <a:t>An open source, lightning fast search engine written in the Rust programming language.</a:t>
+            </a:r>
+          </a:p>
+        </p:txBody>
+      </p:sp>
+      <p:sp>
+        <p:nvSpPr>
+          <p:cNvPr id="10" name="Rounded Rectangle 9"/>
           <p:cNvSpPr/>
           <p:nvPr/>
         </p:nvSpPr>
         <p:spPr>
           <a:xfrm>
-            <a:off x="731520" y="3611880"/>
-            <a:ext cx="5486400" cy="2377440"/>
+            <a:off x="6355080" y="1234440"/>
+            <a:ext cx="5166360" cy="2514600"/>
           </a:xfrm>
           <a:prstGeom prst="roundRect">
             <a:avLst/>
@@ -3771,9 +3754,9 @@
           <a:solidFill>
             <a:srgbClr val="FFFFFF"/>
           </a:solidFill>
-          <a:ln w="15240">
+          <a:ln w="12700">
             <a:solidFill>
-              <a:srgbClr val="D0D9D2"/>
+              <a:srgbClr val="CED8D1"/>
             </a:solidFill>
           </a:ln>
         </p:spPr>
@@ -3801,130 +3784,23 @@
       </p:sp>
       <p:sp>
         <p:nvSpPr>
-          <p:cNvPr id="14" name="TextBox 13"/>
-          <p:cNvSpPr txBox="1"/>
-          <p:nvPr/>
-        </p:nvSpPr>
-        <p:spPr>
-          <a:xfrm>
-            <a:off x="914400" y="3776472"/>
-            <a:ext cx="548640" cy="365760"/>
-          </a:xfrm>
-          <a:prstGeom prst="rect">
-            <a:avLst/>
-          </a:prstGeom>
-          <a:noFill/>
-        </p:spPr>
-        <p:txBody>
-          <a:bodyPr wrap="none">
-            <a:spAutoFit/>
-          </a:bodyPr>
-          <a:lstStyle/>
-          <a:p>
-            <a:pPr algn="l"/>
-            <a:r>
-              <a:rPr sz="2000" b="1">
-                <a:solidFill>
-                  <a:srgbClr val="2E7D32"/>
-                </a:solidFill>
-                <a:latin typeface="Segoe UI"/>
-              </a:rPr>
-              <a:t>🧠</a:t>
-            </a:r>
-          </a:p>
-        </p:txBody>
-      </p:sp>
-      <p:sp>
-        <p:nvSpPr>
-          <p:cNvPr id="15" name="TextBox 14"/>
-          <p:cNvSpPr txBox="1"/>
-          <p:nvPr/>
-        </p:nvSpPr>
-        <p:spPr>
-          <a:xfrm>
-            <a:off x="1508760" y="3749040"/>
-            <a:ext cx="4526280" cy="365760"/>
-          </a:xfrm>
-          <a:prstGeom prst="rect">
-            <a:avLst/>
-          </a:prstGeom>
-          <a:noFill/>
-        </p:spPr>
-        <p:txBody>
-          <a:bodyPr wrap="none">
-            <a:spAutoFit/>
-          </a:bodyPr>
-          <a:lstStyle/>
-          <a:p>
-            <a:pPr algn="l"/>
-            <a:r>
-              <a:rPr sz="1600" b="1">
-                <a:solidFill>
-                  <a:srgbClr val="14532D"/>
-                </a:solidFill>
-                <a:latin typeface="Segoe UI"/>
-              </a:rPr>
-              <a:t>Modern Features</a:t>
-            </a:r>
-          </a:p>
-        </p:txBody>
-      </p:sp>
-      <p:sp>
-        <p:nvSpPr>
-          <p:cNvPr id="16" name="TextBox 15"/>
-          <p:cNvSpPr txBox="1"/>
-          <p:nvPr/>
-        </p:nvSpPr>
-        <p:spPr>
-          <a:xfrm>
-            <a:off x="960120" y="4142232"/>
-            <a:ext cx="5074920" cy="1691640"/>
-          </a:xfrm>
-          <a:prstGeom prst="rect">
-            <a:avLst/>
-          </a:prstGeom>
-          <a:noFill/>
-        </p:spPr>
-        <p:txBody>
-          <a:bodyPr wrap="none">
-            <a:spAutoFit/>
-          </a:bodyPr>
-          <a:lstStyle/>
-          <a:p>
-            <a:pPr algn="l"/>
-            <a:r>
-              <a:rPr sz="1200">
-                <a:solidFill>
-                  <a:srgbClr val="212D38"/>
-                </a:solidFill>
-                <a:latin typeface="Segoe UI"/>
-              </a:rPr>
-              <a:t>Includes built in typo tolerance and native hybrid search (combining exact keyword matches with AI semantic search) right out of the box.</a:t>
-            </a:r>
-          </a:p>
-        </p:txBody>
-      </p:sp>
-      <p:sp>
-        <p:nvSpPr>
-          <p:cNvPr id="17" name="Rounded Rectangle 16"/>
+          <p:cNvPr id="11" name="Oval 10"/>
           <p:cNvSpPr/>
           <p:nvPr/>
         </p:nvSpPr>
         <p:spPr>
           <a:xfrm>
-            <a:off x="6355080" y="3611880"/>
-            <a:ext cx="5120640" cy="2377440"/>
-          </a:xfrm>
-          <a:prstGeom prst="roundRect">
+            <a:off x="6519672" y="1399032"/>
+            <a:ext cx="502920" cy="502920"/>
+          </a:xfrm>
+          <a:prstGeom prst="ellipse">
             <a:avLst/>
           </a:prstGeom>
           <a:solidFill>
-            <a:srgbClr val="FFFFFF"/>
+            <a:srgbClr val="2C7A4E"/>
           </a:solidFill>
-          <a:ln w="15240">
-            <a:solidFill>
-              <a:srgbClr val="D0D9D2"/>
-            </a:solidFill>
+          <a:ln>
+            <a:noFill/>
           </a:ln>
         </p:spPr>
         <p:style>
@@ -3951,14 +3827,282 @@
       </p:sp>
       <p:sp>
         <p:nvSpPr>
+          <p:cNvPr id="12" name="TextBox 11"/>
+          <p:cNvSpPr txBox="1"/>
+          <p:nvPr/>
+        </p:nvSpPr>
+        <p:spPr>
+          <a:xfrm>
+            <a:off x="6519672" y="1527048"/>
+            <a:ext cx="502920" cy="182880"/>
+          </a:xfrm>
+          <a:prstGeom prst="rect">
+            <a:avLst/>
+          </a:prstGeom>
+          <a:noFill/>
+        </p:spPr>
+        <p:txBody>
+          <a:bodyPr wrap="square" lIns="18288" rIns="18288" tIns="9144" bIns="9144" anchor="t">
+            <a:spAutoFit/>
+          </a:bodyPr>
+          <a:lstStyle/>
+          <a:p>
+            <a:pPr algn="ctr">
+              <a:lnSpc>
+                <a:spcPct val="112000"/>
+              </a:lnSpc>
+              <a:spcBef>
+                <a:spcPts val="0"/>
+              </a:spcBef>
+              <a:spcAft>
+                <a:spcPts val="0"/>
+              </a:spcAft>
+            </a:pPr>
+            <a:r>
+              <a:rPr sz="1000" b="1">
+                <a:solidFill>
+                  <a:srgbClr val="FFFFFF"/>
+                </a:solidFill>
+                <a:latin typeface="Segoe UI"/>
+              </a:rPr>
+              <a:t>GOAL</a:t>
+            </a:r>
+          </a:p>
+        </p:txBody>
+      </p:sp>
+      <p:sp>
+        <p:nvSpPr>
+          <p:cNvPr id="13" name="TextBox 12"/>
+          <p:cNvSpPr txBox="1"/>
+          <p:nvPr/>
+        </p:nvSpPr>
+        <p:spPr>
+          <a:xfrm>
+            <a:off x="7104888" y="1399032"/>
+            <a:ext cx="4251960" cy="365760"/>
+          </a:xfrm>
+          <a:prstGeom prst="rect">
+            <a:avLst/>
+          </a:prstGeom>
+          <a:noFill/>
+        </p:spPr>
+        <p:txBody>
+          <a:bodyPr wrap="square" lIns="18288" rIns="18288" tIns="9144" bIns="9144" anchor="t">
+            <a:spAutoFit/>
+          </a:bodyPr>
+          <a:lstStyle/>
+          <a:p>
+            <a:pPr algn="l">
+              <a:lnSpc>
+                <a:spcPct val="112000"/>
+              </a:lnSpc>
+              <a:spcBef>
+                <a:spcPts val="0"/>
+              </a:spcBef>
+              <a:spcAft>
+                <a:spcPts val="0"/>
+              </a:spcAft>
+            </a:pPr>
+            <a:r>
+              <a:rPr sz="1500" b="1">
+                <a:solidFill>
+                  <a:srgbClr val="184E34"/>
+                </a:solidFill>
+                <a:latin typeface="Segoe UI"/>
+              </a:rPr>
+              <a:t>Primary Goal</a:t>
+            </a:r>
+          </a:p>
+        </p:txBody>
+      </p:sp>
+      <p:sp>
+        <p:nvSpPr>
+          <p:cNvPr id="14" name="TextBox 13"/>
+          <p:cNvSpPr txBox="1"/>
+          <p:nvPr/>
+        </p:nvSpPr>
+        <p:spPr>
+          <a:xfrm>
+            <a:off x="6537960" y="1892808"/>
+            <a:ext cx="4846320" cy="1728216"/>
+          </a:xfrm>
+          <a:prstGeom prst="rect">
+            <a:avLst/>
+          </a:prstGeom>
+          <a:noFill/>
+        </p:spPr>
+        <p:txBody>
+          <a:bodyPr wrap="square" lIns="18288" rIns="18288" tIns="9144" bIns="9144" anchor="t">
+            <a:spAutoFit/>
+          </a:bodyPr>
+          <a:lstStyle/>
+          <a:p>
+            <a:pPr algn="l">
+              <a:lnSpc>
+                <a:spcPct val="112000"/>
+              </a:lnSpc>
+              <a:spcBef>
+                <a:spcPts val="0"/>
+              </a:spcBef>
+              <a:spcAft>
+                <a:spcPts val="0"/>
+              </a:spcAft>
+            </a:pPr>
+            <a:r>
+              <a:rPr sz="1200" b="0">
+                <a:solidFill>
+                  <a:srgbClr val="212D38"/>
+                </a:solidFill>
+                <a:latin typeface="Segoe UI"/>
+              </a:rPr>
+              <a:t>Delivering highly relevant search results to users in under 50 milliseconds.</a:t>
+            </a:r>
+          </a:p>
+        </p:txBody>
+      </p:sp>
+      <p:sp>
+        <p:nvSpPr>
+          <p:cNvPr id="15" name="Rounded Rectangle 14"/>
+          <p:cNvSpPr/>
+          <p:nvPr/>
+        </p:nvSpPr>
+        <p:spPr>
+          <a:xfrm>
+            <a:off x="640080" y="3794760"/>
+            <a:ext cx="5623560" cy="2514600"/>
+          </a:xfrm>
+          <a:prstGeom prst="roundRect">
+            <a:avLst/>
+          </a:prstGeom>
+          <a:solidFill>
+            <a:srgbClr val="FFFFFF"/>
+          </a:solidFill>
+          <a:ln w="12700">
+            <a:solidFill>
+              <a:srgbClr val="CED8D1"/>
+            </a:solidFill>
+          </a:ln>
+        </p:spPr>
+        <p:style>
+          <a:lnRef idx="1">
+            <a:schemeClr val="accent1"/>
+          </a:lnRef>
+          <a:fillRef idx="3">
+            <a:schemeClr val="accent1"/>
+          </a:fillRef>
+          <a:effectRef idx="2">
+            <a:schemeClr val="accent1"/>
+          </a:effectRef>
+          <a:fontRef idx="minor">
+            <a:schemeClr val="lt1"/>
+          </a:fontRef>
+        </p:style>
+        <p:txBody>
+          <a:bodyPr rtlCol="0" anchor="ctr"/>
+          <a:lstStyle/>
+          <a:p>
+            <a:pPr algn="ctr"/>
+          </a:p>
+        </p:txBody>
+      </p:sp>
+      <p:sp>
+        <p:nvSpPr>
+          <p:cNvPr id="16" name="Oval 15"/>
+          <p:cNvSpPr/>
+          <p:nvPr/>
+        </p:nvSpPr>
+        <p:spPr>
+          <a:xfrm>
+            <a:off x="804671" y="3959352"/>
+            <a:ext cx="502920" cy="502920"/>
+          </a:xfrm>
+          <a:prstGeom prst="ellipse">
+            <a:avLst/>
+          </a:prstGeom>
+          <a:solidFill>
+            <a:srgbClr val="2C7A4E"/>
+          </a:solidFill>
+          <a:ln>
+            <a:noFill/>
+          </a:ln>
+        </p:spPr>
+        <p:style>
+          <a:lnRef idx="1">
+            <a:schemeClr val="accent1"/>
+          </a:lnRef>
+          <a:fillRef idx="3">
+            <a:schemeClr val="accent1"/>
+          </a:fillRef>
+          <a:effectRef idx="2">
+            <a:schemeClr val="accent1"/>
+          </a:effectRef>
+          <a:fontRef idx="minor">
+            <a:schemeClr val="lt1"/>
+          </a:fontRef>
+        </p:style>
+        <p:txBody>
+          <a:bodyPr rtlCol="0" anchor="ctr"/>
+          <a:lstStyle/>
+          <a:p>
+            <a:pPr algn="ctr"/>
+          </a:p>
+        </p:txBody>
+      </p:sp>
+      <p:sp>
+        <p:nvSpPr>
+          <p:cNvPr id="17" name="TextBox 16"/>
+          <p:cNvSpPr txBox="1"/>
+          <p:nvPr/>
+        </p:nvSpPr>
+        <p:spPr>
+          <a:xfrm>
+            <a:off x="804671" y="4087368"/>
+            <a:ext cx="502920" cy="182880"/>
+          </a:xfrm>
+          <a:prstGeom prst="rect">
+            <a:avLst/>
+          </a:prstGeom>
+          <a:noFill/>
+        </p:spPr>
+        <p:txBody>
+          <a:bodyPr wrap="square" lIns="18288" rIns="18288" tIns="9144" bIns="9144" anchor="t">
+            <a:spAutoFit/>
+          </a:bodyPr>
+          <a:lstStyle/>
+          <a:p>
+            <a:pPr algn="ctr">
+              <a:lnSpc>
+                <a:spcPct val="112000"/>
+              </a:lnSpc>
+              <a:spcBef>
+                <a:spcPts val="0"/>
+              </a:spcBef>
+              <a:spcAft>
+                <a:spcPts val="0"/>
+              </a:spcAft>
+            </a:pPr>
+            <a:r>
+              <a:rPr sz="1000" b="1">
+                <a:solidFill>
+                  <a:srgbClr val="FFFFFF"/>
+                </a:solidFill>
+                <a:latin typeface="Segoe UI"/>
+              </a:rPr>
+              <a:t>TECH</a:t>
+            </a:r>
+          </a:p>
+        </p:txBody>
+      </p:sp>
+      <p:sp>
+        <p:nvSpPr>
           <p:cNvPr id="18" name="TextBox 17"/>
           <p:cNvSpPr txBox="1"/>
           <p:nvPr/>
         </p:nvSpPr>
         <p:spPr>
           <a:xfrm>
-            <a:off x="6537960" y="3776472"/>
-            <a:ext cx="548640" cy="365760"/>
+            <a:off x="1389888" y="3959352"/>
+            <a:ext cx="4709160" cy="365760"/>
           </a:xfrm>
           <a:prstGeom prst="rect">
             <a:avLst/>
@@ -3966,51 +4110,26 @@
           <a:noFill/>
         </p:spPr>
         <p:txBody>
-          <a:bodyPr wrap="none">
+          <a:bodyPr wrap="square" lIns="18288" rIns="18288" tIns="9144" bIns="9144" anchor="t">
             <a:spAutoFit/>
           </a:bodyPr>
           <a:lstStyle/>
           <a:p>
-            <a:pPr algn="l"/>
-            <a:r>
-              <a:rPr sz="2000" b="1">
-                <a:solidFill>
-                  <a:srgbClr val="2E7D32"/>
-                </a:solidFill>
-                <a:latin typeface="Segoe UI"/>
-              </a:rPr>
-              <a:t>💾</a:t>
-            </a:r>
-          </a:p>
-        </p:txBody>
-      </p:sp>
-      <p:sp>
-        <p:nvSpPr>
-          <p:cNvPr id="19" name="TextBox 18"/>
-          <p:cNvSpPr txBox="1"/>
-          <p:nvPr/>
-        </p:nvSpPr>
-        <p:spPr>
-          <a:xfrm>
-            <a:off x="7132320" y="3749040"/>
-            <a:ext cx="4160520" cy="365760"/>
-          </a:xfrm>
-          <a:prstGeom prst="rect">
-            <a:avLst/>
-          </a:prstGeom>
-          <a:noFill/>
-        </p:spPr>
-        <p:txBody>
-          <a:bodyPr wrap="none">
-            <a:spAutoFit/>
-          </a:bodyPr>
-          <a:lstStyle/>
-          <a:p>
-            <a:pPr algn="l"/>
-            <a:r>
-              <a:rPr sz="1600" b="1">
-                <a:solidFill>
-                  <a:srgbClr val="14532D"/>
+            <a:pPr algn="l">
+              <a:lnSpc>
+                <a:spcPct val="112000"/>
+              </a:lnSpc>
+              <a:spcBef>
+                <a:spcPts val="0"/>
+              </a:spcBef>
+              <a:spcAft>
+                <a:spcPts val="0"/>
+              </a:spcAft>
+            </a:pPr>
+            <a:r>
+              <a:rPr sz="1500" b="1">
+                <a:solidFill>
+                  <a:srgbClr val="184E34"/>
                 </a:solidFill>
                 <a:latin typeface="Segoe UI"/>
               </a:rPr>
@@ -4021,14 +4140,14 @@
       </p:sp>
       <p:sp>
         <p:nvSpPr>
-          <p:cNvPr id="20" name="TextBox 19"/>
+          <p:cNvPr id="19" name="TextBox 18"/>
           <p:cNvSpPr txBox="1"/>
           <p:nvPr/>
         </p:nvSpPr>
         <p:spPr>
           <a:xfrm>
-            <a:off x="6583680" y="4142232"/>
-            <a:ext cx="4709159" cy="1691640"/>
+            <a:off x="822959" y="4453128"/>
+            <a:ext cx="5303520" cy="1728216"/>
           </a:xfrm>
           <a:prstGeom prst="rect">
             <a:avLst/>
@@ -4036,20 +4155,253 @@
           <a:noFill/>
         </p:spPr>
         <p:txBody>
-          <a:bodyPr wrap="none">
+          <a:bodyPr wrap="square" lIns="18288" rIns="18288" tIns="9144" bIns="9144" anchor="t">
             <a:spAutoFit/>
           </a:bodyPr>
           <a:lstStyle/>
           <a:p>
-            <a:pPr algn="l"/>
-            <a:r>
-              <a:rPr sz="1200">
+            <a:pPr algn="l">
+              <a:lnSpc>
+                <a:spcPct val="112000"/>
+              </a:lnSpc>
+              <a:spcBef>
+                <a:spcPts val="0"/>
+              </a:spcBef>
+              <a:spcAft>
+                <a:spcPts val="0"/>
+              </a:spcAft>
+            </a:pPr>
+            <a:r>
+              <a:rPr sz="1200" b="0">
                 <a:solidFill>
                   <a:srgbClr val="212D38"/>
                 </a:solidFill>
                 <a:latin typeface="Segoe UI"/>
               </a:rPr>
               <a:t>Uses a Lightning Memory Mapped Database (LMDB), meaning it reads directly from RAM for instant data retrieval.</a:t>
+            </a:r>
+          </a:p>
+        </p:txBody>
+      </p:sp>
+      <p:sp>
+        <p:nvSpPr>
+          <p:cNvPr id="20" name="Rounded Rectangle 19"/>
+          <p:cNvSpPr/>
+          <p:nvPr/>
+        </p:nvSpPr>
+        <p:spPr>
+          <a:xfrm>
+            <a:off x="6355080" y="3794760"/>
+            <a:ext cx="5166360" cy="2514600"/>
+          </a:xfrm>
+          <a:prstGeom prst="roundRect">
+            <a:avLst/>
+          </a:prstGeom>
+          <a:solidFill>
+            <a:srgbClr val="FFFFFF"/>
+          </a:solidFill>
+          <a:ln w="12700">
+            <a:solidFill>
+              <a:srgbClr val="CED8D1"/>
+            </a:solidFill>
+          </a:ln>
+        </p:spPr>
+        <p:style>
+          <a:lnRef idx="1">
+            <a:schemeClr val="accent1"/>
+          </a:lnRef>
+          <a:fillRef idx="3">
+            <a:schemeClr val="accent1"/>
+          </a:fillRef>
+          <a:effectRef idx="2">
+            <a:schemeClr val="accent1"/>
+          </a:effectRef>
+          <a:fontRef idx="minor">
+            <a:schemeClr val="lt1"/>
+          </a:fontRef>
+        </p:style>
+        <p:txBody>
+          <a:bodyPr rtlCol="0" anchor="ctr"/>
+          <a:lstStyle/>
+          <a:p>
+            <a:pPr algn="ctr"/>
+          </a:p>
+        </p:txBody>
+      </p:sp>
+      <p:sp>
+        <p:nvSpPr>
+          <p:cNvPr id="21" name="Oval 20"/>
+          <p:cNvSpPr/>
+          <p:nvPr/>
+        </p:nvSpPr>
+        <p:spPr>
+          <a:xfrm>
+            <a:off x="6519672" y="3959352"/>
+            <a:ext cx="502920" cy="502920"/>
+          </a:xfrm>
+          <a:prstGeom prst="ellipse">
+            <a:avLst/>
+          </a:prstGeom>
+          <a:solidFill>
+            <a:srgbClr val="2C7A4E"/>
+          </a:solidFill>
+          <a:ln>
+            <a:noFill/>
+          </a:ln>
+        </p:spPr>
+        <p:style>
+          <a:lnRef idx="1">
+            <a:schemeClr val="accent1"/>
+          </a:lnRef>
+          <a:fillRef idx="3">
+            <a:schemeClr val="accent1"/>
+          </a:fillRef>
+          <a:effectRef idx="2">
+            <a:schemeClr val="accent1"/>
+          </a:effectRef>
+          <a:fontRef idx="minor">
+            <a:schemeClr val="lt1"/>
+          </a:fontRef>
+        </p:style>
+        <p:txBody>
+          <a:bodyPr rtlCol="0" anchor="ctr"/>
+          <a:lstStyle/>
+          <a:p>
+            <a:pPr algn="ctr"/>
+          </a:p>
+        </p:txBody>
+      </p:sp>
+      <p:sp>
+        <p:nvSpPr>
+          <p:cNvPr id="22" name="TextBox 21"/>
+          <p:cNvSpPr txBox="1"/>
+          <p:nvPr/>
+        </p:nvSpPr>
+        <p:spPr>
+          <a:xfrm>
+            <a:off x="6519672" y="4087368"/>
+            <a:ext cx="502920" cy="182880"/>
+          </a:xfrm>
+          <a:prstGeom prst="rect">
+            <a:avLst/>
+          </a:prstGeom>
+          <a:noFill/>
+        </p:spPr>
+        <p:txBody>
+          <a:bodyPr wrap="square" lIns="18288" rIns="18288" tIns="9144" bIns="9144" anchor="t">
+            <a:spAutoFit/>
+          </a:bodyPr>
+          <a:lstStyle/>
+          <a:p>
+            <a:pPr algn="ctr">
+              <a:lnSpc>
+                <a:spcPct val="112000"/>
+              </a:lnSpc>
+              <a:spcBef>
+                <a:spcPts val="0"/>
+              </a:spcBef>
+              <a:spcAft>
+                <a:spcPts val="0"/>
+              </a:spcAft>
+            </a:pPr>
+            <a:r>
+              <a:rPr sz="1000" b="1">
+                <a:solidFill>
+                  <a:srgbClr val="FFFFFF"/>
+                </a:solidFill>
+                <a:latin typeface="Segoe UI"/>
+              </a:rPr>
+              <a:t>AI</a:t>
+            </a:r>
+          </a:p>
+        </p:txBody>
+      </p:sp>
+      <p:sp>
+        <p:nvSpPr>
+          <p:cNvPr id="23" name="TextBox 22"/>
+          <p:cNvSpPr txBox="1"/>
+          <p:nvPr/>
+        </p:nvSpPr>
+        <p:spPr>
+          <a:xfrm>
+            <a:off x="7104888" y="3959352"/>
+            <a:ext cx="4251960" cy="365760"/>
+          </a:xfrm>
+          <a:prstGeom prst="rect">
+            <a:avLst/>
+          </a:prstGeom>
+          <a:noFill/>
+        </p:spPr>
+        <p:txBody>
+          <a:bodyPr wrap="square" lIns="18288" rIns="18288" tIns="9144" bIns="9144" anchor="t">
+            <a:spAutoFit/>
+          </a:bodyPr>
+          <a:lstStyle/>
+          <a:p>
+            <a:pPr algn="l">
+              <a:lnSpc>
+                <a:spcPct val="112000"/>
+              </a:lnSpc>
+              <a:spcBef>
+                <a:spcPts val="0"/>
+              </a:spcBef>
+              <a:spcAft>
+                <a:spcPts val="0"/>
+              </a:spcAft>
+            </a:pPr>
+            <a:r>
+              <a:rPr sz="1500" b="1">
+                <a:solidFill>
+                  <a:srgbClr val="184E34"/>
+                </a:solidFill>
+                <a:latin typeface="Segoe UI"/>
+              </a:rPr>
+              <a:t>Modern Features</a:t>
+            </a:r>
+          </a:p>
+        </p:txBody>
+      </p:sp>
+      <p:sp>
+        <p:nvSpPr>
+          <p:cNvPr id="24" name="TextBox 23"/>
+          <p:cNvSpPr txBox="1"/>
+          <p:nvPr/>
+        </p:nvSpPr>
+        <p:spPr>
+          <a:xfrm>
+            <a:off x="6537960" y="4453128"/>
+            <a:ext cx="4846320" cy="1728216"/>
+          </a:xfrm>
+          <a:prstGeom prst="rect">
+            <a:avLst/>
+          </a:prstGeom>
+          <a:noFill/>
+        </p:spPr>
+        <p:txBody>
+          <a:bodyPr wrap="square" lIns="18288" rIns="18288" tIns="9144" bIns="9144" anchor="t">
+            <a:spAutoFit/>
+          </a:bodyPr>
+          <a:lstStyle/>
+          <a:p>
+            <a:pPr algn="l">
+              <a:lnSpc>
+                <a:spcPct val="112000"/>
+              </a:lnSpc>
+              <a:spcBef>
+                <a:spcPts val="0"/>
+              </a:spcBef>
+              <a:spcAft>
+                <a:spcPts val="0"/>
+              </a:spcAft>
+            </a:pPr>
+            <a:r>
+              <a:rPr sz="1200" b="0">
+                <a:solidFill>
+                  <a:srgbClr val="212D38"/>
+                </a:solidFill>
+                <a:latin typeface="Segoe UI"/>
+              </a:rPr>
+              <a:t>Includes built in typo tolerance and native hybrid search (combining exact keyword matches with AI semantic search) right out of the box.</a:t>
             </a:r>
           </a:p>
         </p:txBody>
@@ -4087,7 +4439,7 @@
             <a:avLst/>
           </a:prstGeom>
           <a:solidFill>
-            <a:srgbClr val="14532D"/>
+            <a:srgbClr val="184E34"/>
           </a:solidFill>
           <a:ln>
             <a:noFill/>
@@ -4123,8 +4475,8 @@
         </p:nvSpPr>
         <p:spPr>
           <a:xfrm>
-            <a:off x="640080" y="182880"/>
-            <a:ext cx="10972800" cy="411480"/>
+            <a:off x="640080" y="146304"/>
+            <a:ext cx="10972800" cy="384048"/>
           </a:xfrm>
           <a:prstGeom prst="rect">
             <a:avLst/>
@@ -4132,14 +4484,24 @@
           <a:noFill/>
         </p:spPr>
         <p:txBody>
-          <a:bodyPr wrap="none">
+          <a:bodyPr wrap="square" lIns="18288" rIns="18288" tIns="9144" bIns="9144" anchor="t">
             <a:spAutoFit/>
           </a:bodyPr>
           <a:lstStyle/>
           <a:p>
-            <a:pPr algn="l"/>
-            <a:r>
-              <a:rPr sz="3000" b="1">
+            <a:pPr algn="l">
+              <a:lnSpc>
+                <a:spcPct val="112000"/>
+              </a:lnSpc>
+              <a:spcBef>
+                <a:spcPts val="0"/>
+              </a:spcBef>
+              <a:spcAft>
+                <a:spcPts val="0"/>
+              </a:spcAft>
+            </a:pPr>
+            <a:r>
+              <a:rPr sz="2800" b="1">
                 <a:solidFill>
                   <a:srgbClr val="FFFFFF"/>
                 </a:solidFill>
@@ -4158,8 +4520,8 @@
         </p:nvSpPr>
         <p:spPr>
           <a:xfrm>
-            <a:off x="640080" y="566928"/>
-            <a:ext cx="10972800" cy="274320"/>
+            <a:off x="640080" y="530352"/>
+            <a:ext cx="10972800" cy="256032"/>
           </a:xfrm>
           <a:prstGeom prst="rect">
             <a:avLst/>
@@ -4167,16 +4529,26 @@
           <a:noFill/>
         </p:spPr>
         <p:txBody>
-          <a:bodyPr wrap="none">
+          <a:bodyPr wrap="square" lIns="18288" rIns="18288" tIns="9144" bIns="9144" anchor="t">
             <a:spAutoFit/>
           </a:bodyPr>
           <a:lstStyle/>
           <a:p>
-            <a:pPr algn="l"/>
-            <a:r>
-              <a:rPr sz="1500" b="0">
-                <a:solidFill>
-                  <a:srgbClr val="DCEBE0"/>
+            <a:pPr algn="l">
+              <a:lnSpc>
+                <a:spcPct val="112000"/>
+              </a:lnSpc>
+              <a:spcBef>
+                <a:spcPts val="0"/>
+              </a:spcBef>
+              <a:spcAft>
+                <a:spcPts val="0"/>
+              </a:spcAft>
+            </a:pPr>
+            <a:r>
+              <a:rPr sz="1400" b="0">
+                <a:solidFill>
+                  <a:srgbClr val="DDEAE2"/>
                 </a:solidFill>
                 <a:latin typeface="Segoe UI"/>
               </a:rPr>
@@ -4193,8 +4565,8 @@
         </p:nvSpPr>
         <p:spPr>
           <a:xfrm>
-            <a:off x="731520" y="1371600"/>
-            <a:ext cx="5486400" cy="2011680"/>
+            <a:off x="640080" y="1234440"/>
+            <a:ext cx="5623560" cy="2514600"/>
           </a:xfrm>
           <a:prstGeom prst="roundRect">
             <a:avLst/>
@@ -4202,9 +4574,9 @@
           <a:solidFill>
             <a:srgbClr val="FFFFFF"/>
           </a:solidFill>
-          <a:ln w="15240">
+          <a:ln w="12700">
             <a:solidFill>
-              <a:srgbClr val="D0D9D2"/>
+              <a:srgbClr val="CED8D1"/>
             </a:solidFill>
           </a:ln>
         </p:spPr>
@@ -4232,130 +4604,23 @@
       </p:sp>
       <p:sp>
         <p:nvSpPr>
-          <p:cNvPr id="6" name="TextBox 5"/>
-          <p:cNvSpPr txBox="1"/>
-          <p:nvPr/>
-        </p:nvSpPr>
-        <p:spPr>
-          <a:xfrm>
-            <a:off x="914400" y="1536192"/>
-            <a:ext cx="548640" cy="365760"/>
-          </a:xfrm>
-          <a:prstGeom prst="rect">
-            <a:avLst/>
-          </a:prstGeom>
-          <a:noFill/>
-        </p:spPr>
-        <p:txBody>
-          <a:bodyPr wrap="none">
-            <a:spAutoFit/>
-          </a:bodyPr>
-          <a:lstStyle/>
-          <a:p>
-            <a:pPr algn="l"/>
-            <a:r>
-              <a:rPr sz="2000" b="1">
-                <a:solidFill>
-                  <a:srgbClr val="2E7D32"/>
-                </a:solidFill>
-                <a:latin typeface="Segoe UI"/>
-              </a:rPr>
-              <a:t>🛠</a:t>
-            </a:r>
-          </a:p>
-        </p:txBody>
-      </p:sp>
-      <p:sp>
-        <p:nvSpPr>
-          <p:cNvPr id="7" name="TextBox 6"/>
-          <p:cNvSpPr txBox="1"/>
-          <p:nvPr/>
-        </p:nvSpPr>
-        <p:spPr>
-          <a:xfrm>
-            <a:off x="1508760" y="1508760"/>
-            <a:ext cx="4526280" cy="365760"/>
-          </a:xfrm>
-          <a:prstGeom prst="rect">
-            <a:avLst/>
-          </a:prstGeom>
-          <a:noFill/>
-        </p:spPr>
-        <p:txBody>
-          <a:bodyPr wrap="none">
-            <a:spAutoFit/>
-          </a:bodyPr>
-          <a:lstStyle/>
-          <a:p>
-            <a:pPr algn="l"/>
-            <a:r>
-              <a:rPr sz="1600" b="1">
-                <a:solidFill>
-                  <a:srgbClr val="14532D"/>
-                </a:solidFill>
-                <a:latin typeface="Segoe UI"/>
-              </a:rPr>
-              <a:t>Developer Experience</a:t>
-            </a:r>
-          </a:p>
-        </p:txBody>
-      </p:sp>
-      <p:sp>
-        <p:nvSpPr>
-          <p:cNvPr id="8" name="TextBox 7"/>
-          <p:cNvSpPr txBox="1"/>
-          <p:nvPr/>
-        </p:nvSpPr>
-        <p:spPr>
-          <a:xfrm>
-            <a:off x="960120" y="1901952"/>
-            <a:ext cx="5074920" cy="1325880"/>
-          </a:xfrm>
-          <a:prstGeom prst="rect">
-            <a:avLst/>
-          </a:prstGeom>
-          <a:noFill/>
-        </p:spPr>
-        <p:txBody>
-          <a:bodyPr wrap="none">
-            <a:spAutoFit/>
-          </a:bodyPr>
-          <a:lstStyle/>
-          <a:p>
-            <a:pPr algn="l"/>
-            <a:r>
-              <a:rPr sz="1200">
-                <a:solidFill>
-                  <a:srgbClr val="212D38"/>
-                </a:solidFill>
-                <a:latin typeface="Segoe UI"/>
-              </a:rPr>
-              <a:t>Extremely simple to set up compared to heavy enterprise alternatives. You can go from zero to a working search prototype in hours.</a:t>
-            </a:r>
-          </a:p>
-        </p:txBody>
-      </p:sp>
-      <p:sp>
-        <p:nvSpPr>
-          <p:cNvPr id="9" name="Rounded Rectangle 8"/>
+          <p:cNvPr id="6" name="Oval 5"/>
           <p:cNvSpPr/>
           <p:nvPr/>
         </p:nvSpPr>
         <p:spPr>
           <a:xfrm>
-            <a:off x="6355080" y="1371600"/>
-            <a:ext cx="5120640" cy="2011680"/>
-          </a:xfrm>
-          <a:prstGeom prst="roundRect">
+            <a:off x="804671" y="1399032"/>
+            <a:ext cx="502920" cy="502920"/>
+          </a:xfrm>
+          <a:prstGeom prst="ellipse">
             <a:avLst/>
           </a:prstGeom>
           <a:solidFill>
-            <a:srgbClr val="FFFFFF"/>
+            <a:srgbClr val="2C7A4E"/>
           </a:solidFill>
-          <a:ln w="15240">
-            <a:solidFill>
-              <a:srgbClr val="D0D9D2"/>
-            </a:solidFill>
+          <a:ln>
+            <a:noFill/>
           </a:ln>
         </p:spPr>
         <p:style>
@@ -4382,14 +4647,14 @@
       </p:sp>
       <p:sp>
         <p:nvSpPr>
-          <p:cNvPr id="10" name="TextBox 9"/>
+          <p:cNvPr id="7" name="TextBox 6"/>
           <p:cNvSpPr txBox="1"/>
           <p:nvPr/>
         </p:nvSpPr>
         <p:spPr>
           <a:xfrm>
-            <a:off x="6537960" y="1536192"/>
-            <a:ext cx="548640" cy="365760"/>
+            <a:off x="804671" y="1527048"/>
+            <a:ext cx="502920" cy="182880"/>
           </a:xfrm>
           <a:prstGeom prst="rect">
             <a:avLst/>
@@ -4397,34 +4662,44 @@
           <a:noFill/>
         </p:spPr>
         <p:txBody>
-          <a:bodyPr wrap="none">
+          <a:bodyPr wrap="square" lIns="18288" rIns="18288" tIns="9144" bIns="9144" anchor="t">
             <a:spAutoFit/>
           </a:bodyPr>
           <a:lstStyle/>
           <a:p>
-            <a:pPr algn="l"/>
-            <a:r>
-              <a:rPr sz="2000" b="1">
-                <a:solidFill>
-                  <a:srgbClr val="2E7D32"/>
+            <a:pPr algn="ctr">
+              <a:lnSpc>
+                <a:spcPct val="112000"/>
+              </a:lnSpc>
+              <a:spcBef>
+                <a:spcPts val="0"/>
+              </a:spcBef>
+              <a:spcAft>
+                <a:spcPts val="0"/>
+              </a:spcAft>
+            </a:pPr>
+            <a:r>
+              <a:rPr sz="1000" b="1">
+                <a:solidFill>
+                  <a:srgbClr val="FFFFFF"/>
                 </a:solidFill>
                 <a:latin typeface="Segoe UI"/>
               </a:rPr>
-              <a:t>⚡</a:t>
-            </a:r>
-          </a:p>
-        </p:txBody>
-      </p:sp>
-      <p:sp>
-        <p:nvSpPr>
-          <p:cNvPr id="11" name="TextBox 10"/>
+              <a:t>DEV</a:t>
+            </a:r>
+          </a:p>
+        </p:txBody>
+      </p:sp>
+      <p:sp>
+        <p:nvSpPr>
+          <p:cNvPr id="8" name="TextBox 7"/>
           <p:cNvSpPr txBox="1"/>
           <p:nvPr/>
         </p:nvSpPr>
         <p:spPr>
           <a:xfrm>
-            <a:off x="7132320" y="1508760"/>
-            <a:ext cx="4160520" cy="365760"/>
+            <a:off x="1389888" y="1399032"/>
+            <a:ext cx="4709160" cy="365760"/>
           </a:xfrm>
           <a:prstGeom prst="rect">
             <a:avLst/>
@@ -4432,34 +4707,44 @@
           <a:noFill/>
         </p:spPr>
         <p:txBody>
-          <a:bodyPr wrap="none">
+          <a:bodyPr wrap="square" lIns="18288" rIns="18288" tIns="9144" bIns="9144" anchor="t">
             <a:spAutoFit/>
           </a:bodyPr>
           <a:lstStyle/>
           <a:p>
-            <a:pPr algn="l"/>
-            <a:r>
-              <a:rPr sz="1600" b="1">
-                <a:solidFill>
-                  <a:srgbClr val="14532D"/>
+            <a:pPr algn="l">
+              <a:lnSpc>
+                <a:spcPct val="112000"/>
+              </a:lnSpc>
+              <a:spcBef>
+                <a:spcPts val="0"/>
+              </a:spcBef>
+              <a:spcAft>
+                <a:spcPts val="0"/>
+              </a:spcAft>
+            </a:pPr>
+            <a:r>
+              <a:rPr sz="1500" b="1">
+                <a:solidFill>
+                  <a:srgbClr val="184E34"/>
                 </a:solidFill>
                 <a:latin typeface="Segoe UI"/>
               </a:rPr>
-              <a:t>Blazing Speed</a:t>
-            </a:r>
-          </a:p>
-        </p:txBody>
-      </p:sp>
-      <p:sp>
-        <p:nvSpPr>
-          <p:cNvPr id="12" name="TextBox 11"/>
+              <a:t>Developer Experience</a:t>
+            </a:r>
+          </a:p>
+        </p:txBody>
+      </p:sp>
+      <p:sp>
+        <p:nvSpPr>
+          <p:cNvPr id="9" name="TextBox 8"/>
           <p:cNvSpPr txBox="1"/>
           <p:nvPr/>
         </p:nvSpPr>
         <p:spPr>
           <a:xfrm>
-            <a:off x="6583680" y="1901952"/>
-            <a:ext cx="4709159" cy="1325880"/>
+            <a:off x="822959" y="1892808"/>
+            <a:ext cx="5303520" cy="1728216"/>
           </a:xfrm>
           <a:prstGeom prst="rect">
             <a:avLst/>
@@ -4467,34 +4752,44 @@
           <a:noFill/>
         </p:spPr>
         <p:txBody>
-          <a:bodyPr wrap="none">
+          <a:bodyPr wrap="square" lIns="18288" rIns="18288" tIns="9144" bIns="9144" anchor="t">
             <a:spAutoFit/>
           </a:bodyPr>
           <a:lstStyle/>
           <a:p>
-            <a:pPr algn="l"/>
-            <a:r>
-              <a:rPr sz="1200">
+            <a:pPr algn="l">
+              <a:lnSpc>
+                <a:spcPct val="112000"/>
+              </a:lnSpc>
+              <a:spcBef>
+                <a:spcPts val="0"/>
+              </a:spcBef>
+              <a:spcAft>
+                <a:spcPts val="0"/>
+              </a:spcAft>
+            </a:pPr>
+            <a:r>
+              <a:rPr sz="1200" b="0">
                 <a:solidFill>
                   <a:srgbClr val="212D38"/>
                 </a:solidFill>
                 <a:latin typeface="Segoe UI"/>
               </a:rPr>
-              <a:t>The memory mapped architecture guarantees virtually zero latency for the end user.</a:t>
-            </a:r>
-          </a:p>
-        </p:txBody>
-      </p:sp>
-      <p:sp>
-        <p:nvSpPr>
-          <p:cNvPr id="13" name="Rounded Rectangle 12"/>
+              <a:t>Extremely simple to set up compared to heavy enterprise alternatives. You can go from zero to a working search prototype in hours.</a:t>
+            </a:r>
+          </a:p>
+        </p:txBody>
+      </p:sp>
+      <p:sp>
+        <p:nvSpPr>
+          <p:cNvPr id="10" name="Rounded Rectangle 9"/>
           <p:cNvSpPr/>
           <p:nvPr/>
         </p:nvSpPr>
         <p:spPr>
           <a:xfrm>
-            <a:off x="731520" y="3611880"/>
-            <a:ext cx="5486400" cy="2103120"/>
+            <a:off x="6355080" y="1234440"/>
+            <a:ext cx="5166360" cy="2514600"/>
           </a:xfrm>
           <a:prstGeom prst="roundRect">
             <a:avLst/>
@@ -4502,9 +4797,9 @@
           <a:solidFill>
             <a:srgbClr val="FFFFFF"/>
           </a:solidFill>
-          <a:ln w="15240">
+          <a:ln w="12700">
             <a:solidFill>
-              <a:srgbClr val="D0D9D2"/>
+              <a:srgbClr val="CED8D1"/>
             </a:solidFill>
           </a:ln>
         </p:spPr>
@@ -4532,130 +4827,23 @@
       </p:sp>
       <p:sp>
         <p:nvSpPr>
-          <p:cNvPr id="14" name="TextBox 13"/>
-          <p:cNvSpPr txBox="1"/>
-          <p:nvPr/>
-        </p:nvSpPr>
-        <p:spPr>
-          <a:xfrm>
-            <a:off x="914400" y="3776472"/>
-            <a:ext cx="548640" cy="365760"/>
-          </a:xfrm>
-          <a:prstGeom prst="rect">
-            <a:avLst/>
-          </a:prstGeom>
-          <a:noFill/>
-        </p:spPr>
-        <p:txBody>
-          <a:bodyPr wrap="none">
-            <a:spAutoFit/>
-          </a:bodyPr>
-          <a:lstStyle/>
-          <a:p>
-            <a:pPr algn="l"/>
-            <a:r>
-              <a:rPr sz="2000" b="1">
-                <a:solidFill>
-                  <a:srgbClr val="2E7D32"/>
-                </a:solidFill>
-                <a:latin typeface="Segoe UI"/>
-              </a:rPr>
-              <a:t>🧠</a:t>
-            </a:r>
-          </a:p>
-        </p:txBody>
-      </p:sp>
-      <p:sp>
-        <p:nvSpPr>
-          <p:cNvPr id="15" name="TextBox 14"/>
-          <p:cNvSpPr txBox="1"/>
-          <p:nvPr/>
-        </p:nvSpPr>
-        <p:spPr>
-          <a:xfrm>
-            <a:off x="1508760" y="3749040"/>
-            <a:ext cx="4526280" cy="365760"/>
-          </a:xfrm>
-          <a:prstGeom prst="rect">
-            <a:avLst/>
-          </a:prstGeom>
-          <a:noFill/>
-        </p:spPr>
-        <p:txBody>
-          <a:bodyPr wrap="none">
-            <a:spAutoFit/>
-          </a:bodyPr>
-          <a:lstStyle/>
-          <a:p>
-            <a:pPr algn="l"/>
-            <a:r>
-              <a:rPr sz="1600" b="1">
-                <a:solidFill>
-                  <a:srgbClr val="14532D"/>
-                </a:solidFill>
-                <a:latin typeface="Segoe UI"/>
-              </a:rPr>
-              <a:t>AI Ready</a:t>
-            </a:r>
-          </a:p>
-        </p:txBody>
-      </p:sp>
-      <p:sp>
-        <p:nvSpPr>
-          <p:cNvPr id="16" name="TextBox 15"/>
-          <p:cNvSpPr txBox="1"/>
-          <p:nvPr/>
-        </p:nvSpPr>
-        <p:spPr>
-          <a:xfrm>
-            <a:off x="960120" y="4142232"/>
-            <a:ext cx="5074920" cy="1417319"/>
-          </a:xfrm>
-          <a:prstGeom prst="rect">
-            <a:avLst/>
-          </a:prstGeom>
-          <a:noFill/>
-        </p:spPr>
-        <p:txBody>
-          <a:bodyPr wrap="none">
-            <a:spAutoFit/>
-          </a:bodyPr>
-          <a:lstStyle/>
-          <a:p>
-            <a:pPr algn="l"/>
-            <a:r>
-              <a:rPr sz="1200">
-                <a:solidFill>
-                  <a:srgbClr val="212D38"/>
-                </a:solidFill>
-                <a:latin typeface="Segoe UI"/>
-              </a:rPr>
-              <a:t>Native support for vector embeddings allows users to search by concept or meaning, not just exact wording.</a:t>
-            </a:r>
-          </a:p>
-        </p:txBody>
-      </p:sp>
-      <p:sp>
-        <p:nvSpPr>
-          <p:cNvPr id="17" name="Rounded Rectangle 16"/>
+          <p:cNvPr id="11" name="Oval 10"/>
           <p:cNvSpPr/>
           <p:nvPr/>
         </p:nvSpPr>
         <p:spPr>
           <a:xfrm>
-            <a:off x="6355080" y="3611880"/>
-            <a:ext cx="5120640" cy="2103120"/>
-          </a:xfrm>
-          <a:prstGeom prst="roundRect">
+            <a:off x="6519672" y="1399032"/>
+            <a:ext cx="502920" cy="502920"/>
+          </a:xfrm>
+          <a:prstGeom prst="ellipse">
             <a:avLst/>
           </a:prstGeom>
           <a:solidFill>
-            <a:srgbClr val="FFFFFF"/>
+            <a:srgbClr val="2C7A4E"/>
           </a:solidFill>
-          <a:ln w="15240">
-            <a:solidFill>
-              <a:srgbClr val="D0D9D2"/>
-            </a:solidFill>
+          <a:ln>
+            <a:noFill/>
           </a:ln>
         </p:spPr>
         <p:style>
@@ -4682,14 +4870,282 @@
       </p:sp>
       <p:sp>
         <p:nvSpPr>
+          <p:cNvPr id="12" name="TextBox 11"/>
+          <p:cNvSpPr txBox="1"/>
+          <p:nvPr/>
+        </p:nvSpPr>
+        <p:spPr>
+          <a:xfrm>
+            <a:off x="6519672" y="1527048"/>
+            <a:ext cx="502920" cy="182880"/>
+          </a:xfrm>
+          <a:prstGeom prst="rect">
+            <a:avLst/>
+          </a:prstGeom>
+          <a:noFill/>
+        </p:spPr>
+        <p:txBody>
+          <a:bodyPr wrap="square" lIns="18288" rIns="18288" tIns="9144" bIns="9144" anchor="t">
+            <a:spAutoFit/>
+          </a:bodyPr>
+          <a:lstStyle/>
+          <a:p>
+            <a:pPr algn="ctr">
+              <a:lnSpc>
+                <a:spcPct val="112000"/>
+              </a:lnSpc>
+              <a:spcBef>
+                <a:spcPts val="0"/>
+              </a:spcBef>
+              <a:spcAft>
+                <a:spcPts val="0"/>
+              </a:spcAft>
+            </a:pPr>
+            <a:r>
+              <a:rPr sz="1000" b="1">
+                <a:solidFill>
+                  <a:srgbClr val="FFFFFF"/>
+                </a:solidFill>
+                <a:latin typeface="Segoe UI"/>
+              </a:rPr>
+              <a:t>SPD</a:t>
+            </a:r>
+          </a:p>
+        </p:txBody>
+      </p:sp>
+      <p:sp>
+        <p:nvSpPr>
+          <p:cNvPr id="13" name="TextBox 12"/>
+          <p:cNvSpPr txBox="1"/>
+          <p:nvPr/>
+        </p:nvSpPr>
+        <p:spPr>
+          <a:xfrm>
+            <a:off x="7104888" y="1399032"/>
+            <a:ext cx="4251960" cy="365760"/>
+          </a:xfrm>
+          <a:prstGeom prst="rect">
+            <a:avLst/>
+          </a:prstGeom>
+          <a:noFill/>
+        </p:spPr>
+        <p:txBody>
+          <a:bodyPr wrap="square" lIns="18288" rIns="18288" tIns="9144" bIns="9144" anchor="t">
+            <a:spAutoFit/>
+          </a:bodyPr>
+          <a:lstStyle/>
+          <a:p>
+            <a:pPr algn="l">
+              <a:lnSpc>
+                <a:spcPct val="112000"/>
+              </a:lnSpc>
+              <a:spcBef>
+                <a:spcPts val="0"/>
+              </a:spcBef>
+              <a:spcAft>
+                <a:spcPts val="0"/>
+              </a:spcAft>
+            </a:pPr>
+            <a:r>
+              <a:rPr sz="1500" b="1">
+                <a:solidFill>
+                  <a:srgbClr val="184E34"/>
+                </a:solidFill>
+                <a:latin typeface="Segoe UI"/>
+              </a:rPr>
+              <a:t>Blazing Speed</a:t>
+            </a:r>
+          </a:p>
+        </p:txBody>
+      </p:sp>
+      <p:sp>
+        <p:nvSpPr>
+          <p:cNvPr id="14" name="TextBox 13"/>
+          <p:cNvSpPr txBox="1"/>
+          <p:nvPr/>
+        </p:nvSpPr>
+        <p:spPr>
+          <a:xfrm>
+            <a:off x="6537960" y="1892808"/>
+            <a:ext cx="4846320" cy="1728216"/>
+          </a:xfrm>
+          <a:prstGeom prst="rect">
+            <a:avLst/>
+          </a:prstGeom>
+          <a:noFill/>
+        </p:spPr>
+        <p:txBody>
+          <a:bodyPr wrap="square" lIns="18288" rIns="18288" tIns="9144" bIns="9144" anchor="t">
+            <a:spAutoFit/>
+          </a:bodyPr>
+          <a:lstStyle/>
+          <a:p>
+            <a:pPr algn="l">
+              <a:lnSpc>
+                <a:spcPct val="112000"/>
+              </a:lnSpc>
+              <a:spcBef>
+                <a:spcPts val="0"/>
+              </a:spcBef>
+              <a:spcAft>
+                <a:spcPts val="0"/>
+              </a:spcAft>
+            </a:pPr>
+            <a:r>
+              <a:rPr sz="1200" b="0">
+                <a:solidFill>
+                  <a:srgbClr val="212D38"/>
+                </a:solidFill>
+                <a:latin typeface="Segoe UI"/>
+              </a:rPr>
+              <a:t>The memory mapped architecture guarantees virtually zero latency for the end user.</a:t>
+            </a:r>
+          </a:p>
+        </p:txBody>
+      </p:sp>
+      <p:sp>
+        <p:nvSpPr>
+          <p:cNvPr id="15" name="Rounded Rectangle 14"/>
+          <p:cNvSpPr/>
+          <p:nvPr/>
+        </p:nvSpPr>
+        <p:spPr>
+          <a:xfrm>
+            <a:off x="640080" y="3794760"/>
+            <a:ext cx="5623560" cy="2514600"/>
+          </a:xfrm>
+          <a:prstGeom prst="roundRect">
+            <a:avLst/>
+          </a:prstGeom>
+          <a:solidFill>
+            <a:srgbClr val="FFFFFF"/>
+          </a:solidFill>
+          <a:ln w="12700">
+            <a:solidFill>
+              <a:srgbClr val="CED8D1"/>
+            </a:solidFill>
+          </a:ln>
+        </p:spPr>
+        <p:style>
+          <a:lnRef idx="1">
+            <a:schemeClr val="accent1"/>
+          </a:lnRef>
+          <a:fillRef idx="3">
+            <a:schemeClr val="accent1"/>
+          </a:fillRef>
+          <a:effectRef idx="2">
+            <a:schemeClr val="accent1"/>
+          </a:effectRef>
+          <a:fontRef idx="minor">
+            <a:schemeClr val="lt1"/>
+          </a:fontRef>
+        </p:style>
+        <p:txBody>
+          <a:bodyPr rtlCol="0" anchor="ctr"/>
+          <a:lstStyle/>
+          <a:p>
+            <a:pPr algn="ctr"/>
+          </a:p>
+        </p:txBody>
+      </p:sp>
+      <p:sp>
+        <p:nvSpPr>
+          <p:cNvPr id="16" name="Oval 15"/>
+          <p:cNvSpPr/>
+          <p:nvPr/>
+        </p:nvSpPr>
+        <p:spPr>
+          <a:xfrm>
+            <a:off x="804671" y="3959352"/>
+            <a:ext cx="502920" cy="502920"/>
+          </a:xfrm>
+          <a:prstGeom prst="ellipse">
+            <a:avLst/>
+          </a:prstGeom>
+          <a:solidFill>
+            <a:srgbClr val="2C7A4E"/>
+          </a:solidFill>
+          <a:ln>
+            <a:noFill/>
+          </a:ln>
+        </p:spPr>
+        <p:style>
+          <a:lnRef idx="1">
+            <a:schemeClr val="accent1"/>
+          </a:lnRef>
+          <a:fillRef idx="3">
+            <a:schemeClr val="accent1"/>
+          </a:fillRef>
+          <a:effectRef idx="2">
+            <a:schemeClr val="accent1"/>
+          </a:effectRef>
+          <a:fontRef idx="minor">
+            <a:schemeClr val="lt1"/>
+          </a:fontRef>
+        </p:style>
+        <p:txBody>
+          <a:bodyPr rtlCol="0" anchor="ctr"/>
+          <a:lstStyle/>
+          <a:p>
+            <a:pPr algn="ctr"/>
+          </a:p>
+        </p:txBody>
+      </p:sp>
+      <p:sp>
+        <p:nvSpPr>
+          <p:cNvPr id="17" name="TextBox 16"/>
+          <p:cNvSpPr txBox="1"/>
+          <p:nvPr/>
+        </p:nvSpPr>
+        <p:spPr>
+          <a:xfrm>
+            <a:off x="804671" y="4087368"/>
+            <a:ext cx="502920" cy="182880"/>
+          </a:xfrm>
+          <a:prstGeom prst="rect">
+            <a:avLst/>
+          </a:prstGeom>
+          <a:noFill/>
+        </p:spPr>
+        <p:txBody>
+          <a:bodyPr wrap="square" lIns="18288" rIns="18288" tIns="9144" bIns="9144" anchor="t">
+            <a:spAutoFit/>
+          </a:bodyPr>
+          <a:lstStyle/>
+          <a:p>
+            <a:pPr algn="ctr">
+              <a:lnSpc>
+                <a:spcPct val="112000"/>
+              </a:lnSpc>
+              <a:spcBef>
+                <a:spcPts val="0"/>
+              </a:spcBef>
+              <a:spcAft>
+                <a:spcPts val="0"/>
+              </a:spcAft>
+            </a:pPr>
+            <a:r>
+              <a:rPr sz="1000" b="1">
+                <a:solidFill>
+                  <a:srgbClr val="FFFFFF"/>
+                </a:solidFill>
+                <a:latin typeface="Segoe UI"/>
+              </a:rPr>
+              <a:t>AI</a:t>
+            </a:r>
+          </a:p>
+        </p:txBody>
+      </p:sp>
+      <p:sp>
+        <p:nvSpPr>
           <p:cNvPr id="18" name="TextBox 17"/>
           <p:cNvSpPr txBox="1"/>
           <p:nvPr/>
         </p:nvSpPr>
         <p:spPr>
           <a:xfrm>
-            <a:off x="6537960" y="3776472"/>
-            <a:ext cx="548640" cy="365760"/>
+            <a:off x="1389888" y="3959352"/>
+            <a:ext cx="4709160" cy="365760"/>
           </a:xfrm>
           <a:prstGeom prst="rect">
             <a:avLst/>
@@ -4697,20 +5153,30 @@
           <a:noFill/>
         </p:spPr>
         <p:txBody>
-          <a:bodyPr wrap="none">
+          <a:bodyPr wrap="square" lIns="18288" rIns="18288" tIns="9144" bIns="9144" anchor="t">
             <a:spAutoFit/>
           </a:bodyPr>
           <a:lstStyle/>
           <a:p>
-            <a:pPr algn="l"/>
-            <a:r>
-              <a:rPr sz="2000" b="1">
-                <a:solidFill>
-                  <a:srgbClr val="2E7D32"/>
+            <a:pPr algn="l">
+              <a:lnSpc>
+                <a:spcPct val="112000"/>
+              </a:lnSpc>
+              <a:spcBef>
+                <a:spcPts val="0"/>
+              </a:spcBef>
+              <a:spcAft>
+                <a:spcPts val="0"/>
+              </a:spcAft>
+            </a:pPr>
+            <a:r>
+              <a:rPr sz="1500" b="1">
+                <a:solidFill>
+                  <a:srgbClr val="184E34"/>
                 </a:solidFill>
                 <a:latin typeface="Segoe UI"/>
               </a:rPr>
-              <a:t>💼</a:t>
+              <a:t>AI Ready</a:t>
             </a:r>
           </a:p>
         </p:txBody>
@@ -4723,8 +5189,8 @@
         </p:nvSpPr>
         <p:spPr>
           <a:xfrm>
-            <a:off x="7132320" y="3749040"/>
-            <a:ext cx="4160520" cy="365760"/>
+            <a:off x="822959" y="4453128"/>
+            <a:ext cx="5303520" cy="1728216"/>
           </a:xfrm>
           <a:prstGeom prst="rect">
             <a:avLst/>
@@ -4732,16 +5198,204 @@
           <a:noFill/>
         </p:spPr>
         <p:txBody>
-          <a:bodyPr wrap="none">
+          <a:bodyPr wrap="square" lIns="18288" rIns="18288" tIns="9144" bIns="9144" anchor="t">
             <a:spAutoFit/>
           </a:bodyPr>
           <a:lstStyle/>
           <a:p>
-            <a:pPr algn="l"/>
-            <a:r>
-              <a:rPr sz="1600" b="1">
-                <a:solidFill>
-                  <a:srgbClr val="14532D"/>
+            <a:pPr algn="l">
+              <a:lnSpc>
+                <a:spcPct val="112000"/>
+              </a:lnSpc>
+              <a:spcBef>
+                <a:spcPts val="0"/>
+              </a:spcBef>
+              <a:spcAft>
+                <a:spcPts val="0"/>
+              </a:spcAft>
+            </a:pPr>
+            <a:r>
+              <a:rPr sz="1200" b="0">
+                <a:solidFill>
+                  <a:srgbClr val="212D38"/>
+                </a:solidFill>
+                <a:latin typeface="Segoe UI"/>
+              </a:rPr>
+              <a:t>Native support for vector embeddings allows users to search by concept or meaning, not just exact wording.</a:t>
+            </a:r>
+          </a:p>
+        </p:txBody>
+      </p:sp>
+      <p:sp>
+        <p:nvSpPr>
+          <p:cNvPr id="20" name="Rounded Rectangle 19"/>
+          <p:cNvSpPr/>
+          <p:nvPr/>
+        </p:nvSpPr>
+        <p:spPr>
+          <a:xfrm>
+            <a:off x="6355080" y="3794760"/>
+            <a:ext cx="5166360" cy="2514600"/>
+          </a:xfrm>
+          <a:prstGeom prst="roundRect">
+            <a:avLst/>
+          </a:prstGeom>
+          <a:solidFill>
+            <a:srgbClr val="FFFFFF"/>
+          </a:solidFill>
+          <a:ln w="12700">
+            <a:solidFill>
+              <a:srgbClr val="CED8D1"/>
+            </a:solidFill>
+          </a:ln>
+        </p:spPr>
+        <p:style>
+          <a:lnRef idx="1">
+            <a:schemeClr val="accent1"/>
+          </a:lnRef>
+          <a:fillRef idx="3">
+            <a:schemeClr val="accent1"/>
+          </a:fillRef>
+          <a:effectRef idx="2">
+            <a:schemeClr val="accent1"/>
+          </a:effectRef>
+          <a:fontRef idx="minor">
+            <a:schemeClr val="lt1"/>
+          </a:fontRef>
+        </p:style>
+        <p:txBody>
+          <a:bodyPr rtlCol="0" anchor="ctr"/>
+          <a:lstStyle/>
+          <a:p>
+            <a:pPr algn="ctr"/>
+          </a:p>
+        </p:txBody>
+      </p:sp>
+      <p:sp>
+        <p:nvSpPr>
+          <p:cNvPr id="21" name="Oval 20"/>
+          <p:cNvSpPr/>
+          <p:nvPr/>
+        </p:nvSpPr>
+        <p:spPr>
+          <a:xfrm>
+            <a:off x="6519672" y="3959352"/>
+            <a:ext cx="502920" cy="502920"/>
+          </a:xfrm>
+          <a:prstGeom prst="ellipse">
+            <a:avLst/>
+          </a:prstGeom>
+          <a:solidFill>
+            <a:srgbClr val="2C7A4E"/>
+          </a:solidFill>
+          <a:ln>
+            <a:noFill/>
+          </a:ln>
+        </p:spPr>
+        <p:style>
+          <a:lnRef idx="1">
+            <a:schemeClr val="accent1"/>
+          </a:lnRef>
+          <a:fillRef idx="3">
+            <a:schemeClr val="accent1"/>
+          </a:fillRef>
+          <a:effectRef idx="2">
+            <a:schemeClr val="accent1"/>
+          </a:effectRef>
+          <a:fontRef idx="minor">
+            <a:schemeClr val="lt1"/>
+          </a:fontRef>
+        </p:style>
+        <p:txBody>
+          <a:bodyPr rtlCol="0" anchor="ctr"/>
+          <a:lstStyle/>
+          <a:p>
+            <a:pPr algn="ctr"/>
+          </a:p>
+        </p:txBody>
+      </p:sp>
+      <p:sp>
+        <p:nvSpPr>
+          <p:cNvPr id="22" name="TextBox 21"/>
+          <p:cNvSpPr txBox="1"/>
+          <p:nvPr/>
+        </p:nvSpPr>
+        <p:spPr>
+          <a:xfrm>
+            <a:off x="6519672" y="4087368"/>
+            <a:ext cx="502920" cy="182880"/>
+          </a:xfrm>
+          <a:prstGeom prst="rect">
+            <a:avLst/>
+          </a:prstGeom>
+          <a:noFill/>
+        </p:spPr>
+        <p:txBody>
+          <a:bodyPr wrap="square" lIns="18288" rIns="18288" tIns="9144" bIns="9144" anchor="t">
+            <a:spAutoFit/>
+          </a:bodyPr>
+          <a:lstStyle/>
+          <a:p>
+            <a:pPr algn="ctr">
+              <a:lnSpc>
+                <a:spcPct val="112000"/>
+              </a:lnSpc>
+              <a:spcBef>
+                <a:spcPts val="0"/>
+              </a:spcBef>
+              <a:spcAft>
+                <a:spcPts val="0"/>
+              </a:spcAft>
+            </a:pPr>
+            <a:r>
+              <a:rPr sz="1000" b="1">
+                <a:solidFill>
+                  <a:srgbClr val="FFFFFF"/>
+                </a:solidFill>
+                <a:latin typeface="Segoe UI"/>
+              </a:rPr>
+              <a:t>COST</a:t>
+            </a:r>
+          </a:p>
+        </p:txBody>
+      </p:sp>
+      <p:sp>
+        <p:nvSpPr>
+          <p:cNvPr id="23" name="TextBox 22"/>
+          <p:cNvSpPr txBox="1"/>
+          <p:nvPr/>
+        </p:nvSpPr>
+        <p:spPr>
+          <a:xfrm>
+            <a:off x="7104888" y="3959352"/>
+            <a:ext cx="4251960" cy="365760"/>
+          </a:xfrm>
+          <a:prstGeom prst="rect">
+            <a:avLst/>
+          </a:prstGeom>
+          <a:noFill/>
+        </p:spPr>
+        <p:txBody>
+          <a:bodyPr wrap="square" lIns="18288" rIns="18288" tIns="9144" bIns="9144" anchor="t">
+            <a:spAutoFit/>
+          </a:bodyPr>
+          <a:lstStyle/>
+          <a:p>
+            <a:pPr algn="l">
+              <a:lnSpc>
+                <a:spcPct val="112000"/>
+              </a:lnSpc>
+              <a:spcBef>
+                <a:spcPts val="0"/>
+              </a:spcBef>
+              <a:spcAft>
+                <a:spcPts val="0"/>
+              </a:spcAft>
+            </a:pPr>
+            <a:r>
+              <a:rPr sz="1500" b="1">
+                <a:solidFill>
+                  <a:srgbClr val="184E34"/>
                 </a:solidFill>
                 <a:latin typeface="Segoe UI"/>
               </a:rPr>
@@ -4752,14 +5406,14 @@
       </p:sp>
       <p:sp>
         <p:nvSpPr>
-          <p:cNvPr id="20" name="TextBox 19"/>
+          <p:cNvPr id="24" name="TextBox 23"/>
           <p:cNvSpPr txBox="1"/>
           <p:nvPr/>
         </p:nvSpPr>
         <p:spPr>
           <a:xfrm>
-            <a:off x="6583680" y="4142232"/>
-            <a:ext cx="4709159" cy="1417319"/>
+            <a:off x="6537960" y="4453128"/>
+            <a:ext cx="4846320" cy="1728216"/>
           </a:xfrm>
           <a:prstGeom prst="rect">
             <a:avLst/>
@@ -4767,14 +5421,24 @@
           <a:noFill/>
         </p:spPr>
         <p:txBody>
-          <a:bodyPr wrap="none">
+          <a:bodyPr wrap="square" lIns="18288" rIns="18288" tIns="9144" bIns="9144" anchor="t">
             <a:spAutoFit/>
           </a:bodyPr>
           <a:lstStyle/>
           <a:p>
-            <a:pPr algn="l"/>
-            <a:r>
-              <a:rPr sz="1200">
+            <a:pPr algn="l">
+              <a:lnSpc>
+                <a:spcPct val="112000"/>
+              </a:lnSpc>
+              <a:spcBef>
+                <a:spcPts val="0"/>
+              </a:spcBef>
+              <a:spcAft>
+                <a:spcPts val="0"/>
+              </a:spcAft>
+            </a:pPr>
+            <a:r>
+              <a:rPr sz="1200" b="0">
                 <a:solidFill>
                   <a:srgbClr val="212D38"/>
                 </a:solidFill>
@@ -4818,7 +5482,7 @@
             <a:avLst/>
           </a:prstGeom>
           <a:solidFill>
-            <a:srgbClr val="14532D"/>
+            <a:srgbClr val="184E34"/>
           </a:solidFill>
           <a:ln>
             <a:noFill/>
@@ -4854,8 +5518,8 @@
         </p:nvSpPr>
         <p:spPr>
           <a:xfrm>
-            <a:off x="640080" y="182880"/>
-            <a:ext cx="10972800" cy="411480"/>
+            <a:off x="640080" y="146304"/>
+            <a:ext cx="10972800" cy="384048"/>
           </a:xfrm>
           <a:prstGeom prst="rect">
             <a:avLst/>
@@ -4863,14 +5527,24 @@
           <a:noFill/>
         </p:spPr>
         <p:txBody>
-          <a:bodyPr wrap="none">
+          <a:bodyPr wrap="square" lIns="18288" rIns="18288" tIns="9144" bIns="9144" anchor="t">
             <a:spAutoFit/>
           </a:bodyPr>
           <a:lstStyle/>
           <a:p>
-            <a:pPr algn="l"/>
-            <a:r>
-              <a:rPr sz="3000" b="1">
+            <a:pPr algn="l">
+              <a:lnSpc>
+                <a:spcPct val="112000"/>
+              </a:lnSpc>
+              <a:spcBef>
+                <a:spcPts val="0"/>
+              </a:spcBef>
+              <a:spcAft>
+                <a:spcPts val="0"/>
+              </a:spcAft>
+            </a:pPr>
+            <a:r>
+              <a:rPr sz="2800" b="1">
                 <a:solidFill>
                   <a:srgbClr val="FFFFFF"/>
                 </a:solidFill>
@@ -4889,8 +5563,8 @@
         </p:nvSpPr>
         <p:spPr>
           <a:xfrm>
-            <a:off x="640080" y="566928"/>
-            <a:ext cx="10972800" cy="274320"/>
+            <a:off x="640080" y="530352"/>
+            <a:ext cx="10972800" cy="256032"/>
           </a:xfrm>
           <a:prstGeom prst="rect">
             <a:avLst/>
@@ -4898,16 +5572,26 @@
           <a:noFill/>
         </p:spPr>
         <p:txBody>
-          <a:bodyPr wrap="none">
+          <a:bodyPr wrap="square" lIns="18288" rIns="18288" tIns="9144" bIns="9144" anchor="t">
             <a:spAutoFit/>
           </a:bodyPr>
           <a:lstStyle/>
           <a:p>
-            <a:pPr algn="l"/>
-            <a:r>
-              <a:rPr sz="1500" b="0">
-                <a:solidFill>
-                  <a:srgbClr val="DCEBE0"/>
+            <a:pPr algn="l">
+              <a:lnSpc>
+                <a:spcPct val="112000"/>
+              </a:lnSpc>
+              <a:spcBef>
+                <a:spcPts val="0"/>
+              </a:spcBef>
+              <a:spcAft>
+                <a:spcPts val="0"/>
+              </a:spcAft>
+            </a:pPr>
+            <a:r>
+              <a:rPr sz="1400" b="0">
+                <a:solidFill>
+                  <a:srgbClr val="DDEAE2"/>
                 </a:solidFill>
                 <a:latin typeface="Segoe UI"/>
               </a:rPr>
@@ -4924,8 +5608,8 @@
         </p:nvSpPr>
         <p:spPr>
           <a:xfrm>
-            <a:off x="731520" y="1325880"/>
-            <a:ext cx="5486400" cy="2148840"/>
+            <a:off x="640080" y="1234440"/>
+            <a:ext cx="5623560" cy="2514600"/>
           </a:xfrm>
           <a:prstGeom prst="roundRect">
             <a:avLst/>
@@ -4933,9 +5617,9 @@
           <a:solidFill>
             <a:srgbClr val="FFFFFF"/>
           </a:solidFill>
-          <a:ln w="15240">
+          <a:ln w="12700">
             <a:solidFill>
-              <a:srgbClr val="D0D9D2"/>
+              <a:srgbClr val="CED8D1"/>
             </a:solidFill>
           </a:ln>
         </p:spPr>
@@ -4963,130 +5647,23 @@
       </p:sp>
       <p:sp>
         <p:nvSpPr>
-          <p:cNvPr id="6" name="TextBox 5"/>
-          <p:cNvSpPr txBox="1"/>
-          <p:nvPr/>
-        </p:nvSpPr>
-        <p:spPr>
-          <a:xfrm>
-            <a:off x="914400" y="1490472"/>
-            <a:ext cx="548640" cy="365760"/>
-          </a:xfrm>
-          <a:prstGeom prst="rect">
-            <a:avLst/>
-          </a:prstGeom>
-          <a:noFill/>
-        </p:spPr>
-        <p:txBody>
-          <a:bodyPr wrap="none">
-            <a:spAutoFit/>
-          </a:bodyPr>
-          <a:lstStyle/>
-          <a:p>
-            <a:pPr algn="l"/>
-            <a:r>
-              <a:rPr sz="2000" b="1">
-                <a:solidFill>
-                  <a:srgbClr val="2E7D32"/>
-                </a:solidFill>
-                <a:latin typeface="Segoe UI"/>
-              </a:rPr>
-              <a:t>🧠</a:t>
-            </a:r>
-          </a:p>
-        </p:txBody>
-      </p:sp>
-      <p:sp>
-        <p:nvSpPr>
-          <p:cNvPr id="7" name="TextBox 6"/>
-          <p:cNvSpPr txBox="1"/>
-          <p:nvPr/>
-        </p:nvSpPr>
-        <p:spPr>
-          <a:xfrm>
-            <a:off x="1508760" y="1463039"/>
-            <a:ext cx="4526280" cy="365760"/>
-          </a:xfrm>
-          <a:prstGeom prst="rect">
-            <a:avLst/>
-          </a:prstGeom>
-          <a:noFill/>
-        </p:spPr>
-        <p:txBody>
-          <a:bodyPr wrap="none">
-            <a:spAutoFit/>
-          </a:bodyPr>
-          <a:lstStyle/>
-          <a:p>
-            <a:pPr algn="l"/>
-            <a:r>
-              <a:rPr sz="1600" b="1">
-                <a:solidFill>
-                  <a:srgbClr val="14532D"/>
-                </a:solidFill>
-                <a:latin typeface="Segoe UI"/>
-              </a:rPr>
-              <a:t>RAM Hungry</a:t>
-            </a:r>
-          </a:p>
-        </p:txBody>
-      </p:sp>
-      <p:sp>
-        <p:nvSpPr>
-          <p:cNvPr id="8" name="TextBox 7"/>
-          <p:cNvSpPr txBox="1"/>
-          <p:nvPr/>
-        </p:nvSpPr>
-        <p:spPr>
-          <a:xfrm>
-            <a:off x="960120" y="1856231"/>
-            <a:ext cx="5074920" cy="1463040"/>
-          </a:xfrm>
-          <a:prstGeom prst="rect">
-            <a:avLst/>
-          </a:prstGeom>
-          <a:noFill/>
-        </p:spPr>
-        <p:txBody>
-          <a:bodyPr wrap="none">
-            <a:spAutoFit/>
-          </a:bodyPr>
-          <a:lstStyle/>
-          <a:p>
-            <a:pPr algn="l"/>
-            <a:r>
-              <a:rPr sz="1200">
-                <a:solidFill>
-                  <a:srgbClr val="212D38"/>
-                </a:solidFill>
-                <a:latin typeface="Segoe UI"/>
-              </a:rPr>
-              <a:t>Because it maps the index to memory, your server RAM must scale linearly with your dataset size. Large datasets equal expensive server costs.</a:t>
-            </a:r>
-          </a:p>
-        </p:txBody>
-      </p:sp>
-      <p:sp>
-        <p:nvSpPr>
-          <p:cNvPr id="9" name="Rounded Rectangle 8"/>
+          <p:cNvPr id="6" name="Oval 5"/>
           <p:cNvSpPr/>
           <p:nvPr/>
         </p:nvSpPr>
         <p:spPr>
           <a:xfrm>
-            <a:off x="6355080" y="1325880"/>
-            <a:ext cx="5120640" cy="2148840"/>
-          </a:xfrm>
-          <a:prstGeom prst="roundRect">
+            <a:off x="804671" y="1399032"/>
+            <a:ext cx="502920" cy="502920"/>
+          </a:xfrm>
+          <a:prstGeom prst="ellipse">
             <a:avLst/>
           </a:prstGeom>
           <a:solidFill>
-            <a:srgbClr val="FFFFFF"/>
+            <a:srgbClr val="2C7A4E"/>
           </a:solidFill>
-          <a:ln w="15240">
-            <a:solidFill>
-              <a:srgbClr val="D0D9D2"/>
-            </a:solidFill>
+          <a:ln>
+            <a:noFill/>
           </a:ln>
         </p:spPr>
         <p:style>
@@ -5113,14 +5690,14 @@
       </p:sp>
       <p:sp>
         <p:nvSpPr>
-          <p:cNvPr id="10" name="TextBox 9"/>
+          <p:cNvPr id="7" name="TextBox 6"/>
           <p:cNvSpPr txBox="1"/>
           <p:nvPr/>
         </p:nvSpPr>
         <p:spPr>
           <a:xfrm>
-            <a:off x="6537960" y="1490472"/>
-            <a:ext cx="548640" cy="365760"/>
+            <a:off x="804671" y="1527048"/>
+            <a:ext cx="502920" cy="182880"/>
           </a:xfrm>
           <a:prstGeom prst="rect">
             <a:avLst/>
@@ -5128,34 +5705,44 @@
           <a:noFill/>
         </p:spPr>
         <p:txBody>
-          <a:bodyPr wrap="none">
+          <a:bodyPr wrap="square" lIns="18288" rIns="18288" tIns="9144" bIns="9144" anchor="t">
             <a:spAutoFit/>
           </a:bodyPr>
           <a:lstStyle/>
           <a:p>
-            <a:pPr algn="l"/>
-            <a:r>
-              <a:rPr sz="2000" b="1">
-                <a:solidFill>
-                  <a:srgbClr val="2E7D32"/>
+            <a:pPr algn="ctr">
+              <a:lnSpc>
+                <a:spcPct val="112000"/>
+              </a:lnSpc>
+              <a:spcBef>
+                <a:spcPts val="0"/>
+              </a:spcBef>
+              <a:spcAft>
+                <a:spcPts val="0"/>
+              </a:spcAft>
+            </a:pPr>
+            <a:r>
+              <a:rPr sz="1000" b="1">
+                <a:solidFill>
+                  <a:srgbClr val="FFFFFF"/>
                 </a:solidFill>
                 <a:latin typeface="Segoe UI"/>
               </a:rPr>
-              <a:t>⚙</a:t>
-            </a:r>
-          </a:p>
-        </p:txBody>
-      </p:sp>
-      <p:sp>
-        <p:nvSpPr>
-          <p:cNvPr id="11" name="TextBox 10"/>
+              <a:t>RAM</a:t>
+            </a:r>
+          </a:p>
+        </p:txBody>
+      </p:sp>
+      <p:sp>
+        <p:nvSpPr>
+          <p:cNvPr id="8" name="TextBox 7"/>
           <p:cNvSpPr txBox="1"/>
           <p:nvPr/>
         </p:nvSpPr>
         <p:spPr>
           <a:xfrm>
-            <a:off x="7132320" y="1463039"/>
-            <a:ext cx="4160520" cy="365760"/>
+            <a:off x="1389888" y="1399032"/>
+            <a:ext cx="4709160" cy="365760"/>
           </a:xfrm>
           <a:prstGeom prst="rect">
             <a:avLst/>
@@ -5163,34 +5750,44 @@
           <a:noFill/>
         </p:spPr>
         <p:txBody>
-          <a:bodyPr wrap="none">
+          <a:bodyPr wrap="square" lIns="18288" rIns="18288" tIns="9144" bIns="9144" anchor="t">
             <a:spAutoFit/>
           </a:bodyPr>
           <a:lstStyle/>
           <a:p>
-            <a:pPr algn="l"/>
-            <a:r>
-              <a:rPr sz="1600" b="1">
-                <a:solidFill>
-                  <a:srgbClr val="14532D"/>
+            <a:pPr algn="l">
+              <a:lnSpc>
+                <a:spcPct val="112000"/>
+              </a:lnSpc>
+              <a:spcBef>
+                <a:spcPts val="0"/>
+              </a:spcBef>
+              <a:spcAft>
+                <a:spcPts val="0"/>
+              </a:spcAft>
+            </a:pPr>
+            <a:r>
+              <a:rPr sz="1500" b="1">
+                <a:solidFill>
+                  <a:srgbClr val="184E34"/>
                 </a:solidFill>
                 <a:latin typeface="Segoe UI"/>
               </a:rPr>
-              <a:t>Heavy Indexing</a:t>
-            </a:r>
-          </a:p>
-        </p:txBody>
-      </p:sp>
-      <p:sp>
-        <p:nvSpPr>
-          <p:cNvPr id="12" name="TextBox 11"/>
+              <a:t>RAM Hungry</a:t>
+            </a:r>
+          </a:p>
+        </p:txBody>
+      </p:sp>
+      <p:sp>
+        <p:nvSpPr>
+          <p:cNvPr id="9" name="TextBox 8"/>
           <p:cNvSpPr txBox="1"/>
           <p:nvPr/>
         </p:nvSpPr>
         <p:spPr>
           <a:xfrm>
-            <a:off x="6583680" y="1856231"/>
-            <a:ext cx="4709159" cy="1463040"/>
+            <a:off x="822959" y="1892808"/>
+            <a:ext cx="5303520" cy="1728216"/>
           </a:xfrm>
           <a:prstGeom prst="rect">
             <a:avLst/>
@@ -5198,34 +5795,44 @@
           <a:noFill/>
         </p:spPr>
         <p:txBody>
-          <a:bodyPr wrap="none">
+          <a:bodyPr wrap="square" lIns="18288" rIns="18288" tIns="9144" bIns="9144" anchor="t">
             <a:spAutoFit/>
           </a:bodyPr>
           <a:lstStyle/>
           <a:p>
-            <a:pPr algn="l"/>
-            <a:r>
-              <a:rPr sz="1200">
+            <a:pPr algn="l">
+              <a:lnSpc>
+                <a:spcPct val="112000"/>
+              </a:lnSpc>
+              <a:spcBef>
+                <a:spcPts val="0"/>
+              </a:spcBef>
+              <a:spcAft>
+                <a:spcPts val="0"/>
+              </a:spcAft>
+            </a:pPr>
+            <a:r>
+              <a:rPr sz="1200" b="0">
                 <a:solidFill>
                   <a:srgbClr val="212D38"/>
                 </a:solidFill>
                 <a:latin typeface="Segoe UI"/>
               </a:rPr>
-              <a:t>Adding massive batches of documents consumes intense CPU and memory. If not queued properly, indexing can temporarily slow down search performance.</a:t>
-            </a:r>
-          </a:p>
-        </p:txBody>
-      </p:sp>
-      <p:sp>
-        <p:nvSpPr>
-          <p:cNvPr id="13" name="Rounded Rectangle 12"/>
+              <a:t>Because it maps the index to memory, your server RAM must scale linearly with your dataset size. Large datasets equal expensive server costs.</a:t>
+            </a:r>
+          </a:p>
+        </p:txBody>
+      </p:sp>
+      <p:sp>
+        <p:nvSpPr>
+          <p:cNvPr id="10" name="Rounded Rectangle 9"/>
           <p:cNvSpPr/>
           <p:nvPr/>
         </p:nvSpPr>
         <p:spPr>
           <a:xfrm>
-            <a:off x="731520" y="3703320"/>
-            <a:ext cx="5486400" cy="2148840"/>
+            <a:off x="6355080" y="1234440"/>
+            <a:ext cx="5166360" cy="2514600"/>
           </a:xfrm>
           <a:prstGeom prst="roundRect">
             <a:avLst/>
@@ -5233,9 +5840,9 @@
           <a:solidFill>
             <a:srgbClr val="FFFFFF"/>
           </a:solidFill>
-          <a:ln w="15240">
+          <a:ln w="12700">
             <a:solidFill>
-              <a:srgbClr val="D0D9D2"/>
+              <a:srgbClr val="CED8D1"/>
             </a:solidFill>
           </a:ln>
         </p:spPr>
@@ -5263,130 +5870,23 @@
       </p:sp>
       <p:sp>
         <p:nvSpPr>
-          <p:cNvPr id="14" name="TextBox 13"/>
-          <p:cNvSpPr txBox="1"/>
-          <p:nvPr/>
-        </p:nvSpPr>
-        <p:spPr>
-          <a:xfrm>
-            <a:off x="914400" y="3867911"/>
-            <a:ext cx="548640" cy="365760"/>
-          </a:xfrm>
-          <a:prstGeom prst="rect">
-            <a:avLst/>
-          </a:prstGeom>
-          <a:noFill/>
-        </p:spPr>
-        <p:txBody>
-          <a:bodyPr wrap="none">
-            <a:spAutoFit/>
-          </a:bodyPr>
-          <a:lstStyle/>
-          <a:p>
-            <a:pPr algn="l"/>
-            <a:r>
-              <a:rPr sz="2000" b="1">
-                <a:solidFill>
-                  <a:srgbClr val="2E7D32"/>
-                </a:solidFill>
-                <a:latin typeface="Segoe UI"/>
-              </a:rPr>
-              <a:t>📊</a:t>
-            </a:r>
-          </a:p>
-        </p:txBody>
-      </p:sp>
-      <p:sp>
-        <p:nvSpPr>
-          <p:cNvPr id="15" name="TextBox 14"/>
-          <p:cNvSpPr txBox="1"/>
-          <p:nvPr/>
-        </p:nvSpPr>
-        <p:spPr>
-          <a:xfrm>
-            <a:off x="1508760" y="3840480"/>
-            <a:ext cx="4526280" cy="365760"/>
-          </a:xfrm>
-          <a:prstGeom prst="rect">
-            <a:avLst/>
-          </a:prstGeom>
-          <a:noFill/>
-        </p:spPr>
-        <p:txBody>
-          <a:bodyPr wrap="none">
-            <a:spAutoFit/>
-          </a:bodyPr>
-          <a:lstStyle/>
-          <a:p>
-            <a:pPr algn="l"/>
-            <a:r>
-              <a:rPr sz="1600" b="1">
-                <a:solidFill>
-                  <a:srgbClr val="14532D"/>
-                </a:solidFill>
-                <a:latin typeface="Segoe UI"/>
-              </a:rPr>
-              <a:t>Analytics Limitations</a:t>
-            </a:r>
-          </a:p>
-        </p:txBody>
-      </p:sp>
-      <p:sp>
-        <p:nvSpPr>
-          <p:cNvPr id="16" name="TextBox 15"/>
-          <p:cNvSpPr txBox="1"/>
-          <p:nvPr/>
-        </p:nvSpPr>
-        <p:spPr>
-          <a:xfrm>
-            <a:off x="960120" y="4233672"/>
-            <a:ext cx="5074920" cy="1463040"/>
-          </a:xfrm>
-          <a:prstGeom prst="rect">
-            <a:avLst/>
-          </a:prstGeom>
-          <a:noFill/>
-        </p:spPr>
-        <p:txBody>
-          <a:bodyPr wrap="none">
-            <a:spAutoFit/>
-          </a:bodyPr>
-          <a:lstStyle/>
-          <a:p>
-            <a:pPr algn="l"/>
-            <a:r>
-              <a:rPr sz="1200">
-                <a:solidFill>
-                  <a:srgbClr val="212D38"/>
-                </a:solidFill>
-                <a:latin typeface="Segoe UI"/>
-              </a:rPr>
-              <a:t>It is built strictly for user facing search. It is not designed for complex data aggregations, log analysis, or massive data crunching (unlike Elasticsearch).</a:t>
-            </a:r>
-          </a:p>
-        </p:txBody>
-      </p:sp>
-      <p:sp>
-        <p:nvSpPr>
-          <p:cNvPr id="17" name="Rounded Rectangle 16"/>
+          <p:cNvPr id="11" name="Oval 10"/>
           <p:cNvSpPr/>
           <p:nvPr/>
         </p:nvSpPr>
         <p:spPr>
           <a:xfrm>
-            <a:off x="6355080" y="3703320"/>
-            <a:ext cx="5120640" cy="2148840"/>
-          </a:xfrm>
-          <a:prstGeom prst="roundRect">
+            <a:off x="6519672" y="1399032"/>
+            <a:ext cx="502920" cy="502920"/>
+          </a:xfrm>
+          <a:prstGeom prst="ellipse">
             <a:avLst/>
           </a:prstGeom>
           <a:solidFill>
-            <a:srgbClr val="FFFFFF"/>
+            <a:srgbClr val="2C7A4E"/>
           </a:solidFill>
-          <a:ln w="15240">
-            <a:solidFill>
-              <a:srgbClr val="D0D9D2"/>
-            </a:solidFill>
+          <a:ln>
+            <a:noFill/>
           </a:ln>
         </p:spPr>
         <p:style>
@@ -5413,14 +5913,282 @@
       </p:sp>
       <p:sp>
         <p:nvSpPr>
+          <p:cNvPr id="12" name="TextBox 11"/>
+          <p:cNvSpPr txBox="1"/>
+          <p:nvPr/>
+        </p:nvSpPr>
+        <p:spPr>
+          <a:xfrm>
+            <a:off x="6519672" y="1527048"/>
+            <a:ext cx="502920" cy="182880"/>
+          </a:xfrm>
+          <a:prstGeom prst="rect">
+            <a:avLst/>
+          </a:prstGeom>
+          <a:noFill/>
+        </p:spPr>
+        <p:txBody>
+          <a:bodyPr wrap="square" lIns="18288" rIns="18288" tIns="9144" bIns="9144" anchor="t">
+            <a:spAutoFit/>
+          </a:bodyPr>
+          <a:lstStyle/>
+          <a:p>
+            <a:pPr algn="ctr">
+              <a:lnSpc>
+                <a:spcPct val="112000"/>
+              </a:lnSpc>
+              <a:spcBef>
+                <a:spcPts val="0"/>
+              </a:spcBef>
+              <a:spcAft>
+                <a:spcPts val="0"/>
+              </a:spcAft>
+            </a:pPr>
+            <a:r>
+              <a:rPr sz="1000" b="1">
+                <a:solidFill>
+                  <a:srgbClr val="FFFFFF"/>
+                </a:solidFill>
+                <a:latin typeface="Segoe UI"/>
+              </a:rPr>
+              <a:t>IDX</a:t>
+            </a:r>
+          </a:p>
+        </p:txBody>
+      </p:sp>
+      <p:sp>
+        <p:nvSpPr>
+          <p:cNvPr id="13" name="TextBox 12"/>
+          <p:cNvSpPr txBox="1"/>
+          <p:nvPr/>
+        </p:nvSpPr>
+        <p:spPr>
+          <a:xfrm>
+            <a:off x="7104888" y="1399032"/>
+            <a:ext cx="4251960" cy="365760"/>
+          </a:xfrm>
+          <a:prstGeom prst="rect">
+            <a:avLst/>
+          </a:prstGeom>
+          <a:noFill/>
+        </p:spPr>
+        <p:txBody>
+          <a:bodyPr wrap="square" lIns="18288" rIns="18288" tIns="9144" bIns="9144" anchor="t">
+            <a:spAutoFit/>
+          </a:bodyPr>
+          <a:lstStyle/>
+          <a:p>
+            <a:pPr algn="l">
+              <a:lnSpc>
+                <a:spcPct val="112000"/>
+              </a:lnSpc>
+              <a:spcBef>
+                <a:spcPts val="0"/>
+              </a:spcBef>
+              <a:spcAft>
+                <a:spcPts val="0"/>
+              </a:spcAft>
+            </a:pPr>
+            <a:r>
+              <a:rPr sz="1500" b="1">
+                <a:solidFill>
+                  <a:srgbClr val="184E34"/>
+                </a:solidFill>
+                <a:latin typeface="Segoe UI"/>
+              </a:rPr>
+              <a:t>Heavy Indexing</a:t>
+            </a:r>
+          </a:p>
+        </p:txBody>
+      </p:sp>
+      <p:sp>
+        <p:nvSpPr>
+          <p:cNvPr id="14" name="TextBox 13"/>
+          <p:cNvSpPr txBox="1"/>
+          <p:nvPr/>
+        </p:nvSpPr>
+        <p:spPr>
+          <a:xfrm>
+            <a:off x="6537960" y="1892808"/>
+            <a:ext cx="4846320" cy="1728216"/>
+          </a:xfrm>
+          <a:prstGeom prst="rect">
+            <a:avLst/>
+          </a:prstGeom>
+          <a:noFill/>
+        </p:spPr>
+        <p:txBody>
+          <a:bodyPr wrap="square" lIns="18288" rIns="18288" tIns="9144" bIns="9144" anchor="t">
+            <a:spAutoFit/>
+          </a:bodyPr>
+          <a:lstStyle/>
+          <a:p>
+            <a:pPr algn="l">
+              <a:lnSpc>
+                <a:spcPct val="112000"/>
+              </a:lnSpc>
+              <a:spcBef>
+                <a:spcPts val="0"/>
+              </a:spcBef>
+              <a:spcAft>
+                <a:spcPts val="0"/>
+              </a:spcAft>
+            </a:pPr>
+            <a:r>
+              <a:rPr sz="1200" b="0">
+                <a:solidFill>
+                  <a:srgbClr val="212D38"/>
+                </a:solidFill>
+                <a:latin typeface="Segoe UI"/>
+              </a:rPr>
+              <a:t>Adding massive batches of documents consumes intense CPU and memory. If not queued properly, indexing can temporarily slow down search performance.</a:t>
+            </a:r>
+          </a:p>
+        </p:txBody>
+      </p:sp>
+      <p:sp>
+        <p:nvSpPr>
+          <p:cNvPr id="15" name="Rounded Rectangle 14"/>
+          <p:cNvSpPr/>
+          <p:nvPr/>
+        </p:nvSpPr>
+        <p:spPr>
+          <a:xfrm>
+            <a:off x="640080" y="3794760"/>
+            <a:ext cx="5623560" cy="2514600"/>
+          </a:xfrm>
+          <a:prstGeom prst="roundRect">
+            <a:avLst/>
+          </a:prstGeom>
+          <a:solidFill>
+            <a:srgbClr val="FFFFFF"/>
+          </a:solidFill>
+          <a:ln w="12700">
+            <a:solidFill>
+              <a:srgbClr val="CED8D1"/>
+            </a:solidFill>
+          </a:ln>
+        </p:spPr>
+        <p:style>
+          <a:lnRef idx="1">
+            <a:schemeClr val="accent1"/>
+          </a:lnRef>
+          <a:fillRef idx="3">
+            <a:schemeClr val="accent1"/>
+          </a:fillRef>
+          <a:effectRef idx="2">
+            <a:schemeClr val="accent1"/>
+          </a:effectRef>
+          <a:fontRef idx="minor">
+            <a:schemeClr val="lt1"/>
+          </a:fontRef>
+        </p:style>
+        <p:txBody>
+          <a:bodyPr rtlCol="0" anchor="ctr"/>
+          <a:lstStyle/>
+          <a:p>
+            <a:pPr algn="ctr"/>
+          </a:p>
+        </p:txBody>
+      </p:sp>
+      <p:sp>
+        <p:nvSpPr>
+          <p:cNvPr id="16" name="Oval 15"/>
+          <p:cNvSpPr/>
+          <p:nvPr/>
+        </p:nvSpPr>
+        <p:spPr>
+          <a:xfrm>
+            <a:off x="804671" y="3959352"/>
+            <a:ext cx="502920" cy="502920"/>
+          </a:xfrm>
+          <a:prstGeom prst="ellipse">
+            <a:avLst/>
+          </a:prstGeom>
+          <a:solidFill>
+            <a:srgbClr val="2C7A4E"/>
+          </a:solidFill>
+          <a:ln>
+            <a:noFill/>
+          </a:ln>
+        </p:spPr>
+        <p:style>
+          <a:lnRef idx="1">
+            <a:schemeClr val="accent1"/>
+          </a:lnRef>
+          <a:fillRef idx="3">
+            <a:schemeClr val="accent1"/>
+          </a:fillRef>
+          <a:effectRef idx="2">
+            <a:schemeClr val="accent1"/>
+          </a:effectRef>
+          <a:fontRef idx="minor">
+            <a:schemeClr val="lt1"/>
+          </a:fontRef>
+        </p:style>
+        <p:txBody>
+          <a:bodyPr rtlCol="0" anchor="ctr"/>
+          <a:lstStyle/>
+          <a:p>
+            <a:pPr algn="ctr"/>
+          </a:p>
+        </p:txBody>
+      </p:sp>
+      <p:sp>
+        <p:nvSpPr>
+          <p:cNvPr id="17" name="TextBox 16"/>
+          <p:cNvSpPr txBox="1"/>
+          <p:nvPr/>
+        </p:nvSpPr>
+        <p:spPr>
+          <a:xfrm>
+            <a:off x="804671" y="4087368"/>
+            <a:ext cx="502920" cy="182880"/>
+          </a:xfrm>
+          <a:prstGeom prst="rect">
+            <a:avLst/>
+          </a:prstGeom>
+          <a:noFill/>
+        </p:spPr>
+        <p:txBody>
+          <a:bodyPr wrap="square" lIns="18288" rIns="18288" tIns="9144" bIns="9144" anchor="t">
+            <a:spAutoFit/>
+          </a:bodyPr>
+          <a:lstStyle/>
+          <a:p>
+            <a:pPr algn="ctr">
+              <a:lnSpc>
+                <a:spcPct val="112000"/>
+              </a:lnSpc>
+              <a:spcBef>
+                <a:spcPts val="0"/>
+              </a:spcBef>
+              <a:spcAft>
+                <a:spcPts val="0"/>
+              </a:spcAft>
+            </a:pPr>
+            <a:r>
+              <a:rPr sz="1000" b="1">
+                <a:solidFill>
+                  <a:srgbClr val="FFFFFF"/>
+                </a:solidFill>
+                <a:latin typeface="Segoe UI"/>
+              </a:rPr>
+              <a:t>ANL</a:t>
+            </a:r>
+          </a:p>
+        </p:txBody>
+      </p:sp>
+      <p:sp>
+        <p:nvSpPr>
           <p:cNvPr id="18" name="TextBox 17"/>
           <p:cNvSpPr txBox="1"/>
           <p:nvPr/>
         </p:nvSpPr>
         <p:spPr>
           <a:xfrm>
-            <a:off x="6537960" y="3867911"/>
-            <a:ext cx="548640" cy="365760"/>
+            <a:off x="1389888" y="3959352"/>
+            <a:ext cx="4709160" cy="365760"/>
           </a:xfrm>
           <a:prstGeom prst="rect">
             <a:avLst/>
@@ -5428,20 +6196,30 @@
           <a:noFill/>
         </p:spPr>
         <p:txBody>
-          <a:bodyPr wrap="none">
+          <a:bodyPr wrap="square" lIns="18288" rIns="18288" tIns="9144" bIns="9144" anchor="t">
             <a:spAutoFit/>
           </a:bodyPr>
           <a:lstStyle/>
           <a:p>
-            <a:pPr algn="l"/>
-            <a:r>
-              <a:rPr sz="2000" b="1">
-                <a:solidFill>
-                  <a:srgbClr val="2E7D32"/>
+            <a:pPr algn="l">
+              <a:lnSpc>
+                <a:spcPct val="112000"/>
+              </a:lnSpc>
+              <a:spcBef>
+                <a:spcPts val="0"/>
+              </a:spcBef>
+              <a:spcAft>
+                <a:spcPts val="0"/>
+              </a:spcAft>
+            </a:pPr>
+            <a:r>
+              <a:rPr sz="1500" b="1">
+                <a:solidFill>
+                  <a:srgbClr val="184E34"/>
                 </a:solidFill>
                 <a:latin typeface="Segoe UI"/>
               </a:rPr>
-              <a:t>🗄</a:t>
+              <a:t>Analytics Limitations</a:t>
             </a:r>
           </a:p>
         </p:txBody>
@@ -5454,8 +6232,8 @@
         </p:nvSpPr>
         <p:spPr>
           <a:xfrm>
-            <a:off x="7132320" y="3840480"/>
-            <a:ext cx="4160520" cy="365760"/>
+            <a:off x="822959" y="4453128"/>
+            <a:ext cx="5303520" cy="1728216"/>
           </a:xfrm>
           <a:prstGeom prst="rect">
             <a:avLst/>
@@ -5463,16 +6241,204 @@
           <a:noFill/>
         </p:spPr>
         <p:txBody>
-          <a:bodyPr wrap="none">
+          <a:bodyPr wrap="square" lIns="18288" rIns="18288" tIns="9144" bIns="9144" anchor="t">
             <a:spAutoFit/>
           </a:bodyPr>
           <a:lstStyle/>
           <a:p>
-            <a:pPr algn="l"/>
-            <a:r>
-              <a:rPr sz="1600" b="1">
-                <a:solidFill>
-                  <a:srgbClr val="14532D"/>
+            <a:pPr algn="l">
+              <a:lnSpc>
+                <a:spcPct val="112000"/>
+              </a:lnSpc>
+              <a:spcBef>
+                <a:spcPts val="0"/>
+              </a:spcBef>
+              <a:spcAft>
+                <a:spcPts val="0"/>
+              </a:spcAft>
+            </a:pPr>
+            <a:r>
+              <a:rPr sz="1200" b="0">
+                <a:solidFill>
+                  <a:srgbClr val="212D38"/>
+                </a:solidFill>
+                <a:latin typeface="Segoe UI"/>
+              </a:rPr>
+              <a:t>It is built strictly for user facing search. It is not designed for complex data aggregations, log analysis, or massive data crunching (unlike Elasticsearch).</a:t>
+            </a:r>
+          </a:p>
+        </p:txBody>
+      </p:sp>
+      <p:sp>
+        <p:nvSpPr>
+          <p:cNvPr id="20" name="Rounded Rectangle 19"/>
+          <p:cNvSpPr/>
+          <p:nvPr/>
+        </p:nvSpPr>
+        <p:spPr>
+          <a:xfrm>
+            <a:off x="6355080" y="3794760"/>
+            <a:ext cx="5166360" cy="2514600"/>
+          </a:xfrm>
+          <a:prstGeom prst="roundRect">
+            <a:avLst/>
+          </a:prstGeom>
+          <a:solidFill>
+            <a:srgbClr val="FFFFFF"/>
+          </a:solidFill>
+          <a:ln w="12700">
+            <a:solidFill>
+              <a:srgbClr val="CED8D1"/>
+            </a:solidFill>
+          </a:ln>
+        </p:spPr>
+        <p:style>
+          <a:lnRef idx="1">
+            <a:schemeClr val="accent1"/>
+          </a:lnRef>
+          <a:fillRef idx="3">
+            <a:schemeClr val="accent1"/>
+          </a:fillRef>
+          <a:effectRef idx="2">
+            <a:schemeClr val="accent1"/>
+          </a:effectRef>
+          <a:fontRef idx="minor">
+            <a:schemeClr val="lt1"/>
+          </a:fontRef>
+        </p:style>
+        <p:txBody>
+          <a:bodyPr rtlCol="0" anchor="ctr"/>
+          <a:lstStyle/>
+          <a:p>
+            <a:pPr algn="ctr"/>
+          </a:p>
+        </p:txBody>
+      </p:sp>
+      <p:sp>
+        <p:nvSpPr>
+          <p:cNvPr id="21" name="Oval 20"/>
+          <p:cNvSpPr/>
+          <p:nvPr/>
+        </p:nvSpPr>
+        <p:spPr>
+          <a:xfrm>
+            <a:off x="6519672" y="3959352"/>
+            <a:ext cx="502920" cy="502920"/>
+          </a:xfrm>
+          <a:prstGeom prst="ellipse">
+            <a:avLst/>
+          </a:prstGeom>
+          <a:solidFill>
+            <a:srgbClr val="2C7A4E"/>
+          </a:solidFill>
+          <a:ln>
+            <a:noFill/>
+          </a:ln>
+        </p:spPr>
+        <p:style>
+          <a:lnRef idx="1">
+            <a:schemeClr val="accent1"/>
+          </a:lnRef>
+          <a:fillRef idx="3">
+            <a:schemeClr val="accent1"/>
+          </a:fillRef>
+          <a:effectRef idx="2">
+            <a:schemeClr val="accent1"/>
+          </a:effectRef>
+          <a:fontRef idx="minor">
+            <a:schemeClr val="lt1"/>
+          </a:fontRef>
+        </p:style>
+        <p:txBody>
+          <a:bodyPr rtlCol="0" anchor="ctr"/>
+          <a:lstStyle/>
+          <a:p>
+            <a:pPr algn="ctr"/>
+          </a:p>
+        </p:txBody>
+      </p:sp>
+      <p:sp>
+        <p:nvSpPr>
+          <p:cNvPr id="22" name="TextBox 21"/>
+          <p:cNvSpPr txBox="1"/>
+          <p:nvPr/>
+        </p:nvSpPr>
+        <p:spPr>
+          <a:xfrm>
+            <a:off x="6519672" y="4087368"/>
+            <a:ext cx="502920" cy="182880"/>
+          </a:xfrm>
+          <a:prstGeom prst="rect">
+            <a:avLst/>
+          </a:prstGeom>
+          <a:noFill/>
+        </p:spPr>
+        <p:txBody>
+          <a:bodyPr wrap="square" lIns="18288" rIns="18288" tIns="9144" bIns="9144" anchor="t">
+            <a:spAutoFit/>
+          </a:bodyPr>
+          <a:lstStyle/>
+          <a:p>
+            <a:pPr algn="ctr">
+              <a:lnSpc>
+                <a:spcPct val="112000"/>
+              </a:lnSpc>
+              <a:spcBef>
+                <a:spcPts val="0"/>
+              </a:spcBef>
+              <a:spcAft>
+                <a:spcPts val="0"/>
+              </a:spcAft>
+            </a:pPr>
+            <a:r>
+              <a:rPr sz="1000" b="1">
+                <a:solidFill>
+                  <a:srgbClr val="FFFFFF"/>
+                </a:solidFill>
+                <a:latin typeface="Segoe UI"/>
+              </a:rPr>
+              <a:t>SCL</a:t>
+            </a:r>
+          </a:p>
+        </p:txBody>
+      </p:sp>
+      <p:sp>
+        <p:nvSpPr>
+          <p:cNvPr id="23" name="TextBox 22"/>
+          <p:cNvSpPr txBox="1"/>
+          <p:nvPr/>
+        </p:nvSpPr>
+        <p:spPr>
+          <a:xfrm>
+            <a:off x="7104888" y="3959352"/>
+            <a:ext cx="4251960" cy="365760"/>
+          </a:xfrm>
+          <a:prstGeom prst="rect">
+            <a:avLst/>
+          </a:prstGeom>
+          <a:noFill/>
+        </p:spPr>
+        <p:txBody>
+          <a:bodyPr wrap="square" lIns="18288" rIns="18288" tIns="9144" bIns="9144" anchor="t">
+            <a:spAutoFit/>
+          </a:bodyPr>
+          <a:lstStyle/>
+          <a:p>
+            <a:pPr algn="l">
+              <a:lnSpc>
+                <a:spcPct val="112000"/>
+              </a:lnSpc>
+              <a:spcBef>
+                <a:spcPts val="0"/>
+              </a:spcBef>
+              <a:spcAft>
+                <a:spcPts val="0"/>
+              </a:spcAft>
+            </a:pPr>
+            <a:r>
+              <a:rPr sz="1500" b="1">
+                <a:solidFill>
+                  <a:srgbClr val="184E34"/>
                 </a:solidFill>
                 <a:latin typeface="Segoe UI"/>
               </a:rPr>
@@ -5483,14 +6449,14 @@
       </p:sp>
       <p:sp>
         <p:nvSpPr>
-          <p:cNvPr id="20" name="TextBox 19"/>
+          <p:cNvPr id="24" name="TextBox 23"/>
           <p:cNvSpPr txBox="1"/>
           <p:nvPr/>
         </p:nvSpPr>
         <p:spPr>
           <a:xfrm>
-            <a:off x="6583680" y="4233672"/>
-            <a:ext cx="4709159" cy="1463040"/>
+            <a:off x="6537960" y="4453128"/>
+            <a:ext cx="4846320" cy="1728216"/>
           </a:xfrm>
           <a:prstGeom prst="rect">
             <a:avLst/>
@@ -5498,14 +6464,24 @@
           <a:noFill/>
         </p:spPr>
         <p:txBody>
-          <a:bodyPr wrap="none">
+          <a:bodyPr wrap="square" lIns="18288" rIns="18288" tIns="9144" bIns="9144" anchor="t">
             <a:spAutoFit/>
           </a:bodyPr>
           <a:lstStyle/>
           <a:p>
-            <a:pPr algn="l"/>
-            <a:r>
-              <a:rPr sz="1200">
+            <a:pPr algn="l">
+              <a:lnSpc>
+                <a:spcPct val="112000"/>
+              </a:lnSpc>
+              <a:spcBef>
+                <a:spcPts val="0"/>
+              </a:spcBef>
+              <a:spcAft>
+                <a:spcPts val="0"/>
+              </a:spcAft>
+            </a:pPr>
+            <a:r>
+              <a:rPr sz="1200" b="0">
                 <a:solidFill>
                   <a:srgbClr val="212D38"/>
                 </a:solidFill>
@@ -5549,7 +6525,7 @@
             <a:avLst/>
           </a:prstGeom>
           <a:solidFill>
-            <a:srgbClr val="14532D"/>
+            <a:srgbClr val="184E34"/>
           </a:solidFill>
           <a:ln>
             <a:noFill/>
@@ -5585,8 +6561,8 @@
         </p:nvSpPr>
         <p:spPr>
           <a:xfrm>
-            <a:off x="640080" y="182880"/>
-            <a:ext cx="10972800" cy="411480"/>
+            <a:off x="640080" y="146304"/>
+            <a:ext cx="10972800" cy="384048"/>
           </a:xfrm>
           <a:prstGeom prst="rect">
             <a:avLst/>
@@ -5594,14 +6570,24 @@
           <a:noFill/>
         </p:spPr>
         <p:txBody>
-          <a:bodyPr wrap="none">
+          <a:bodyPr wrap="square" lIns="18288" rIns="18288" tIns="9144" bIns="9144" anchor="t">
             <a:spAutoFit/>
           </a:bodyPr>
           <a:lstStyle/>
           <a:p>
-            <a:pPr algn="l"/>
-            <a:r>
-              <a:rPr sz="3000" b="1">
+            <a:pPr algn="l">
+              <a:lnSpc>
+                <a:spcPct val="112000"/>
+              </a:lnSpc>
+              <a:spcBef>
+                <a:spcPts val="0"/>
+              </a:spcBef>
+              <a:spcAft>
+                <a:spcPts val="0"/>
+              </a:spcAft>
+            </a:pPr>
+            <a:r>
+              <a:rPr sz="2800" b="1">
                 <a:solidFill>
                   <a:srgbClr val="FFFFFF"/>
                 </a:solidFill>
@@ -5620,8 +6606,8 @@
         </p:nvSpPr>
         <p:spPr>
           <a:xfrm>
-            <a:off x="640080" y="566928"/>
-            <a:ext cx="10972800" cy="274320"/>
+            <a:off x="640080" y="530352"/>
+            <a:ext cx="10972800" cy="256032"/>
           </a:xfrm>
           <a:prstGeom prst="rect">
             <a:avLst/>
@@ -5629,16 +6615,26 @@
           <a:noFill/>
         </p:spPr>
         <p:txBody>
-          <a:bodyPr wrap="none">
+          <a:bodyPr wrap="square" lIns="18288" rIns="18288" tIns="9144" bIns="9144" anchor="t">
             <a:spAutoFit/>
           </a:bodyPr>
           <a:lstStyle/>
           <a:p>
-            <a:pPr algn="l"/>
-            <a:r>
-              <a:rPr sz="1500" b="0">
-                <a:solidFill>
-                  <a:srgbClr val="DCEBE0"/>
+            <a:pPr algn="l">
+              <a:lnSpc>
+                <a:spcPct val="112000"/>
+              </a:lnSpc>
+              <a:spcBef>
+                <a:spcPts val="0"/>
+              </a:spcBef>
+              <a:spcAft>
+                <a:spcPts val="0"/>
+              </a:spcAft>
+            </a:pPr>
+            <a:r>
+              <a:rPr sz="1400" b="0">
+                <a:solidFill>
+                  <a:srgbClr val="DDEAE2"/>
                 </a:solidFill>
                 <a:latin typeface="Segoe UI"/>
               </a:rPr>
@@ -5655,18 +6651,18 @@
         </p:nvSpPr>
         <p:spPr>
           <a:xfrm>
-            <a:off x="731520" y="1280160"/>
-            <a:ext cx="10972800" cy="914400"/>
+            <a:off x="640080" y="1188720"/>
+            <a:ext cx="10972800" cy="960120"/>
           </a:xfrm>
           <a:prstGeom prst="roundRect">
             <a:avLst/>
           </a:prstGeom>
           <a:solidFill>
-            <a:srgbClr val="F5F9F6"/>
+            <a:srgbClr val="F5F8F6"/>
           </a:solidFill>
           <a:ln>
             <a:solidFill>
-              <a:srgbClr val="D0D9D2"/>
+              <a:srgbClr val="CED8D1"/>
             </a:solidFill>
           </a:ln>
         </p:spPr>
@@ -5700,8 +6696,8 @@
         </p:nvSpPr>
         <p:spPr>
           <a:xfrm>
-            <a:off x="1005840" y="1554480"/>
-            <a:ext cx="10332720" cy="365760"/>
+            <a:off x="914400" y="1490472"/>
+            <a:ext cx="10424160" cy="411480"/>
           </a:xfrm>
           <a:prstGeom prst="rect">
             <a:avLst/>
@@ -5709,16 +6705,26 @@
           <a:noFill/>
         </p:spPr>
         <p:txBody>
-          <a:bodyPr wrap="none">
+          <a:bodyPr wrap="square" lIns="18288" rIns="18288" tIns="9144" bIns="9144" anchor="t">
             <a:spAutoFit/>
           </a:bodyPr>
           <a:lstStyle/>
           <a:p>
-            <a:pPr algn="l"/>
-            <a:r>
-              <a:rPr sz="1400" b="1">
-                <a:solidFill>
-                  <a:srgbClr val="14532D"/>
+            <a:pPr algn="l">
+              <a:lnSpc>
+                <a:spcPct val="112000"/>
+              </a:lnSpc>
+              <a:spcBef>
+                <a:spcPts val="0"/>
+              </a:spcBef>
+              <a:spcAft>
+                <a:spcPts val="0"/>
+              </a:spcAft>
+            </a:pPr>
+            <a:r>
+              <a:rPr sz="1300" b="1">
+                <a:solidFill>
+                  <a:srgbClr val="184E34"/>
                 </a:solidFill>
                 <a:latin typeface="Segoe UI"/>
               </a:rPr>
@@ -5735,8 +6741,8 @@
         </p:nvSpPr>
         <p:spPr>
           <a:xfrm>
-            <a:off x="777240" y="2560320"/>
-            <a:ext cx="2697480" cy="3383280"/>
+            <a:off x="685800" y="2468880"/>
+            <a:ext cx="2651760" cy="3611880"/>
           </a:xfrm>
           <a:prstGeom prst="roundRect">
             <a:avLst/>
@@ -5746,7 +6752,7 @@
           </a:solidFill>
           <a:ln>
             <a:solidFill>
-              <a:srgbClr val="2E7D32"/>
+              <a:srgbClr val="2C7A4E"/>
             </a:solidFill>
           </a:ln>
         </p:spPr>
@@ -5780,14 +6786,14 @@
         </p:nvSpPr>
         <p:spPr>
           <a:xfrm>
-            <a:off x="868680" y="2697480"/>
-            <a:ext cx="502920" cy="502920"/>
+            <a:off x="822960" y="2651760"/>
+            <a:ext cx="475488" cy="475488"/>
           </a:xfrm>
           <a:prstGeom prst="ellipse">
             <a:avLst/>
           </a:prstGeom>
           <a:solidFill>
-            <a:srgbClr val="14532D"/>
+            <a:srgbClr val="184E34"/>
           </a:solidFill>
           <a:ln>
             <a:noFill/>
@@ -5823,8 +6829,8 @@
         </p:nvSpPr>
         <p:spPr>
           <a:xfrm>
-            <a:off x="1033271" y="2816352"/>
-            <a:ext cx="182880" cy="182880"/>
+            <a:off x="822960" y="2770632"/>
+            <a:ext cx="475488" cy="182880"/>
           </a:xfrm>
           <a:prstGeom prst="rect">
             <a:avLst/>
@@ -5832,14 +6838,24 @@
           <a:noFill/>
         </p:spPr>
         <p:txBody>
-          <a:bodyPr wrap="none">
+          <a:bodyPr wrap="square" lIns="18288" rIns="18288" tIns="9144" bIns="9144" anchor="t">
             <a:spAutoFit/>
           </a:bodyPr>
           <a:lstStyle/>
           <a:p>
-            <a:pPr algn="ctr"/>
-            <a:r>
-              <a:rPr sz="1200" b="1">
+            <a:pPr algn="ctr">
+              <a:lnSpc>
+                <a:spcPct val="112000"/>
+              </a:lnSpc>
+              <a:spcBef>
+                <a:spcPts val="0"/>
+              </a:spcBef>
+              <a:spcAft>
+                <a:spcPts val="0"/>
+              </a:spcAft>
+            </a:pPr>
+            <a:r>
+              <a:rPr sz="1000" b="1">
                 <a:solidFill>
                   <a:srgbClr val="FFFFFF"/>
                 </a:solidFill>
@@ -5858,8 +6874,8 @@
         </p:nvSpPr>
         <p:spPr>
           <a:xfrm>
-            <a:off x="1463040" y="2724912"/>
-            <a:ext cx="1920240" cy="365760"/>
+            <a:off x="1371600" y="2670048"/>
+            <a:ext cx="1783080" cy="320040"/>
           </a:xfrm>
           <a:prstGeom prst="rect">
             <a:avLst/>
@@ -5867,16 +6883,26 @@
           <a:noFill/>
         </p:spPr>
         <p:txBody>
-          <a:bodyPr wrap="none">
+          <a:bodyPr wrap="square" lIns="18288" rIns="18288" tIns="9144" bIns="9144" anchor="t">
             <a:spAutoFit/>
           </a:bodyPr>
           <a:lstStyle/>
           <a:p>
-            <a:pPr algn="l"/>
-            <a:r>
-              <a:rPr sz="1500" b="1">
-                <a:solidFill>
-                  <a:srgbClr val="14532D"/>
+            <a:pPr algn="l">
+              <a:lnSpc>
+                <a:spcPct val="112000"/>
+              </a:lnSpc>
+              <a:spcBef>
+                <a:spcPts val="0"/>
+              </a:spcBef>
+              <a:spcAft>
+                <a:spcPts val="0"/>
+              </a:spcAft>
+            </a:pPr>
+            <a:r>
+              <a:rPr sz="1400" b="1">
+                <a:solidFill>
+                  <a:srgbClr val="184E34"/>
                 </a:solidFill>
                 <a:latin typeface="Segoe UI"/>
               </a:rPr>
@@ -5893,8 +6919,8 @@
         </p:nvSpPr>
         <p:spPr>
           <a:xfrm>
-            <a:off x="914400" y="3246120"/>
-            <a:ext cx="2423160" cy="2468880"/>
+            <a:off x="822960" y="3154680"/>
+            <a:ext cx="2377440" cy="2697480"/>
           </a:xfrm>
           <a:prstGeom prst="rect">
             <a:avLst/>
@@ -5902,12 +6928,22 @@
           <a:noFill/>
         </p:spPr>
         <p:txBody>
-          <a:bodyPr wrap="none">
+          <a:bodyPr wrap="square" lIns="18288" rIns="18288" tIns="9144" bIns="9144" anchor="t">
             <a:spAutoFit/>
           </a:bodyPr>
           <a:lstStyle/>
           <a:p>
-            <a:pPr algn="l"/>
+            <a:pPr algn="l">
+              <a:lnSpc>
+                <a:spcPct val="112000"/>
+              </a:lnSpc>
+              <a:spcBef>
+                <a:spcPts val="0"/>
+              </a:spcBef>
+              <a:spcAft>
+                <a:spcPts val="0"/>
+              </a:spcAft>
+            </a:pPr>
             <a:r>
               <a:rPr sz="1100" b="0">
                 <a:solidFill>
@@ -5928,14 +6964,14 @@
         </p:nvSpPr>
         <p:spPr>
           <a:xfrm>
-            <a:off x="3520440" y="3977639"/>
-            <a:ext cx="347472" cy="457200"/>
+            <a:off x="3364992" y="3840480"/>
+            <a:ext cx="320040" cy="502920"/>
           </a:xfrm>
           <a:prstGeom prst="rightArrow">
             <a:avLst/>
           </a:prstGeom>
           <a:solidFill>
-            <a:srgbClr val="43A047"/>
+            <a:srgbClr val="2C7A4E"/>
           </a:solidFill>
           <a:ln>
             <a:noFill/>
@@ -5971,8 +7007,8 @@
         </p:nvSpPr>
         <p:spPr>
           <a:xfrm>
-            <a:off x="3657600" y="2560320"/>
-            <a:ext cx="2697480" cy="3383280"/>
+            <a:off x="3502152" y="2468880"/>
+            <a:ext cx="2651760" cy="3611880"/>
           </a:xfrm>
           <a:prstGeom prst="roundRect">
             <a:avLst/>
@@ -5982,7 +7018,7 @@
           </a:solidFill>
           <a:ln>
             <a:solidFill>
-              <a:srgbClr val="2E7D32"/>
+              <a:srgbClr val="2C7A4E"/>
             </a:solidFill>
           </a:ln>
         </p:spPr>
@@ -6016,14 +7052,14 @@
         </p:nvSpPr>
         <p:spPr>
           <a:xfrm>
-            <a:off x="3749039" y="2697480"/>
-            <a:ext cx="502920" cy="502920"/>
+            <a:off x="3639312" y="2651760"/>
+            <a:ext cx="475488" cy="475488"/>
           </a:xfrm>
           <a:prstGeom prst="ellipse">
             <a:avLst/>
           </a:prstGeom>
           <a:solidFill>
-            <a:srgbClr val="14532D"/>
+            <a:srgbClr val="184E34"/>
           </a:solidFill>
           <a:ln>
             <a:noFill/>
@@ -6059,8 +7095,8 @@
         </p:nvSpPr>
         <p:spPr>
           <a:xfrm>
-            <a:off x="3913632" y="2816352"/>
-            <a:ext cx="182880" cy="182880"/>
+            <a:off x="3639312" y="2770632"/>
+            <a:ext cx="475488" cy="182880"/>
           </a:xfrm>
           <a:prstGeom prst="rect">
             <a:avLst/>
@@ -6068,14 +7104,24 @@
           <a:noFill/>
         </p:spPr>
         <p:txBody>
-          <a:bodyPr wrap="none">
+          <a:bodyPr wrap="square" lIns="18288" rIns="18288" tIns="9144" bIns="9144" anchor="t">
             <a:spAutoFit/>
           </a:bodyPr>
           <a:lstStyle/>
           <a:p>
-            <a:pPr algn="ctr"/>
-            <a:r>
-              <a:rPr sz="1200" b="1">
+            <a:pPr algn="ctr">
+              <a:lnSpc>
+                <a:spcPct val="112000"/>
+              </a:lnSpc>
+              <a:spcBef>
+                <a:spcPts val="0"/>
+              </a:spcBef>
+              <a:spcAft>
+                <a:spcPts val="0"/>
+              </a:spcAft>
+            </a:pPr>
+            <a:r>
+              <a:rPr sz="1000" b="1">
                 <a:solidFill>
                   <a:srgbClr val="FFFFFF"/>
                 </a:solidFill>
@@ -6094,8 +7140,8 @@
         </p:nvSpPr>
         <p:spPr>
           <a:xfrm>
-            <a:off x="4343400" y="2724912"/>
-            <a:ext cx="1920240" cy="365760"/>
+            <a:off x="4187952" y="2670048"/>
+            <a:ext cx="1783080" cy="320040"/>
           </a:xfrm>
           <a:prstGeom prst="rect">
             <a:avLst/>
@@ -6103,20 +7149,30 @@
           <a:noFill/>
         </p:spPr>
         <p:txBody>
-          <a:bodyPr wrap="none">
+          <a:bodyPr wrap="square" lIns="18288" rIns="18288" tIns="9144" bIns="9144" anchor="t">
             <a:spAutoFit/>
           </a:bodyPr>
           <a:lstStyle/>
           <a:p>
-            <a:pPr algn="l"/>
-            <a:r>
-              <a:rPr sz="1500" b="1">
-                <a:solidFill>
-                  <a:srgbClr val="14532D"/>
+            <a:pPr algn="l">
+              <a:lnSpc>
+                <a:spcPct val="112000"/>
+              </a:lnSpc>
+              <a:spcBef>
+                <a:spcPts val="0"/>
+              </a:spcBef>
+              <a:spcAft>
+                <a:spcPts val="0"/>
+              </a:spcAft>
+            </a:pPr>
+            <a:r>
+              <a:rPr sz="1400" b="1">
+                <a:solidFill>
+                  <a:srgbClr val="184E34"/>
                 </a:solidFill>
                 <a:latin typeface="Segoe UI"/>
               </a:rPr>
-              <a:t>Format</a:t>
+              <a:t>JSON</a:t>
             </a:r>
           </a:p>
         </p:txBody>
@@ -6129,8 +7185,8 @@
         </p:nvSpPr>
         <p:spPr>
           <a:xfrm>
-            <a:off x="3794760" y="3246120"/>
-            <a:ext cx="2423160" cy="2468880"/>
+            <a:off x="3639312" y="3154680"/>
+            <a:ext cx="2377440" cy="2697480"/>
           </a:xfrm>
           <a:prstGeom prst="rect">
             <a:avLst/>
@@ -6138,12 +7194,22 @@
           <a:noFill/>
         </p:spPr>
         <p:txBody>
-          <a:bodyPr wrap="none">
+          <a:bodyPr wrap="square" lIns="18288" rIns="18288" tIns="9144" bIns="9144" anchor="t">
             <a:spAutoFit/>
           </a:bodyPr>
           <a:lstStyle/>
           <a:p>
-            <a:pPr algn="l"/>
+            <a:pPr algn="l">
+              <a:lnSpc>
+                <a:spcPct val="112000"/>
+              </a:lnSpc>
+              <a:spcBef>
+                <a:spcPts val="0"/>
+              </a:spcBef>
+              <a:spcAft>
+                <a:spcPts val="0"/>
+              </a:spcAft>
+            </a:pPr>
             <a:r>
               <a:rPr sz="1100" b="0">
                 <a:solidFill>
@@ -6164,14 +7230,14 @@
         </p:nvSpPr>
         <p:spPr>
           <a:xfrm>
-            <a:off x="6400800" y="3977639"/>
-            <a:ext cx="347472" cy="457200"/>
+            <a:off x="6181344" y="3840480"/>
+            <a:ext cx="320040" cy="502920"/>
           </a:xfrm>
           <a:prstGeom prst="rightArrow">
             <a:avLst/>
           </a:prstGeom>
           <a:solidFill>
-            <a:srgbClr val="43A047"/>
+            <a:srgbClr val="2C7A4E"/>
           </a:solidFill>
           <a:ln>
             <a:noFill/>
@@ -6207,8 +7273,8 @@
         </p:nvSpPr>
         <p:spPr>
           <a:xfrm>
-            <a:off x="6537960" y="2560320"/>
-            <a:ext cx="2697480" cy="3383280"/>
+            <a:off x="6318504" y="2468880"/>
+            <a:ext cx="2651760" cy="3611880"/>
           </a:xfrm>
           <a:prstGeom prst="roundRect">
             <a:avLst/>
@@ -6218,7 +7284,7 @@
           </a:solidFill>
           <a:ln>
             <a:solidFill>
-              <a:srgbClr val="2E7D32"/>
+              <a:srgbClr val="2C7A4E"/>
             </a:solidFill>
           </a:ln>
         </p:spPr>
@@ -6252,14 +7318,14 @@
         </p:nvSpPr>
         <p:spPr>
           <a:xfrm>
-            <a:off x="6629400" y="2697480"/>
-            <a:ext cx="502920" cy="502920"/>
+            <a:off x="6455664" y="2651760"/>
+            <a:ext cx="475488" cy="475488"/>
           </a:xfrm>
           <a:prstGeom prst="ellipse">
             <a:avLst/>
           </a:prstGeom>
           <a:solidFill>
-            <a:srgbClr val="14532D"/>
+            <a:srgbClr val="184E34"/>
           </a:solidFill>
           <a:ln>
             <a:noFill/>
@@ -6295,8 +7361,8 @@
         </p:nvSpPr>
         <p:spPr>
           <a:xfrm>
-            <a:off x="6793992" y="2816352"/>
-            <a:ext cx="182880" cy="182880"/>
+            <a:off x="6455664" y="2770632"/>
+            <a:ext cx="475488" cy="182880"/>
           </a:xfrm>
           <a:prstGeom prst="rect">
             <a:avLst/>
@@ -6304,14 +7370,24 @@
           <a:noFill/>
         </p:spPr>
         <p:txBody>
-          <a:bodyPr wrap="none">
+          <a:bodyPr wrap="square" lIns="18288" rIns="18288" tIns="9144" bIns="9144" anchor="t">
             <a:spAutoFit/>
           </a:bodyPr>
           <a:lstStyle/>
           <a:p>
-            <a:pPr algn="ctr"/>
-            <a:r>
-              <a:rPr sz="1200" b="1">
+            <a:pPr algn="ctr">
+              <a:lnSpc>
+                <a:spcPct val="112000"/>
+              </a:lnSpc>
+              <a:spcBef>
+                <a:spcPts val="0"/>
+              </a:spcBef>
+              <a:spcAft>
+                <a:spcPts val="0"/>
+              </a:spcAft>
+            </a:pPr>
+            <a:r>
+              <a:rPr sz="1000" b="1">
                 <a:solidFill>
                   <a:srgbClr val="FFFFFF"/>
                 </a:solidFill>
@@ -6330,8 +7406,8 @@
         </p:nvSpPr>
         <p:spPr>
           <a:xfrm>
-            <a:off x="7223760" y="2724912"/>
-            <a:ext cx="1920240" cy="365760"/>
+            <a:off x="7004304" y="2670048"/>
+            <a:ext cx="1783080" cy="320040"/>
           </a:xfrm>
           <a:prstGeom prst="rect">
             <a:avLst/>
@@ -6339,16 +7415,26 @@
           <a:noFill/>
         </p:spPr>
         <p:txBody>
-          <a:bodyPr wrap="none">
+          <a:bodyPr wrap="square" lIns="18288" rIns="18288" tIns="9144" bIns="9144" anchor="t">
             <a:spAutoFit/>
           </a:bodyPr>
           <a:lstStyle/>
           <a:p>
-            <a:pPr algn="l"/>
-            <a:r>
-              <a:rPr sz="1500" b="1">
-                <a:solidFill>
-                  <a:srgbClr val="14532D"/>
+            <a:pPr algn="l">
+              <a:lnSpc>
+                <a:spcPct val="112000"/>
+              </a:lnSpc>
+              <a:spcBef>
+                <a:spcPts val="0"/>
+              </a:spcBef>
+              <a:spcAft>
+                <a:spcPts val="0"/>
+              </a:spcAft>
+            </a:pPr>
+            <a:r>
+              <a:rPr sz="1400" b="1">
+                <a:solidFill>
+                  <a:srgbClr val="184E34"/>
                 </a:solidFill>
                 <a:latin typeface="Segoe UI"/>
               </a:rPr>
@@ -6365,8 +7451,8 @@
         </p:nvSpPr>
         <p:spPr>
           <a:xfrm>
-            <a:off x="6675120" y="3246120"/>
-            <a:ext cx="2423160" cy="2468880"/>
+            <a:off x="6455664" y="3154680"/>
+            <a:ext cx="2377440" cy="2697480"/>
           </a:xfrm>
           <a:prstGeom prst="rect">
             <a:avLst/>
@@ -6374,12 +7460,22 @@
           <a:noFill/>
         </p:spPr>
         <p:txBody>
-          <a:bodyPr wrap="none">
+          <a:bodyPr wrap="square" lIns="18288" rIns="18288" tIns="9144" bIns="9144" anchor="t">
             <a:spAutoFit/>
           </a:bodyPr>
           <a:lstStyle/>
           <a:p>
-            <a:pPr algn="l"/>
+            <a:pPr algn="l">
+              <a:lnSpc>
+                <a:spcPct val="112000"/>
+              </a:lnSpc>
+              <a:spcBef>
+                <a:spcPts val="0"/>
+              </a:spcBef>
+              <a:spcAft>
+                <a:spcPts val="0"/>
+              </a:spcAft>
+            </a:pPr>
             <a:r>
               <a:rPr sz="1100" b="0">
                 <a:solidFill>
@@ -6400,14 +7496,14 @@
         </p:nvSpPr>
         <p:spPr>
           <a:xfrm>
-            <a:off x="9281160" y="3977639"/>
-            <a:ext cx="347472" cy="457200"/>
+            <a:off x="8997696" y="3840480"/>
+            <a:ext cx="320040" cy="502920"/>
           </a:xfrm>
           <a:prstGeom prst="rightArrow">
             <a:avLst/>
           </a:prstGeom>
           <a:solidFill>
-            <a:srgbClr val="43A047"/>
+            <a:srgbClr val="2C7A4E"/>
           </a:solidFill>
           <a:ln>
             <a:noFill/>
@@ -6443,8 +7539,8 @@
         </p:nvSpPr>
         <p:spPr>
           <a:xfrm>
-            <a:off x="9418320" y="2560320"/>
-            <a:ext cx="2697480" cy="3383280"/>
+            <a:off x="9134856" y="2468880"/>
+            <a:ext cx="2651760" cy="3611880"/>
           </a:xfrm>
           <a:prstGeom prst="roundRect">
             <a:avLst/>
@@ -6454,7 +7550,7 @@
           </a:solidFill>
           <a:ln>
             <a:solidFill>
-              <a:srgbClr val="2E7D32"/>
+              <a:srgbClr val="2C7A4E"/>
             </a:solidFill>
           </a:ln>
         </p:spPr>
@@ -6488,14 +7584,14 @@
         </p:nvSpPr>
         <p:spPr>
           <a:xfrm>
-            <a:off x="9509760" y="2697480"/>
-            <a:ext cx="502920" cy="502920"/>
+            <a:off x="9272016" y="2651760"/>
+            <a:ext cx="475488" cy="475488"/>
           </a:xfrm>
           <a:prstGeom prst="ellipse">
             <a:avLst/>
           </a:prstGeom>
           <a:solidFill>
-            <a:srgbClr val="14532D"/>
+            <a:srgbClr val="184E34"/>
           </a:solidFill>
           <a:ln>
             <a:noFill/>
@@ -6531,8 +7627,8 @@
         </p:nvSpPr>
         <p:spPr>
           <a:xfrm>
-            <a:off x="9674352" y="2816352"/>
-            <a:ext cx="182880" cy="182880"/>
+            <a:off x="9272016" y="2770632"/>
+            <a:ext cx="475488" cy="182880"/>
           </a:xfrm>
           <a:prstGeom prst="rect">
             <a:avLst/>
@@ -6540,14 +7636,24 @@
           <a:noFill/>
         </p:spPr>
         <p:txBody>
-          <a:bodyPr wrap="none">
+          <a:bodyPr wrap="square" lIns="18288" rIns="18288" tIns="9144" bIns="9144" anchor="t">
             <a:spAutoFit/>
           </a:bodyPr>
           <a:lstStyle/>
           <a:p>
-            <a:pPr algn="ctr"/>
-            <a:r>
-              <a:rPr sz="1200" b="1">
+            <a:pPr algn="ctr">
+              <a:lnSpc>
+                <a:spcPct val="112000"/>
+              </a:lnSpc>
+              <a:spcBef>
+                <a:spcPts val="0"/>
+              </a:spcBef>
+              <a:spcAft>
+                <a:spcPts val="0"/>
+              </a:spcAft>
+            </a:pPr>
+            <a:r>
+              <a:rPr sz="1000" b="1">
                 <a:solidFill>
                   <a:srgbClr val="FFFFFF"/>
                 </a:solidFill>
@@ -6566,8 +7672,8 @@
         </p:nvSpPr>
         <p:spPr>
           <a:xfrm>
-            <a:off x="10104120" y="2724912"/>
-            <a:ext cx="1920240" cy="365760"/>
+            <a:off x="9820656" y="2670048"/>
+            <a:ext cx="1783080" cy="320040"/>
           </a:xfrm>
           <a:prstGeom prst="rect">
             <a:avLst/>
@@ -6575,16 +7681,26 @@
           <a:noFill/>
         </p:spPr>
         <p:txBody>
-          <a:bodyPr wrap="none">
+          <a:bodyPr wrap="square" lIns="18288" rIns="18288" tIns="9144" bIns="9144" anchor="t">
             <a:spAutoFit/>
           </a:bodyPr>
           <a:lstStyle/>
           <a:p>
-            <a:pPr algn="l"/>
-            <a:r>
-              <a:rPr sz="1500" b="1">
-                <a:solidFill>
-                  <a:srgbClr val="14532D"/>
+            <a:pPr algn="l">
+              <a:lnSpc>
+                <a:spcPct val="112000"/>
+              </a:lnSpc>
+              <a:spcBef>
+                <a:spcPts val="0"/>
+              </a:spcBef>
+              <a:spcAft>
+                <a:spcPts val="0"/>
+              </a:spcAft>
+            </a:pPr>
+            <a:r>
+              <a:rPr sz="1400" b="1">
+                <a:solidFill>
+                  <a:srgbClr val="184E34"/>
                 </a:solidFill>
                 <a:latin typeface="Segoe UI"/>
               </a:rPr>
@@ -6601,8 +7717,8 @@
         </p:nvSpPr>
         <p:spPr>
           <a:xfrm>
-            <a:off x="9555480" y="3246120"/>
-            <a:ext cx="2423160" cy="2468880"/>
+            <a:off x="9272016" y="3154680"/>
+            <a:ext cx="2377440" cy="2697480"/>
           </a:xfrm>
           <a:prstGeom prst="rect">
             <a:avLst/>
@@ -6610,12 +7726,22 @@
           <a:noFill/>
         </p:spPr>
         <p:txBody>
-          <a:bodyPr wrap="none">
+          <a:bodyPr wrap="square" lIns="18288" rIns="18288" tIns="9144" bIns="9144" anchor="t">
             <a:spAutoFit/>
           </a:bodyPr>
           <a:lstStyle/>
           <a:p>
-            <a:pPr algn="l"/>
+            <a:pPr algn="l">
+              <a:lnSpc>
+                <a:spcPct val="112000"/>
+              </a:lnSpc>
+              <a:spcBef>
+                <a:spcPts val="0"/>
+              </a:spcBef>
+              <a:spcAft>
+                <a:spcPts val="0"/>
+              </a:spcAft>
+            </a:pPr>
             <a:r>
               <a:rPr sz="1100" b="0">
                 <a:solidFill>
@@ -6661,7 +7787,7 @@
             <a:avLst/>
           </a:prstGeom>
           <a:solidFill>
-            <a:srgbClr val="14532D"/>
+            <a:srgbClr val="184E34"/>
           </a:solidFill>
           <a:ln>
             <a:noFill/>
@@ -6697,8 +7823,8 @@
         </p:nvSpPr>
         <p:spPr>
           <a:xfrm>
-            <a:off x="640080" y="182880"/>
-            <a:ext cx="10972800" cy="411480"/>
+            <a:off x="640080" y="146304"/>
+            <a:ext cx="10972800" cy="384048"/>
           </a:xfrm>
           <a:prstGeom prst="rect">
             <a:avLst/>
@@ -6706,14 +7832,24 @@
           <a:noFill/>
         </p:spPr>
         <p:txBody>
-          <a:bodyPr wrap="none">
+          <a:bodyPr wrap="square" lIns="18288" rIns="18288" tIns="9144" bIns="9144" anchor="t">
             <a:spAutoFit/>
           </a:bodyPr>
           <a:lstStyle/>
           <a:p>
-            <a:pPr algn="l"/>
-            <a:r>
-              <a:rPr sz="3000" b="1">
+            <a:pPr algn="l">
+              <a:lnSpc>
+                <a:spcPct val="112000"/>
+              </a:lnSpc>
+              <a:spcBef>
+                <a:spcPts val="0"/>
+              </a:spcBef>
+              <a:spcAft>
+                <a:spcPts val="0"/>
+              </a:spcAft>
+            </a:pPr>
+            <a:r>
+              <a:rPr sz="2800" b="1">
                 <a:solidFill>
                   <a:srgbClr val="FFFFFF"/>
                 </a:solidFill>
@@ -6732,8 +7868,8 @@
         </p:nvSpPr>
         <p:spPr>
           <a:xfrm>
-            <a:off x="640080" y="566928"/>
-            <a:ext cx="10972800" cy="274320"/>
+            <a:off x="640080" y="530352"/>
+            <a:ext cx="10972800" cy="256032"/>
           </a:xfrm>
           <a:prstGeom prst="rect">
             <a:avLst/>
@@ -6741,16 +7877,26 @@
           <a:noFill/>
         </p:spPr>
         <p:txBody>
-          <a:bodyPr wrap="none">
+          <a:bodyPr wrap="square" lIns="18288" rIns="18288" tIns="9144" bIns="9144" anchor="t">
             <a:spAutoFit/>
           </a:bodyPr>
           <a:lstStyle/>
           <a:p>
-            <a:pPr algn="l"/>
-            <a:r>
-              <a:rPr sz="1500" b="0">
-                <a:solidFill>
-                  <a:srgbClr val="DCEBE0"/>
+            <a:pPr algn="l">
+              <a:lnSpc>
+                <a:spcPct val="112000"/>
+              </a:lnSpc>
+              <a:spcBef>
+                <a:spcPts val="0"/>
+              </a:spcBef>
+              <a:spcAft>
+                <a:spcPts val="0"/>
+              </a:spcAft>
+            </a:pPr>
+            <a:r>
+              <a:rPr sz="1400" b="0">
+                <a:solidFill>
+                  <a:srgbClr val="DDEAE2"/>
                 </a:solidFill>
                 <a:latin typeface="Segoe UI"/>
               </a:rPr>
@@ -6767,18 +7913,18 @@
         </p:nvSpPr>
         <p:spPr>
           <a:xfrm>
-            <a:off x="731520" y="1371600"/>
-            <a:ext cx="10972800" cy="1234440"/>
+            <a:off x="640080" y="1188720"/>
+            <a:ext cx="10972800" cy="1097280"/>
           </a:xfrm>
           <a:prstGeom prst="roundRect">
             <a:avLst/>
           </a:prstGeom>
           <a:solidFill>
-            <a:srgbClr val="F5F9F6"/>
+            <a:srgbClr val="F5F8F6"/>
           </a:solidFill>
           <a:ln>
             <a:solidFill>
-              <a:srgbClr val="D0D9D2"/>
+              <a:srgbClr val="CED8D1"/>
             </a:solidFill>
           </a:ln>
         </p:spPr>
@@ -6812,8 +7958,8 @@
         </p:nvSpPr>
         <p:spPr>
           <a:xfrm>
-            <a:off x="1005840" y="1645920"/>
-            <a:ext cx="10332720" cy="731520"/>
+            <a:off x="914400" y="1508760"/>
+            <a:ext cx="10332720" cy="594360"/>
           </a:xfrm>
           <a:prstGeom prst="rect">
             <a:avLst/>
@@ -6821,16 +7967,26 @@
           <a:noFill/>
         </p:spPr>
         <p:txBody>
-          <a:bodyPr wrap="none">
+          <a:bodyPr wrap="square" lIns="18288" rIns="18288" tIns="9144" bIns="9144" anchor="t">
             <a:spAutoFit/>
           </a:bodyPr>
           <a:lstStyle/>
           <a:p>
-            <a:pPr algn="l"/>
-            <a:r>
-              <a:rPr sz="1400" b="1">
-                <a:solidFill>
-                  <a:srgbClr val="14532D"/>
+            <a:pPr algn="l">
+              <a:lnSpc>
+                <a:spcPct val="112000"/>
+              </a:lnSpc>
+              <a:spcBef>
+                <a:spcPts val="0"/>
+              </a:spcBef>
+              <a:spcAft>
+                <a:spcPts val="0"/>
+              </a:spcAft>
+            </a:pPr>
+            <a:r>
+              <a:rPr sz="1300" b="1">
+                <a:solidFill>
+                  <a:srgbClr val="184E34"/>
                 </a:solidFill>
                 <a:latin typeface="Segoe UI"/>
               </a:rPr>
@@ -6847,8 +8003,8 @@
         </p:nvSpPr>
         <p:spPr>
           <a:xfrm>
-            <a:off x="731520" y="2834640"/>
-            <a:ext cx="3566160" cy="2926080"/>
+            <a:off x="640080" y="2468880"/>
+            <a:ext cx="3657600" cy="3703320"/>
           </a:xfrm>
           <a:prstGeom prst="roundRect">
             <a:avLst/>
@@ -6856,9 +8012,9 @@
           <a:solidFill>
             <a:srgbClr val="FFFFFF"/>
           </a:solidFill>
-          <a:ln w="15240">
+          <a:ln w="12700">
             <a:solidFill>
-              <a:srgbClr val="D0D9D2"/>
+              <a:srgbClr val="CED8D1"/>
             </a:solidFill>
           </a:ln>
         </p:spPr>
@@ -6886,130 +8042,23 @@
       </p:sp>
       <p:sp>
         <p:nvSpPr>
-          <p:cNvPr id="8" name="TextBox 7"/>
-          <p:cNvSpPr txBox="1"/>
-          <p:nvPr/>
-        </p:nvSpPr>
-        <p:spPr>
-          <a:xfrm>
-            <a:off x="914400" y="2999232"/>
-            <a:ext cx="548640" cy="365760"/>
-          </a:xfrm>
-          <a:prstGeom prst="rect">
-            <a:avLst/>
-          </a:prstGeom>
-          <a:noFill/>
-        </p:spPr>
-        <p:txBody>
-          <a:bodyPr wrap="none">
-            <a:spAutoFit/>
-          </a:bodyPr>
-          <a:lstStyle/>
-          <a:p>
-            <a:pPr algn="l"/>
-            <a:r>
-              <a:rPr sz="2000" b="1">
-                <a:solidFill>
-                  <a:srgbClr val="2E7D32"/>
-                </a:solidFill>
-                <a:latin typeface="Segoe UI"/>
-              </a:rPr>
-              <a:t>🐳</a:t>
-            </a:r>
-          </a:p>
-        </p:txBody>
-      </p:sp>
-      <p:sp>
-        <p:nvSpPr>
-          <p:cNvPr id="9" name="TextBox 8"/>
-          <p:cNvSpPr txBox="1"/>
-          <p:nvPr/>
-        </p:nvSpPr>
-        <p:spPr>
-          <a:xfrm>
-            <a:off x="1508760" y="2971800"/>
-            <a:ext cx="2606039" cy="365760"/>
-          </a:xfrm>
-          <a:prstGeom prst="rect">
-            <a:avLst/>
-          </a:prstGeom>
-          <a:noFill/>
-        </p:spPr>
-        <p:txBody>
-          <a:bodyPr wrap="none">
-            <a:spAutoFit/>
-          </a:bodyPr>
-          <a:lstStyle/>
-          <a:p>
-            <a:pPr algn="l"/>
-            <a:r>
-              <a:rPr sz="1600" b="1">
-                <a:solidFill>
-                  <a:srgbClr val="14532D"/>
-                </a:solidFill>
-                <a:latin typeface="Segoe UI"/>
-              </a:rPr>
-              <a:t>Self Hosting (Docker)</a:t>
-            </a:r>
-          </a:p>
-        </p:txBody>
-      </p:sp>
-      <p:sp>
-        <p:nvSpPr>
-          <p:cNvPr id="10" name="TextBox 9"/>
-          <p:cNvSpPr txBox="1"/>
-          <p:nvPr/>
-        </p:nvSpPr>
-        <p:spPr>
-          <a:xfrm>
-            <a:off x="960120" y="3364992"/>
-            <a:ext cx="3154679" cy="2240280"/>
-          </a:xfrm>
-          <a:prstGeom prst="rect">
-            <a:avLst/>
-          </a:prstGeom>
-          <a:noFill/>
-        </p:spPr>
-        <p:txBody>
-          <a:bodyPr wrap="none">
-            <a:spAutoFit/>
-          </a:bodyPr>
-          <a:lstStyle/>
-          <a:p>
-            <a:pPr algn="l"/>
-            <a:r>
-              <a:rPr sz="1200">
-                <a:solidFill>
-                  <a:srgbClr val="212D38"/>
-                </a:solidFill>
-                <a:latin typeface="Segoe UI"/>
-              </a:rPr>
-              <a:t>We can deploy the official container image within our existing Kubernetes infrastructure for total data control.</a:t>
-            </a:r>
-          </a:p>
-        </p:txBody>
-      </p:sp>
-      <p:sp>
-        <p:nvSpPr>
-          <p:cNvPr id="11" name="Rounded Rectangle 10"/>
+          <p:cNvPr id="8" name="Oval 7"/>
           <p:cNvSpPr/>
           <p:nvPr/>
         </p:nvSpPr>
         <p:spPr>
           <a:xfrm>
-            <a:off x="4526280" y="2834640"/>
-            <a:ext cx="3566160" cy="2926080"/>
-          </a:xfrm>
-          <a:prstGeom prst="roundRect">
+            <a:off x="804671" y="2633472"/>
+            <a:ext cx="502920" cy="502920"/>
+          </a:xfrm>
+          <a:prstGeom prst="ellipse">
             <a:avLst/>
           </a:prstGeom>
           <a:solidFill>
-            <a:srgbClr val="FFFFFF"/>
+            <a:srgbClr val="2C7A4E"/>
           </a:solidFill>
-          <a:ln w="15240">
-            <a:solidFill>
-              <a:srgbClr val="D0D9D2"/>
-            </a:solidFill>
+          <a:ln>
+            <a:noFill/>
           </a:ln>
         </p:spPr>
         <p:style>
@@ -7036,14 +8085,14 @@
       </p:sp>
       <p:sp>
         <p:nvSpPr>
-          <p:cNvPr id="12" name="TextBox 11"/>
+          <p:cNvPr id="9" name="TextBox 8"/>
           <p:cNvSpPr txBox="1"/>
           <p:nvPr/>
         </p:nvSpPr>
         <p:spPr>
           <a:xfrm>
-            <a:off x="4709160" y="2999232"/>
-            <a:ext cx="548640" cy="365760"/>
+            <a:off x="804671" y="2761488"/>
+            <a:ext cx="502920" cy="182880"/>
           </a:xfrm>
           <a:prstGeom prst="rect">
             <a:avLst/>
@@ -7051,34 +8100,44 @@
           <a:noFill/>
         </p:spPr>
         <p:txBody>
-          <a:bodyPr wrap="none">
+          <a:bodyPr wrap="square" lIns="18288" rIns="18288" tIns="9144" bIns="9144" anchor="t">
             <a:spAutoFit/>
           </a:bodyPr>
           <a:lstStyle/>
           <a:p>
-            <a:pPr algn="l"/>
-            <a:r>
-              <a:rPr sz="2000" b="1">
-                <a:solidFill>
-                  <a:srgbClr val="2E7D32"/>
+            <a:pPr algn="ctr">
+              <a:lnSpc>
+                <a:spcPct val="112000"/>
+              </a:lnSpc>
+              <a:spcBef>
+                <a:spcPts val="0"/>
+              </a:spcBef>
+              <a:spcAft>
+                <a:spcPts val="0"/>
+              </a:spcAft>
+            </a:pPr>
+            <a:r>
+              <a:rPr sz="1000" b="1">
+                <a:solidFill>
+                  <a:srgbClr val="FFFFFF"/>
                 </a:solidFill>
                 <a:latin typeface="Segoe UI"/>
               </a:rPr>
-              <a:t>🖥</a:t>
-            </a:r>
-          </a:p>
-        </p:txBody>
-      </p:sp>
-      <p:sp>
-        <p:nvSpPr>
-          <p:cNvPr id="13" name="TextBox 12"/>
+              <a:t>K8S</a:t>
+            </a:r>
+          </a:p>
+        </p:txBody>
+      </p:sp>
+      <p:sp>
+        <p:nvSpPr>
+          <p:cNvPr id="10" name="TextBox 9"/>
           <p:cNvSpPr txBox="1"/>
           <p:nvPr/>
         </p:nvSpPr>
         <p:spPr>
           <a:xfrm>
-            <a:off x="5303520" y="2971800"/>
-            <a:ext cx="2606039" cy="365760"/>
+            <a:off x="1389888" y="2633472"/>
+            <a:ext cx="2743200" cy="365760"/>
           </a:xfrm>
           <a:prstGeom prst="rect">
             <a:avLst/>
@@ -7086,34 +8145,44 @@
           <a:noFill/>
         </p:spPr>
         <p:txBody>
-          <a:bodyPr wrap="none">
+          <a:bodyPr wrap="square" lIns="18288" rIns="18288" tIns="9144" bIns="9144" anchor="t">
             <a:spAutoFit/>
           </a:bodyPr>
           <a:lstStyle/>
           <a:p>
-            <a:pPr algn="l"/>
-            <a:r>
-              <a:rPr sz="1600" b="1">
-                <a:solidFill>
-                  <a:srgbClr val="14532D"/>
+            <a:pPr algn="l">
+              <a:lnSpc>
+                <a:spcPct val="112000"/>
+              </a:lnSpc>
+              <a:spcBef>
+                <a:spcPts val="0"/>
+              </a:spcBef>
+              <a:spcAft>
+                <a:spcPts val="0"/>
+              </a:spcAft>
+            </a:pPr>
+            <a:r>
+              <a:rPr sz="1500" b="1">
+                <a:solidFill>
+                  <a:srgbClr val="184E34"/>
                 </a:solidFill>
                 <a:latin typeface="Segoe UI"/>
               </a:rPr>
-              <a:t>Self Hosting (Direct)</a:t>
-            </a:r>
-          </a:p>
-        </p:txBody>
-      </p:sp>
-      <p:sp>
-        <p:nvSpPr>
-          <p:cNvPr id="14" name="TextBox 13"/>
+              <a:t>Self Hosting (Docker)</a:t>
+            </a:r>
+          </a:p>
+        </p:txBody>
+      </p:sp>
+      <p:sp>
+        <p:nvSpPr>
+          <p:cNvPr id="11" name="TextBox 10"/>
           <p:cNvSpPr txBox="1"/>
           <p:nvPr/>
         </p:nvSpPr>
         <p:spPr>
           <a:xfrm>
-            <a:off x="4754880" y="3364992"/>
-            <a:ext cx="3154679" cy="2240280"/>
+            <a:off x="822959" y="3127248"/>
+            <a:ext cx="3337560" cy="2916936"/>
           </a:xfrm>
           <a:prstGeom prst="rect">
             <a:avLst/>
@@ -7121,34 +8190,44 @@
           <a:noFill/>
         </p:spPr>
         <p:txBody>
-          <a:bodyPr wrap="none">
+          <a:bodyPr wrap="square" lIns="18288" rIns="18288" tIns="9144" bIns="9144" anchor="t">
             <a:spAutoFit/>
           </a:bodyPr>
           <a:lstStyle/>
           <a:p>
-            <a:pPr algn="l"/>
-            <a:r>
-              <a:rPr sz="1200">
+            <a:pPr algn="l">
+              <a:lnSpc>
+                <a:spcPct val="112000"/>
+              </a:lnSpc>
+              <a:spcBef>
+                <a:spcPts val="0"/>
+              </a:spcBef>
+              <a:spcAft>
+                <a:spcPts val="0"/>
+              </a:spcAft>
+            </a:pPr>
+            <a:r>
+              <a:rPr sz="1200" b="0">
                 <a:solidFill>
                   <a:srgbClr val="212D38"/>
                 </a:solidFill>
                 <a:latin typeface="Segoe UI"/>
               </a:rPr>
-              <a:t>Run the compiled binary directly on a Linux virtual machine (AWS, Google Cloud, Azure).</a:t>
-            </a:r>
-          </a:p>
-        </p:txBody>
-      </p:sp>
-      <p:sp>
-        <p:nvSpPr>
-          <p:cNvPr id="15" name="Rounded Rectangle 14"/>
+              <a:t>We can deploy the official container image within our existing Kubernetes infrastructure for total data control.</a:t>
+            </a:r>
+          </a:p>
+        </p:txBody>
+      </p:sp>
+      <p:sp>
+        <p:nvSpPr>
+          <p:cNvPr id="12" name="Rounded Rectangle 11"/>
           <p:cNvSpPr/>
           <p:nvPr/>
         </p:nvSpPr>
         <p:spPr>
           <a:xfrm>
-            <a:off x="8321040" y="2834640"/>
-            <a:ext cx="3383280" cy="2926080"/>
+            <a:off x="4434840" y="2468880"/>
+            <a:ext cx="3657600" cy="3703320"/>
           </a:xfrm>
           <a:prstGeom prst="roundRect">
             <a:avLst/>
@@ -7156,9 +8235,9 @@
           <a:solidFill>
             <a:srgbClr val="FFFFFF"/>
           </a:solidFill>
-          <a:ln w="15240">
+          <a:ln w="12700">
             <a:solidFill>
-              <a:srgbClr val="D0D9D2"/>
+              <a:srgbClr val="CED8D1"/>
             </a:solidFill>
           </a:ln>
         </p:spPr>
@@ -7186,14 +8265,147 @@
       </p:sp>
       <p:sp>
         <p:nvSpPr>
+          <p:cNvPr id="13" name="Oval 12"/>
+          <p:cNvSpPr/>
+          <p:nvPr/>
+        </p:nvSpPr>
+        <p:spPr>
+          <a:xfrm>
+            <a:off x="4599431" y="2633472"/>
+            <a:ext cx="502920" cy="502920"/>
+          </a:xfrm>
+          <a:prstGeom prst="ellipse">
+            <a:avLst/>
+          </a:prstGeom>
+          <a:solidFill>
+            <a:srgbClr val="2C7A4E"/>
+          </a:solidFill>
+          <a:ln>
+            <a:noFill/>
+          </a:ln>
+        </p:spPr>
+        <p:style>
+          <a:lnRef idx="1">
+            <a:schemeClr val="accent1"/>
+          </a:lnRef>
+          <a:fillRef idx="3">
+            <a:schemeClr val="accent1"/>
+          </a:fillRef>
+          <a:effectRef idx="2">
+            <a:schemeClr val="accent1"/>
+          </a:effectRef>
+          <a:fontRef idx="minor">
+            <a:schemeClr val="lt1"/>
+          </a:fontRef>
+        </p:style>
+        <p:txBody>
+          <a:bodyPr rtlCol="0" anchor="ctr"/>
+          <a:lstStyle/>
+          <a:p>
+            <a:pPr algn="ctr"/>
+          </a:p>
+        </p:txBody>
+      </p:sp>
+      <p:sp>
+        <p:nvSpPr>
+          <p:cNvPr id="14" name="TextBox 13"/>
+          <p:cNvSpPr txBox="1"/>
+          <p:nvPr/>
+        </p:nvSpPr>
+        <p:spPr>
+          <a:xfrm>
+            <a:off x="4599431" y="2761488"/>
+            <a:ext cx="502920" cy="182880"/>
+          </a:xfrm>
+          <a:prstGeom prst="rect">
+            <a:avLst/>
+          </a:prstGeom>
+          <a:noFill/>
+        </p:spPr>
+        <p:txBody>
+          <a:bodyPr wrap="square" lIns="18288" rIns="18288" tIns="9144" bIns="9144" anchor="t">
+            <a:spAutoFit/>
+          </a:bodyPr>
+          <a:lstStyle/>
+          <a:p>
+            <a:pPr algn="ctr">
+              <a:lnSpc>
+                <a:spcPct val="112000"/>
+              </a:lnSpc>
+              <a:spcBef>
+                <a:spcPts val="0"/>
+              </a:spcBef>
+              <a:spcAft>
+                <a:spcPts val="0"/>
+              </a:spcAft>
+            </a:pPr>
+            <a:r>
+              <a:rPr sz="1000" b="1">
+                <a:solidFill>
+                  <a:srgbClr val="FFFFFF"/>
+                </a:solidFill>
+                <a:latin typeface="Segoe UI"/>
+              </a:rPr>
+              <a:t>VM</a:t>
+            </a:r>
+          </a:p>
+        </p:txBody>
+      </p:sp>
+      <p:sp>
+        <p:nvSpPr>
+          <p:cNvPr id="15" name="TextBox 14"/>
+          <p:cNvSpPr txBox="1"/>
+          <p:nvPr/>
+        </p:nvSpPr>
+        <p:spPr>
+          <a:xfrm>
+            <a:off x="5184648" y="2633472"/>
+            <a:ext cx="2743200" cy="365760"/>
+          </a:xfrm>
+          <a:prstGeom prst="rect">
+            <a:avLst/>
+          </a:prstGeom>
+          <a:noFill/>
+        </p:spPr>
+        <p:txBody>
+          <a:bodyPr wrap="square" lIns="18288" rIns="18288" tIns="9144" bIns="9144" anchor="t">
+            <a:spAutoFit/>
+          </a:bodyPr>
+          <a:lstStyle/>
+          <a:p>
+            <a:pPr algn="l">
+              <a:lnSpc>
+                <a:spcPct val="112000"/>
+              </a:lnSpc>
+              <a:spcBef>
+                <a:spcPts val="0"/>
+              </a:spcBef>
+              <a:spcAft>
+                <a:spcPts val="0"/>
+              </a:spcAft>
+            </a:pPr>
+            <a:r>
+              <a:rPr sz="1500" b="1">
+                <a:solidFill>
+                  <a:srgbClr val="184E34"/>
+                </a:solidFill>
+                <a:latin typeface="Segoe UI"/>
+              </a:rPr>
+              <a:t>Self Hosting (Direct)</a:t>
+            </a:r>
+          </a:p>
+        </p:txBody>
+      </p:sp>
+      <p:sp>
+        <p:nvSpPr>
           <p:cNvPr id="16" name="TextBox 15"/>
           <p:cNvSpPr txBox="1"/>
           <p:nvPr/>
         </p:nvSpPr>
         <p:spPr>
           <a:xfrm>
-            <a:off x="8503919" y="2999232"/>
-            <a:ext cx="548640" cy="365760"/>
+            <a:off x="4617720" y="3127248"/>
+            <a:ext cx="3337560" cy="2916936"/>
           </a:xfrm>
           <a:prstGeom prst="rect">
             <a:avLst/>
@@ -7201,34 +8413,132 @@
           <a:noFill/>
         </p:spPr>
         <p:txBody>
-          <a:bodyPr wrap="none">
+          <a:bodyPr wrap="square" lIns="18288" rIns="18288" tIns="9144" bIns="9144" anchor="t">
             <a:spAutoFit/>
           </a:bodyPr>
           <a:lstStyle/>
           <a:p>
-            <a:pPr algn="l"/>
-            <a:r>
-              <a:rPr sz="2000" b="1">
-                <a:solidFill>
-                  <a:srgbClr val="2E7D32"/>
+            <a:pPr algn="l">
+              <a:lnSpc>
+                <a:spcPct val="112000"/>
+              </a:lnSpc>
+              <a:spcBef>
+                <a:spcPts val="0"/>
+              </a:spcBef>
+              <a:spcAft>
+                <a:spcPts val="0"/>
+              </a:spcAft>
+            </a:pPr>
+            <a:r>
+              <a:rPr sz="1200" b="0">
+                <a:solidFill>
+                  <a:srgbClr val="212D38"/>
                 </a:solidFill>
                 <a:latin typeface="Segoe UI"/>
               </a:rPr>
-              <a:t>☁</a:t>
-            </a:r>
-          </a:p>
-        </p:txBody>
-      </p:sp>
-      <p:sp>
-        <p:nvSpPr>
-          <p:cNvPr id="17" name="TextBox 16"/>
+              <a:t>Run the compiled binary directly on a Linux virtual machine (AWS, Google Cloud, Azure).</a:t>
+            </a:r>
+          </a:p>
+        </p:txBody>
+      </p:sp>
+      <p:sp>
+        <p:nvSpPr>
+          <p:cNvPr id="17" name="Rounded Rectangle 16"/>
+          <p:cNvSpPr/>
+          <p:nvPr/>
+        </p:nvSpPr>
+        <p:spPr>
+          <a:xfrm>
+            <a:off x="8229600" y="2468880"/>
+            <a:ext cx="3383280" cy="3703320"/>
+          </a:xfrm>
+          <a:prstGeom prst="roundRect">
+            <a:avLst/>
+          </a:prstGeom>
+          <a:solidFill>
+            <a:srgbClr val="FFFFFF"/>
+          </a:solidFill>
+          <a:ln w="12700">
+            <a:solidFill>
+              <a:srgbClr val="CED8D1"/>
+            </a:solidFill>
+          </a:ln>
+        </p:spPr>
+        <p:style>
+          <a:lnRef idx="1">
+            <a:schemeClr val="accent1"/>
+          </a:lnRef>
+          <a:fillRef idx="3">
+            <a:schemeClr val="accent1"/>
+          </a:fillRef>
+          <a:effectRef idx="2">
+            <a:schemeClr val="accent1"/>
+          </a:effectRef>
+          <a:fontRef idx="minor">
+            <a:schemeClr val="lt1"/>
+          </a:fontRef>
+        </p:style>
+        <p:txBody>
+          <a:bodyPr rtlCol="0" anchor="ctr"/>
+          <a:lstStyle/>
+          <a:p>
+            <a:pPr algn="ctr"/>
+          </a:p>
+        </p:txBody>
+      </p:sp>
+      <p:sp>
+        <p:nvSpPr>
+          <p:cNvPr id="18" name="Oval 17"/>
+          <p:cNvSpPr/>
+          <p:nvPr/>
+        </p:nvSpPr>
+        <p:spPr>
+          <a:xfrm>
+            <a:off x="8394192" y="2633472"/>
+            <a:ext cx="502920" cy="502920"/>
+          </a:xfrm>
+          <a:prstGeom prst="ellipse">
+            <a:avLst/>
+          </a:prstGeom>
+          <a:solidFill>
+            <a:srgbClr val="2C7A4E"/>
+          </a:solidFill>
+          <a:ln>
+            <a:noFill/>
+          </a:ln>
+        </p:spPr>
+        <p:style>
+          <a:lnRef idx="1">
+            <a:schemeClr val="accent1"/>
+          </a:lnRef>
+          <a:fillRef idx="3">
+            <a:schemeClr val="accent1"/>
+          </a:fillRef>
+          <a:effectRef idx="2">
+            <a:schemeClr val="accent1"/>
+          </a:effectRef>
+          <a:fontRef idx="minor">
+            <a:schemeClr val="lt1"/>
+          </a:fontRef>
+        </p:style>
+        <p:txBody>
+          <a:bodyPr rtlCol="0" anchor="ctr"/>
+          <a:lstStyle/>
+          <a:p>
+            <a:pPr algn="ctr"/>
+          </a:p>
+        </p:txBody>
+      </p:sp>
+      <p:sp>
+        <p:nvSpPr>
+          <p:cNvPr id="19" name="TextBox 18"/>
           <p:cNvSpPr txBox="1"/>
           <p:nvPr/>
         </p:nvSpPr>
         <p:spPr>
           <a:xfrm>
-            <a:off x="9098280" y="2971800"/>
-            <a:ext cx="2423160" cy="365760"/>
+            <a:off x="8394192" y="2761488"/>
+            <a:ext cx="502920" cy="182880"/>
           </a:xfrm>
           <a:prstGeom prst="rect">
             <a:avLst/>
@@ -7236,16 +8546,71 @@
           <a:noFill/>
         </p:spPr>
         <p:txBody>
-          <a:bodyPr wrap="none">
+          <a:bodyPr wrap="square" lIns="18288" rIns="18288" tIns="9144" bIns="9144" anchor="t">
             <a:spAutoFit/>
           </a:bodyPr>
           <a:lstStyle/>
           <a:p>
-            <a:pPr algn="l"/>
-            <a:r>
-              <a:rPr sz="1600" b="1">
-                <a:solidFill>
-                  <a:srgbClr val="14532D"/>
+            <a:pPr algn="ctr">
+              <a:lnSpc>
+                <a:spcPct val="112000"/>
+              </a:lnSpc>
+              <a:spcBef>
+                <a:spcPts val="0"/>
+              </a:spcBef>
+              <a:spcAft>
+                <a:spcPts val="0"/>
+              </a:spcAft>
+            </a:pPr>
+            <a:r>
+              <a:rPr sz="1000" b="1">
+                <a:solidFill>
+                  <a:srgbClr val="FFFFFF"/>
+                </a:solidFill>
+                <a:latin typeface="Segoe UI"/>
+              </a:rPr>
+              <a:t>CLD</a:t>
+            </a:r>
+          </a:p>
+        </p:txBody>
+      </p:sp>
+      <p:sp>
+        <p:nvSpPr>
+          <p:cNvPr id="20" name="TextBox 19"/>
+          <p:cNvSpPr txBox="1"/>
+          <p:nvPr/>
+        </p:nvSpPr>
+        <p:spPr>
+          <a:xfrm>
+            <a:off x="8979408" y="2633472"/>
+            <a:ext cx="2468880" cy="365760"/>
+          </a:xfrm>
+          <a:prstGeom prst="rect">
+            <a:avLst/>
+          </a:prstGeom>
+          <a:noFill/>
+        </p:spPr>
+        <p:txBody>
+          <a:bodyPr wrap="square" lIns="18288" rIns="18288" tIns="9144" bIns="9144" anchor="t">
+            <a:spAutoFit/>
+          </a:bodyPr>
+          <a:lstStyle/>
+          <a:p>
+            <a:pPr algn="l">
+              <a:lnSpc>
+                <a:spcPct val="112000"/>
+              </a:lnSpc>
+              <a:spcBef>
+                <a:spcPts val="0"/>
+              </a:spcBef>
+              <a:spcAft>
+                <a:spcPts val="0"/>
+              </a:spcAft>
+            </a:pPr>
+            <a:r>
+              <a:rPr sz="1500" b="1">
+                <a:solidFill>
+                  <a:srgbClr val="184E34"/>
                 </a:solidFill>
                 <a:latin typeface="Segoe UI"/>
               </a:rPr>
@@ -7256,14 +8621,14 @@
       </p:sp>
       <p:sp>
         <p:nvSpPr>
-          <p:cNvPr id="18" name="TextBox 17"/>
+          <p:cNvPr id="21" name="TextBox 20"/>
           <p:cNvSpPr txBox="1"/>
           <p:nvPr/>
         </p:nvSpPr>
         <p:spPr>
           <a:xfrm>
-            <a:off x="8549640" y="3364992"/>
-            <a:ext cx="2971800" cy="2240280"/>
+            <a:off x="8412480" y="3127248"/>
+            <a:ext cx="3063240" cy="2916936"/>
           </a:xfrm>
           <a:prstGeom prst="rect">
             <a:avLst/>
@@ -7271,14 +8636,24 @@
           <a:noFill/>
         </p:spPr>
         <p:txBody>
-          <a:bodyPr wrap="none">
+          <a:bodyPr wrap="square" lIns="18288" rIns="18288" tIns="9144" bIns="9144" anchor="t">
             <a:spAutoFit/>
           </a:bodyPr>
           <a:lstStyle/>
           <a:p>
-            <a:pPr algn="l"/>
-            <a:r>
-              <a:rPr sz="1200">
+            <a:pPr algn="l">
+              <a:lnSpc>
+                <a:spcPct val="112000"/>
+              </a:lnSpc>
+              <a:spcBef>
+                <a:spcPts val="0"/>
+              </a:spcBef>
+              <a:spcAft>
+                <a:spcPts val="0"/>
+              </a:spcAft>
+            </a:pPr>
+            <a:r>
+              <a:rPr sz="1200" b="0">
                 <a:solidFill>
                   <a:srgbClr val="212D38"/>
                 </a:solidFill>
@@ -7322,7 +8697,7 @@
             <a:avLst/>
           </a:prstGeom>
           <a:solidFill>
-            <a:srgbClr val="14532D"/>
+            <a:srgbClr val="184E34"/>
           </a:solidFill>
           <a:ln>
             <a:noFill/>
@@ -7358,8 +8733,8 @@
         </p:nvSpPr>
         <p:spPr>
           <a:xfrm>
-            <a:off x="640080" y="182880"/>
-            <a:ext cx="10972800" cy="411480"/>
+            <a:off x="640080" y="146304"/>
+            <a:ext cx="10972800" cy="384048"/>
           </a:xfrm>
           <a:prstGeom prst="rect">
             <a:avLst/>
@@ -7367,14 +8742,24 @@
           <a:noFill/>
         </p:spPr>
         <p:txBody>
-          <a:bodyPr wrap="none">
+          <a:bodyPr wrap="square" lIns="18288" rIns="18288" tIns="9144" bIns="9144" anchor="t">
             <a:spAutoFit/>
           </a:bodyPr>
           <a:lstStyle/>
           <a:p>
-            <a:pPr algn="l"/>
-            <a:r>
-              <a:rPr sz="3000" b="1">
+            <a:pPr algn="l">
+              <a:lnSpc>
+                <a:spcPct val="112000"/>
+              </a:lnSpc>
+              <a:spcBef>
+                <a:spcPts val="0"/>
+              </a:spcBef>
+              <a:spcAft>
+                <a:spcPts val="0"/>
+              </a:spcAft>
+            </a:pPr>
+            <a:r>
+              <a:rPr sz="2800" b="1">
                 <a:solidFill>
                   <a:srgbClr val="FFFFFF"/>
                 </a:solidFill>
@@ -7393,8 +8778,8 @@
         </p:nvSpPr>
         <p:spPr>
           <a:xfrm>
-            <a:off x="640080" y="566928"/>
-            <a:ext cx="10972800" cy="274320"/>
+            <a:off x="640080" y="530352"/>
+            <a:ext cx="10972800" cy="256032"/>
           </a:xfrm>
           <a:prstGeom prst="rect">
             <a:avLst/>
@@ -7402,16 +8787,26 @@
           <a:noFill/>
         </p:spPr>
         <p:txBody>
-          <a:bodyPr wrap="none">
+          <a:bodyPr wrap="square" lIns="18288" rIns="18288" tIns="9144" bIns="9144" anchor="t">
             <a:spAutoFit/>
           </a:bodyPr>
           <a:lstStyle/>
           <a:p>
-            <a:pPr algn="l"/>
-            <a:r>
-              <a:rPr sz="1500" b="0">
-                <a:solidFill>
-                  <a:srgbClr val="DCEBE0"/>
+            <a:pPr algn="l">
+              <a:lnSpc>
+                <a:spcPct val="112000"/>
+              </a:lnSpc>
+              <a:spcBef>
+                <a:spcPts val="0"/>
+              </a:spcBef>
+              <a:spcAft>
+                <a:spcPts val="0"/>
+              </a:spcAft>
+            </a:pPr>
+            <a:r>
+              <a:rPr sz="1400" b="0">
+                <a:solidFill>
+                  <a:srgbClr val="DDEAE2"/>
                 </a:solidFill>
                 <a:latin typeface="Segoe UI"/>
               </a:rPr>
@@ -7428,8 +8823,8 @@
         </p:nvSpPr>
         <p:spPr>
           <a:xfrm>
-            <a:off x="868680" y="1371600"/>
-            <a:ext cx="10698480" cy="868680"/>
+            <a:off x="685800" y="1234440"/>
+            <a:ext cx="10972800" cy="868680"/>
           </a:xfrm>
           <a:prstGeom prst="roundRect">
             <a:avLst/>
@@ -7439,7 +8834,7 @@
           </a:solidFill>
           <a:ln>
             <a:solidFill>
-              <a:srgbClr val="D0D9D2"/>
+              <a:srgbClr val="CED8D1"/>
             </a:solidFill>
           </a:ln>
         </p:spPr>
@@ -7467,20 +8862,20 @@
       </p:sp>
       <p:sp>
         <p:nvSpPr>
-          <p:cNvPr id="6" name="Chevron 5"/>
+          <p:cNvPr id="6" name="Oval 5"/>
           <p:cNvSpPr/>
           <p:nvPr/>
         </p:nvSpPr>
         <p:spPr>
           <a:xfrm>
-            <a:off x="1005840" y="1527048"/>
-            <a:ext cx="731520" cy="548640"/>
-          </a:xfrm>
-          <a:prstGeom prst="chevron">
+            <a:off x="914400" y="1417320"/>
+            <a:ext cx="438912" cy="438912"/>
+          </a:xfrm>
+          <a:prstGeom prst="ellipse">
             <a:avLst/>
           </a:prstGeom>
           <a:solidFill>
-            <a:srgbClr val="2E7D32"/>
+            <a:srgbClr val="2C7A4E"/>
           </a:solidFill>
           <a:ln>
             <a:noFill/>
@@ -7516,8 +8911,8 @@
         </p:nvSpPr>
         <p:spPr>
           <a:xfrm>
-            <a:off x="1234440" y="1636776"/>
-            <a:ext cx="228600" cy="228600"/>
+            <a:off x="914400" y="1517904"/>
+            <a:ext cx="438912" cy="182880"/>
           </a:xfrm>
           <a:prstGeom prst="rect">
             <a:avLst/>
@@ -7525,14 +8920,24 @@
           <a:noFill/>
         </p:spPr>
         <p:txBody>
-          <a:bodyPr wrap="none">
+          <a:bodyPr wrap="square" lIns="18288" rIns="18288" tIns="9144" bIns="9144" anchor="t">
             <a:spAutoFit/>
           </a:bodyPr>
           <a:lstStyle/>
           <a:p>
-            <a:pPr algn="ctr"/>
-            <a:r>
-              <a:rPr sz="1200" b="1">
+            <a:pPr algn="ctr">
+              <a:lnSpc>
+                <a:spcPct val="112000"/>
+              </a:lnSpc>
+              <a:spcBef>
+                <a:spcPts val="0"/>
+              </a:spcBef>
+              <a:spcAft>
+                <a:spcPts val="0"/>
+              </a:spcAft>
+            </a:pPr>
+            <a:r>
+              <a:rPr sz="1000" b="1">
                 <a:solidFill>
                   <a:srgbClr val="FFFFFF"/>
                 </a:solidFill>
@@ -7551,8 +8956,8 @@
         </p:nvSpPr>
         <p:spPr>
           <a:xfrm>
-            <a:off x="1874519" y="1554480"/>
-            <a:ext cx="9418320" cy="530352"/>
+            <a:off x="1508760" y="1417320"/>
+            <a:ext cx="9966960" cy="457200"/>
           </a:xfrm>
           <a:prstGeom prst="rect">
             <a:avLst/>
@@ -7560,12 +8965,22 @@
           <a:noFill/>
         </p:spPr>
         <p:txBody>
-          <a:bodyPr wrap="none">
+          <a:bodyPr wrap="square" lIns="18288" rIns="18288" tIns="9144" bIns="9144" anchor="t">
             <a:spAutoFit/>
           </a:bodyPr>
           <a:lstStyle/>
           <a:p>
-            <a:pPr algn="l"/>
+            <a:pPr algn="l">
+              <a:lnSpc>
+                <a:spcPct val="112000"/>
+              </a:lnSpc>
+              <a:spcBef>
+                <a:spcPts val="0"/>
+              </a:spcBef>
+              <a:spcAft>
+                <a:spcPts val="0"/>
+              </a:spcAft>
+            </a:pPr>
             <a:r>
               <a:rPr sz="1200" b="0">
                 <a:solidFill>
@@ -7573,7 +8988,7 @@
                 </a:solidFill>
                 <a:latin typeface="Segoe UI"/>
               </a:rPr>
-              <a:t>1. Provisioning: Launch a staging server and secure it behind a reverse proxy (like Nginx) with SSL.</a:t>
+              <a:t>Provisioning: Launch a staging server and secure it behind a reverse proxy (like Nginx) with SSL.</a:t>
             </a:r>
           </a:p>
         </p:txBody>
@@ -7586,8 +9001,8 @@
         </p:nvSpPr>
         <p:spPr>
           <a:xfrm>
-            <a:off x="868680" y="2423160"/>
-            <a:ext cx="10698480" cy="868680"/>
+            <a:off x="685800" y="2313432"/>
+            <a:ext cx="10972800" cy="868680"/>
           </a:xfrm>
           <a:prstGeom prst="roundRect">
             <a:avLst/>
@@ -7597,7 +9012,7 @@
           </a:solidFill>
           <a:ln>
             <a:solidFill>
-              <a:srgbClr val="D0D9D2"/>
+              <a:srgbClr val="CED8D1"/>
             </a:solidFill>
           </a:ln>
         </p:spPr>
@@ -7625,20 +9040,20 @@
       </p:sp>
       <p:sp>
         <p:nvSpPr>
-          <p:cNvPr id="10" name="Chevron 9"/>
+          <p:cNvPr id="10" name="Oval 9"/>
           <p:cNvSpPr/>
           <p:nvPr/>
         </p:nvSpPr>
         <p:spPr>
           <a:xfrm>
-            <a:off x="1005840" y="2578608"/>
-            <a:ext cx="731520" cy="548640"/>
-          </a:xfrm>
-          <a:prstGeom prst="chevron">
+            <a:off x="914400" y="2496312"/>
+            <a:ext cx="438912" cy="438912"/>
+          </a:xfrm>
+          <a:prstGeom prst="ellipse">
             <a:avLst/>
           </a:prstGeom>
           <a:solidFill>
-            <a:srgbClr val="2E7D32"/>
+            <a:srgbClr val="2C7A4E"/>
           </a:solidFill>
           <a:ln>
             <a:noFill/>
@@ -7674,8 +9089,8 @@
         </p:nvSpPr>
         <p:spPr>
           <a:xfrm>
-            <a:off x="1234440" y="2688336"/>
-            <a:ext cx="228600" cy="228600"/>
+            <a:off x="914400" y="2596896"/>
+            <a:ext cx="438912" cy="182880"/>
           </a:xfrm>
           <a:prstGeom prst="rect">
             <a:avLst/>
@@ -7683,14 +9098,24 @@
           <a:noFill/>
         </p:spPr>
         <p:txBody>
-          <a:bodyPr wrap="none">
+          <a:bodyPr wrap="square" lIns="18288" rIns="18288" tIns="9144" bIns="9144" anchor="t">
             <a:spAutoFit/>
           </a:bodyPr>
           <a:lstStyle/>
           <a:p>
-            <a:pPr algn="ctr"/>
-            <a:r>
-              <a:rPr sz="1200" b="1">
+            <a:pPr algn="ctr">
+              <a:lnSpc>
+                <a:spcPct val="112000"/>
+              </a:lnSpc>
+              <a:spcBef>
+                <a:spcPts val="0"/>
+              </a:spcBef>
+              <a:spcAft>
+                <a:spcPts val="0"/>
+              </a:spcAft>
+            </a:pPr>
+            <a:r>
+              <a:rPr sz="1000" b="1">
                 <a:solidFill>
                   <a:srgbClr val="FFFFFF"/>
                 </a:solidFill>
@@ -7709,8 +9134,8 @@
         </p:nvSpPr>
         <p:spPr>
           <a:xfrm>
-            <a:off x="1874519" y="2606040"/>
-            <a:ext cx="9418320" cy="530352"/>
+            <a:off x="1508760" y="2496312"/>
+            <a:ext cx="9966960" cy="457200"/>
           </a:xfrm>
           <a:prstGeom prst="rect">
             <a:avLst/>
@@ -7718,12 +9143,22 @@
           <a:noFill/>
         </p:spPr>
         <p:txBody>
-          <a:bodyPr wrap="none">
+          <a:bodyPr wrap="square" lIns="18288" rIns="18288" tIns="9144" bIns="9144" anchor="t">
             <a:spAutoFit/>
           </a:bodyPr>
           <a:lstStyle/>
           <a:p>
-            <a:pPr algn="l"/>
+            <a:pPr algn="l">
+              <a:lnSpc>
+                <a:spcPct val="112000"/>
+              </a:lnSpc>
+              <a:spcBef>
+                <a:spcPts val="0"/>
+              </a:spcBef>
+              <a:spcAft>
+                <a:spcPts val="0"/>
+              </a:spcAft>
+            </a:pPr>
             <a:r>
               <a:rPr sz="1200" b="0">
                 <a:solidFill>
@@ -7731,7 +9166,7 @@
                 </a:solidFill>
                 <a:latin typeface="Segoe UI"/>
               </a:rPr>
-              <a:t>2. Security: Generate specific API keys restricting who can read data and who can write data.</a:t>
+              <a:t>Security: Generate specific API keys restricting who can read data and who can write data.</a:t>
             </a:r>
           </a:p>
         </p:txBody>
@@ -7744,8 +9179,8 @@
         </p:nvSpPr>
         <p:spPr>
           <a:xfrm>
-            <a:off x="868680" y="3474720"/>
-            <a:ext cx="10698480" cy="868680"/>
+            <a:off x="685800" y="3392424"/>
+            <a:ext cx="10972800" cy="868680"/>
           </a:xfrm>
           <a:prstGeom prst="roundRect">
             <a:avLst/>
@@ -7755,7 +9190,7 @@
           </a:solidFill>
           <a:ln>
             <a:solidFill>
-              <a:srgbClr val="D0D9D2"/>
+              <a:srgbClr val="CED8D1"/>
             </a:solidFill>
           </a:ln>
         </p:spPr>
@@ -7783,20 +9218,20 @@
       </p:sp>
       <p:sp>
         <p:nvSpPr>
-          <p:cNvPr id="14" name="Chevron 13"/>
+          <p:cNvPr id="14" name="Oval 13"/>
           <p:cNvSpPr/>
           <p:nvPr/>
         </p:nvSpPr>
         <p:spPr>
           <a:xfrm>
-            <a:off x="1005840" y="3630168"/>
-            <a:ext cx="731520" cy="548640"/>
-          </a:xfrm>
-          <a:prstGeom prst="chevron">
+            <a:off x="914400" y="3575304"/>
+            <a:ext cx="438912" cy="438912"/>
+          </a:xfrm>
+          <a:prstGeom prst="ellipse">
             <a:avLst/>
           </a:prstGeom>
           <a:solidFill>
-            <a:srgbClr val="2E7D32"/>
+            <a:srgbClr val="2C7A4E"/>
           </a:solidFill>
           <a:ln>
             <a:noFill/>
@@ -7832,8 +9267,8 @@
         </p:nvSpPr>
         <p:spPr>
           <a:xfrm>
-            <a:off x="1234440" y="3739896"/>
-            <a:ext cx="228600" cy="228600"/>
+            <a:off x="914400" y="3675887"/>
+            <a:ext cx="438912" cy="182880"/>
           </a:xfrm>
           <a:prstGeom prst="rect">
             <a:avLst/>
@@ -7841,14 +9276,24 @@
           <a:noFill/>
         </p:spPr>
         <p:txBody>
-          <a:bodyPr wrap="none">
+          <a:bodyPr wrap="square" lIns="18288" rIns="18288" tIns="9144" bIns="9144" anchor="t">
             <a:spAutoFit/>
           </a:bodyPr>
           <a:lstStyle/>
           <a:p>
-            <a:pPr algn="ctr"/>
-            <a:r>
-              <a:rPr sz="1200" b="1">
+            <a:pPr algn="ctr">
+              <a:lnSpc>
+                <a:spcPct val="112000"/>
+              </a:lnSpc>
+              <a:spcBef>
+                <a:spcPts val="0"/>
+              </a:spcBef>
+              <a:spcAft>
+                <a:spcPts val="0"/>
+              </a:spcAft>
+            </a:pPr>
+            <a:r>
+              <a:rPr sz="1000" b="1">
                 <a:solidFill>
                   <a:srgbClr val="FFFFFF"/>
                 </a:solidFill>
@@ -7867,8 +9312,8 @@
         </p:nvSpPr>
         <p:spPr>
           <a:xfrm>
-            <a:off x="1874519" y="3657600"/>
-            <a:ext cx="9418320" cy="530352"/>
+            <a:off x="1508760" y="3575304"/>
+            <a:ext cx="9966960" cy="457200"/>
           </a:xfrm>
           <a:prstGeom prst="rect">
             <a:avLst/>
@@ -7876,12 +9321,22 @@
           <a:noFill/>
         </p:spPr>
         <p:txBody>
-          <a:bodyPr wrap="none">
+          <a:bodyPr wrap="square" lIns="18288" rIns="18288" tIns="9144" bIns="9144" anchor="t">
             <a:spAutoFit/>
           </a:bodyPr>
           <a:lstStyle/>
           <a:p>
-            <a:pPr algn="l"/>
+            <a:pPr algn="l">
+              <a:lnSpc>
+                <a:spcPct val="112000"/>
+              </a:lnSpc>
+              <a:spcBef>
+                <a:spcPts val="0"/>
+              </a:spcBef>
+              <a:spcAft>
+                <a:spcPts val="0"/>
+              </a:spcAft>
+            </a:pPr>
             <a:r>
               <a:rPr sz="1200" b="0">
                 <a:solidFill>
@@ -7889,7 +9344,7 @@
                 </a:solidFill>
                 <a:latin typeface="Segoe UI"/>
               </a:rPr>
-              <a:t>3. Configuration: Define strictly which data fields are searchable and which are filterable to preserve RAM.</a:t>
+              <a:t>Configuration: Define strictly which data fields are searchable and which are filterable to preserve RAM.</a:t>
             </a:r>
           </a:p>
         </p:txBody>
@@ -7902,8 +9357,8 @@
         </p:nvSpPr>
         <p:spPr>
           <a:xfrm>
-            <a:off x="868680" y="4526279"/>
-            <a:ext cx="10698480" cy="868680"/>
+            <a:off x="685800" y="4471416"/>
+            <a:ext cx="10972800" cy="868680"/>
           </a:xfrm>
           <a:prstGeom prst="roundRect">
             <a:avLst/>
@@ -7913,7 +9368,7 @@
           </a:solidFill>
           <a:ln>
             <a:solidFill>
-              <a:srgbClr val="D0D9D2"/>
+              <a:srgbClr val="CED8D1"/>
             </a:solidFill>
           </a:ln>
         </p:spPr>
@@ -7941,20 +9396,20 @@
       </p:sp>
       <p:sp>
         <p:nvSpPr>
-          <p:cNvPr id="18" name="Chevron 17"/>
+          <p:cNvPr id="18" name="Oval 17"/>
           <p:cNvSpPr/>
           <p:nvPr/>
         </p:nvSpPr>
         <p:spPr>
           <a:xfrm>
-            <a:off x="1005840" y="4681727"/>
-            <a:ext cx="731520" cy="548640"/>
-          </a:xfrm>
-          <a:prstGeom prst="chevron">
+            <a:off x="914400" y="4654296"/>
+            <a:ext cx="438912" cy="438912"/>
+          </a:xfrm>
+          <a:prstGeom prst="ellipse">
             <a:avLst/>
           </a:prstGeom>
           <a:solidFill>
-            <a:srgbClr val="2E7D32"/>
+            <a:srgbClr val="2C7A4E"/>
           </a:solidFill>
           <a:ln>
             <a:noFill/>
@@ -7990,8 +9445,8 @@
         </p:nvSpPr>
         <p:spPr>
           <a:xfrm>
-            <a:off x="1234440" y="4791455"/>
-            <a:ext cx="228600" cy="228600"/>
+            <a:off x="914400" y="4754880"/>
+            <a:ext cx="438912" cy="182880"/>
           </a:xfrm>
           <a:prstGeom prst="rect">
             <a:avLst/>
@@ -7999,14 +9454,24 @@
           <a:noFill/>
         </p:spPr>
         <p:txBody>
-          <a:bodyPr wrap="none">
+          <a:bodyPr wrap="square" lIns="18288" rIns="18288" tIns="9144" bIns="9144" anchor="t">
             <a:spAutoFit/>
           </a:bodyPr>
           <a:lstStyle/>
           <a:p>
-            <a:pPr algn="ctr"/>
-            <a:r>
-              <a:rPr sz="1200" b="1">
+            <a:pPr algn="ctr">
+              <a:lnSpc>
+                <a:spcPct val="112000"/>
+              </a:lnSpc>
+              <a:spcBef>
+                <a:spcPts val="0"/>
+              </a:spcBef>
+              <a:spcAft>
+                <a:spcPts val="0"/>
+              </a:spcAft>
+            </a:pPr>
+            <a:r>
+              <a:rPr sz="1000" b="1">
                 <a:solidFill>
                   <a:srgbClr val="FFFFFF"/>
                 </a:solidFill>
@@ -8025,8 +9490,8 @@
         </p:nvSpPr>
         <p:spPr>
           <a:xfrm>
-            <a:off x="1874519" y="4709159"/>
-            <a:ext cx="9418320" cy="530352"/>
+            <a:off x="1508760" y="4654296"/>
+            <a:ext cx="9966960" cy="457200"/>
           </a:xfrm>
           <a:prstGeom prst="rect">
             <a:avLst/>
@@ -8034,12 +9499,22 @@
           <a:noFill/>
         </p:spPr>
         <p:txBody>
-          <a:bodyPr wrap="none">
+          <a:bodyPr wrap="square" lIns="18288" rIns="18288" tIns="9144" bIns="9144" anchor="t">
             <a:spAutoFit/>
           </a:bodyPr>
           <a:lstStyle/>
           <a:p>
-            <a:pPr algn="l"/>
+            <a:pPr algn="l">
+              <a:lnSpc>
+                <a:spcPct val="112000"/>
+              </a:lnSpc>
+              <a:spcBef>
+                <a:spcPts val="0"/>
+              </a:spcBef>
+              <a:spcAft>
+                <a:spcPts val="0"/>
+              </a:spcAft>
+            </a:pPr>
             <a:r>
               <a:rPr sz="1200" b="0">
                 <a:solidFill>
@@ -8047,7 +9522,7 @@
                 </a:solidFill>
                 <a:latin typeface="Segoe UI"/>
               </a:rPr>
-              <a:t>4. Ingestion: Build the synchronization middleware using Python or Node to push batch updates from our primary database.</a:t>
+              <a:t>Ingestion: Build the synchronization middleware using Python or Node to push batch updates from our primary database.</a:t>
             </a:r>
           </a:p>
         </p:txBody>
@@ -8060,8 +9535,8 @@
         </p:nvSpPr>
         <p:spPr>
           <a:xfrm>
-            <a:off x="868680" y="5577840"/>
-            <a:ext cx="10698480" cy="868680"/>
+            <a:off x="685800" y="5550408"/>
+            <a:ext cx="10972800" cy="868680"/>
           </a:xfrm>
           <a:prstGeom prst="roundRect">
             <a:avLst/>
@@ -8071,7 +9546,7 @@
           </a:solidFill>
           <a:ln>
             <a:solidFill>
-              <a:srgbClr val="D0D9D2"/>
+              <a:srgbClr val="CED8D1"/>
             </a:solidFill>
           </a:ln>
         </p:spPr>
@@ -8099,20 +9574,20 @@
       </p:sp>
       <p:sp>
         <p:nvSpPr>
-          <p:cNvPr id="22" name="Chevron 21"/>
+          <p:cNvPr id="22" name="Oval 21"/>
           <p:cNvSpPr/>
           <p:nvPr/>
         </p:nvSpPr>
         <p:spPr>
           <a:xfrm>
-            <a:off x="1005840" y="5733288"/>
-            <a:ext cx="731520" cy="548640"/>
-          </a:xfrm>
-          <a:prstGeom prst="chevron">
+            <a:off x="914400" y="5733288"/>
+            <a:ext cx="438912" cy="438912"/>
+          </a:xfrm>
+          <a:prstGeom prst="ellipse">
             <a:avLst/>
           </a:prstGeom>
           <a:solidFill>
-            <a:srgbClr val="2E7D32"/>
+            <a:srgbClr val="2C7A4E"/>
           </a:solidFill>
           <a:ln>
             <a:noFill/>
@@ -8148,8 +9623,8 @@
         </p:nvSpPr>
         <p:spPr>
           <a:xfrm>
-            <a:off x="1234440" y="5843016"/>
-            <a:ext cx="228600" cy="228600"/>
+            <a:off x="914400" y="5833872"/>
+            <a:ext cx="438912" cy="182880"/>
           </a:xfrm>
           <a:prstGeom prst="rect">
             <a:avLst/>
@@ -8157,14 +9632,24 @@
           <a:noFill/>
         </p:spPr>
         <p:txBody>
-          <a:bodyPr wrap="none">
+          <a:bodyPr wrap="square" lIns="18288" rIns="18288" tIns="9144" bIns="9144" anchor="t">
             <a:spAutoFit/>
           </a:bodyPr>
           <a:lstStyle/>
           <a:p>
-            <a:pPr algn="ctr"/>
-            <a:r>
-              <a:rPr sz="1200" b="1">
+            <a:pPr algn="ctr">
+              <a:lnSpc>
+                <a:spcPct val="112000"/>
+              </a:lnSpc>
+              <a:spcBef>
+                <a:spcPts val="0"/>
+              </a:spcBef>
+              <a:spcAft>
+                <a:spcPts val="0"/>
+              </a:spcAft>
+            </a:pPr>
+            <a:r>
+              <a:rPr sz="1000" b="1">
                 <a:solidFill>
                   <a:srgbClr val="FFFFFF"/>
                 </a:solidFill>
@@ -8183,8 +9668,8 @@
         </p:nvSpPr>
         <p:spPr>
           <a:xfrm>
-            <a:off x="1874519" y="5760720"/>
-            <a:ext cx="9418320" cy="530352"/>
+            <a:off x="1508760" y="5733288"/>
+            <a:ext cx="9966960" cy="457200"/>
           </a:xfrm>
           <a:prstGeom prst="rect">
             <a:avLst/>
@@ -8192,12 +9677,22 @@
           <a:noFill/>
         </p:spPr>
         <p:txBody>
-          <a:bodyPr wrap="none">
+          <a:bodyPr wrap="square" lIns="18288" rIns="18288" tIns="9144" bIns="9144" anchor="t">
             <a:spAutoFit/>
           </a:bodyPr>
           <a:lstStyle/>
           <a:p>
-            <a:pPr algn="l"/>
+            <a:pPr algn="l">
+              <a:lnSpc>
+                <a:spcPct val="112000"/>
+              </a:lnSpc>
+              <a:spcBef>
+                <a:spcPts val="0"/>
+              </a:spcBef>
+              <a:spcAft>
+                <a:spcPts val="0"/>
+              </a:spcAft>
+            </a:pPr>
             <a:r>
               <a:rPr sz="1200" b="0">
                 <a:solidFill>
@@ -8205,7 +9700,7 @@
                 </a:solidFill>
                 <a:latin typeface="Segoe UI"/>
               </a:rPr>
-              <a:t>5. UI Integration: Connect our front end portals using standard instant search interface libraries.</a:t>
+              <a:t>UI Integration: Connect our front end portals using standard instant search interface libraries.</a:t>
             </a:r>
           </a:p>
         </p:txBody>
@@ -8243,7 +9738,7 @@
             <a:avLst/>
           </a:prstGeom>
           <a:solidFill>
-            <a:srgbClr val="14532D"/>
+            <a:srgbClr val="184E34"/>
           </a:solidFill>
           <a:ln>
             <a:noFill/>
@@ -8279,8 +9774,8 @@
         </p:nvSpPr>
         <p:spPr>
           <a:xfrm>
-            <a:off x="640080" y="182880"/>
-            <a:ext cx="10972800" cy="411480"/>
+            <a:off x="640080" y="146304"/>
+            <a:ext cx="10972800" cy="384048"/>
           </a:xfrm>
           <a:prstGeom prst="rect">
             <a:avLst/>
@@ -8288,14 +9783,24 @@
           <a:noFill/>
         </p:spPr>
         <p:txBody>
-          <a:bodyPr wrap="none">
+          <a:bodyPr wrap="square" lIns="18288" rIns="18288" tIns="9144" bIns="9144" anchor="t">
             <a:spAutoFit/>
           </a:bodyPr>
           <a:lstStyle/>
           <a:p>
-            <a:pPr algn="l"/>
-            <a:r>
-              <a:rPr sz="3000" b="1">
+            <a:pPr algn="l">
+              <a:lnSpc>
+                <a:spcPct val="112000"/>
+              </a:lnSpc>
+              <a:spcBef>
+                <a:spcPts val="0"/>
+              </a:spcBef>
+              <a:spcAft>
+                <a:spcPts val="0"/>
+              </a:spcAft>
+            </a:pPr>
+            <a:r>
+              <a:rPr sz="2800" b="1">
                 <a:solidFill>
                   <a:srgbClr val="FFFFFF"/>
                 </a:solidFill>
@@ -8314,8 +9819,8 @@
         </p:nvSpPr>
         <p:spPr>
           <a:xfrm>
-            <a:off x="640080" y="566928"/>
-            <a:ext cx="10972800" cy="274320"/>
+            <a:off x="640080" y="530352"/>
+            <a:ext cx="10972800" cy="256032"/>
           </a:xfrm>
           <a:prstGeom prst="rect">
             <a:avLst/>
@@ -8323,16 +9828,26 @@
           <a:noFill/>
         </p:spPr>
         <p:txBody>
-          <a:bodyPr wrap="none">
+          <a:bodyPr wrap="square" lIns="18288" rIns="18288" tIns="9144" bIns="9144" anchor="t">
             <a:spAutoFit/>
           </a:bodyPr>
           <a:lstStyle/>
           <a:p>
-            <a:pPr algn="l"/>
-            <a:r>
-              <a:rPr sz="1500" b="0">
-                <a:solidFill>
-                  <a:srgbClr val="DCEBE0"/>
+            <a:pPr algn="l">
+              <a:lnSpc>
+                <a:spcPct val="112000"/>
+              </a:lnSpc>
+              <a:spcBef>
+                <a:spcPts val="0"/>
+              </a:spcBef>
+              <a:spcAft>
+                <a:spcPts val="0"/>
+              </a:spcAft>
+            </a:pPr>
+            <a:r>
+              <a:rPr sz="1400" b="0">
+                <a:solidFill>
+                  <a:srgbClr val="DDEAE2"/>
                 </a:solidFill>
                 <a:latin typeface="Segoe UI"/>
               </a:rPr>
@@ -8349,18 +9864,18 @@
         </p:nvSpPr>
         <p:spPr>
           <a:xfrm>
-            <a:off x="914400" y="1737360"/>
-            <a:ext cx="10332720" cy="3566160"/>
+            <a:off x="914400" y="1645920"/>
+            <a:ext cx="10332720" cy="3657600"/>
           </a:xfrm>
           <a:prstGeom prst="roundRect">
             <a:avLst/>
           </a:prstGeom>
           <a:solidFill>
-            <a:srgbClr val="F5F9F6"/>
+            <a:srgbClr val="F5F8F6"/>
           </a:solidFill>
           <a:ln>
             <a:solidFill>
-              <a:srgbClr val="D0D9D2"/>
+              <a:srgbClr val="CED8D1"/>
             </a:solidFill>
           </a:ln>
         </p:spPr>
@@ -8394,8 +9909,8 @@
         </p:nvSpPr>
         <p:spPr>
           <a:xfrm>
-            <a:off x="1371600" y="2286000"/>
-            <a:ext cx="9418320" cy="2286000"/>
+            <a:off x="1371600" y="2194560"/>
+            <a:ext cx="9326880" cy="1828800"/>
           </a:xfrm>
           <a:prstGeom prst="rect">
             <a:avLst/>
@@ -8403,16 +9918,26 @@
           <a:noFill/>
         </p:spPr>
         <p:txBody>
-          <a:bodyPr wrap="none">
+          <a:bodyPr wrap="square" lIns="18288" rIns="18288" tIns="9144" bIns="9144" anchor="t">
             <a:spAutoFit/>
           </a:bodyPr>
           <a:lstStyle/>
           <a:p>
-            <a:pPr algn="ctr"/>
-            <a:r>
-              <a:rPr sz="2200" b="1">
-                <a:solidFill>
-                  <a:srgbClr val="14532D"/>
+            <a:pPr algn="ctr">
+              <a:lnSpc>
+                <a:spcPct val="112000"/>
+              </a:lnSpc>
+              <a:spcBef>
+                <a:spcPts val="0"/>
+              </a:spcBef>
+              <a:spcAft>
+                <a:spcPts val="0"/>
+              </a:spcAft>
+            </a:pPr>
+            <a:r>
+              <a:rPr sz="2400" b="1">
+                <a:solidFill>
+                  <a:srgbClr val="184E34"/>
                 </a:solidFill>
                 <a:latin typeface="Segoe UI"/>
               </a:rPr>
@@ -8429,8 +9954,8 @@
         </p:nvSpPr>
         <p:spPr>
           <a:xfrm>
-            <a:off x="1371600" y="4754880"/>
-            <a:ext cx="9418320" cy="548640"/>
+            <a:off x="1371600" y="4572000"/>
+            <a:ext cx="9326880" cy="640080"/>
           </a:xfrm>
           <a:prstGeom prst="rect">
             <a:avLst/>
@@ -8438,16 +9963,26 @@
           <a:noFill/>
         </p:spPr>
         <p:txBody>
-          <a:bodyPr wrap="none">
+          <a:bodyPr wrap="square" lIns="18288" rIns="18288" tIns="9144" bIns="9144" anchor="t">
             <a:spAutoFit/>
           </a:bodyPr>
           <a:lstStyle/>
           <a:p>
-            <a:pPr algn="ctr"/>
+            <a:pPr algn="ctr">
+              <a:lnSpc>
+                <a:spcPct val="112000"/>
+              </a:lnSpc>
+              <a:spcBef>
+                <a:spcPts val="0"/>
+              </a:spcBef>
+              <a:spcAft>
+                <a:spcPts val="0"/>
+              </a:spcAft>
+            </a:pPr>
             <a:r>
               <a:rPr sz="1800" b="0">
                 <a:solidFill>
-                  <a:srgbClr val="8C6E55"/>
+                  <a:srgbClr val="78624E"/>
                 </a:solidFill>
                 <a:latin typeface="Segoe UI"/>
               </a:rPr>
